--- a/slides/sindicato_intelligence_tfm.pptx
+++ b/slides/sindicato_intelligence_tfm.pptx
@@ -2,22 +2,22 @@
 <file path=ppt/presentation.xml><?xml version="1.0" encoding="utf-8"?>
 <p:presentation xmlns:p="http://schemas.openxmlformats.org/presentationml/2006/main">
   <p:sldMasterIdLst>
-    <p:sldMasterId xmlns:r="http://schemas.openxmlformats.org/officeDocument/2006/relationships" id="2147483648" r:id="R9eb27f0d672842a8"/>
+    <p:sldMasterId xmlns:r="http://schemas.openxmlformats.org/officeDocument/2006/relationships" id="2147483648" r:id="R252edc4e79d44c40"/>
   </p:sldMasterIdLst>
   <p:notesMasterIdLst>
-    <p:notesMasterId xmlns:r="http://schemas.openxmlformats.org/officeDocument/2006/relationships" r:id="R7bc146e6e1274dd1"/>
+    <p:notesMasterId xmlns:r="http://schemas.openxmlformats.org/officeDocument/2006/relationships" r:id="Rf3c748c2baba4c56"/>
   </p:notesMasterIdLst>
   <p:sldIdLst>
-    <p:sldId xmlns:r="http://schemas.openxmlformats.org/officeDocument/2006/relationships" id="256" r:id="Rfb1c1f84feed4f2b"/>
-    <p:sldId xmlns:r="http://schemas.openxmlformats.org/officeDocument/2006/relationships" id="257" r:id="Rf00816f85e57410c"/>
-    <p:sldId xmlns:r="http://schemas.openxmlformats.org/officeDocument/2006/relationships" id="258" r:id="Rc39af68f9fc64512"/>
-    <p:sldId xmlns:r="http://schemas.openxmlformats.org/officeDocument/2006/relationships" id="259" r:id="R2f9d28b80e5b4625"/>
-    <p:sldId xmlns:r="http://schemas.openxmlformats.org/officeDocument/2006/relationships" id="260" r:id="Ra15bf809ba5442ac"/>
-    <p:sldId xmlns:r="http://schemas.openxmlformats.org/officeDocument/2006/relationships" id="261" r:id="Rd5c67e8b0f5547af"/>
-    <p:sldId xmlns:r="http://schemas.openxmlformats.org/officeDocument/2006/relationships" id="262" r:id="R8049fcd63be64753"/>
-    <p:sldId xmlns:r="http://schemas.openxmlformats.org/officeDocument/2006/relationships" id="263" r:id="R3135c911f50f469f"/>
-    <p:sldId xmlns:r="http://schemas.openxmlformats.org/officeDocument/2006/relationships" id="264" r:id="Rbb9df2dd143646bb"/>
-    <p:sldId xmlns:r="http://schemas.openxmlformats.org/officeDocument/2006/relationships" id="265" r:id="Rf1671d4671414b37"/>
+    <p:sldId xmlns:r="http://schemas.openxmlformats.org/officeDocument/2006/relationships" id="256" r:id="R5f87e11b219c4612"/>
+    <p:sldId xmlns:r="http://schemas.openxmlformats.org/officeDocument/2006/relationships" id="257" r:id="Rad38d58c215f459b"/>
+    <p:sldId xmlns:r="http://schemas.openxmlformats.org/officeDocument/2006/relationships" id="258" r:id="Rf95310b58bfd47b6"/>
+    <p:sldId xmlns:r="http://schemas.openxmlformats.org/officeDocument/2006/relationships" id="259" r:id="R86b2ef6e08214067"/>
+    <p:sldId xmlns:r="http://schemas.openxmlformats.org/officeDocument/2006/relationships" id="260" r:id="Ra519b8f82b9e4e02"/>
+    <p:sldId xmlns:r="http://schemas.openxmlformats.org/officeDocument/2006/relationships" id="261" r:id="Re0362f6e16b74ed5"/>
+    <p:sldId xmlns:r="http://schemas.openxmlformats.org/officeDocument/2006/relationships" id="262" r:id="R9bc99ffef57d4fed"/>
+    <p:sldId xmlns:r="http://schemas.openxmlformats.org/officeDocument/2006/relationships" id="263" r:id="R44591339b1124fd8"/>
+    <p:sldId xmlns:r="http://schemas.openxmlformats.org/officeDocument/2006/relationships" id="264" r:id="Rf1b45f3f9f5048de"/>
+    <p:sldId xmlns:r="http://schemas.openxmlformats.org/officeDocument/2006/relationships" id="265" r:id="Rcce04ac73d7049d1"/>
   </p:sldIdLst>
   <p:sldSz cx="12192000" cy="6858000"/>
   <p:notesSz cx="6858000" cy="9144000"/>
@@ -736,7 +736,7 @@
           <a:lstStyle xmlns:a="http://schemas.openxmlformats.org/drawingml/2006/main"/>
           <a:p xmlns:a="http://schemas.openxmlformats.org/drawingml/2006/main">
             <a:r>
-              <a:t>Recorrer News, Event, Analysis, Content y Publication. Reforzar que Event es el aggregate root principal.</a:t>
+              <a:t>Explicar que n8n solo captura. Toda regla, scheduler, IA, seguridad y publicación vive en Spring Boot.</a:t>
             </a:r>
           </a:p>
           <a:p xmlns:a="http://schemas.openxmlformats.org/drawingml/2006/main">
@@ -751,12 +751,12 @@
           </a:p>
           <a:p xmlns:a="http://schemas.openxmlformats.org/drawingml/2006/main">
             <a:r>
-              <a:t>- docs/Documentacion Proyecto/Documento 17 – Modelo de Dominio (DDD).md</a:t>
-            </a:r>
-          </a:p>
-          <a:p xmlns:a="http://schemas.openxmlformats.org/drawingml/2006/main">
-            <a:r>
-              <a:t>- docs/Documentacion Proyecto/Documento 30 – MVP Técnico Ejecutable.md</a:t>
+              <a:t>- docs/Documentacion Proyecto/Documento 18 – Estructura Spring Boot.md</a:t>
+            </a:r>
+          </a:p>
+          <a:p xmlns:a="http://schemas.openxmlformats.org/drawingml/2006/main">
+            <a:r>
+              <a:t>- docs/Documentacion Proyecto/Documento 09 V2.0 - Arquitectura de Integraciones y Workflows n8n.md</a:t>
             </a:r>
           </a:p>
           <a:p xmlns:a="http://schemas.openxmlformats.org/drawingml/2006/main">
@@ -831,7 +831,7 @@
           <a:lstStyle xmlns:a="http://schemas.openxmlformats.org/drawingml/2006/main"/>
           <a:p xmlns:a="http://schemas.openxmlformats.org/drawingml/2006/main">
             <a:r>
-              <a:t>Explicar que n8n solo captura. Toda regla, scheduler, IA, seguridad y publicación vive en Spring Boot.</a:t>
+              <a:t>Recorrer News, Event, Analysis, Content y Publication. Reforzar que Event es el aggregate root principal.</a:t>
             </a:r>
           </a:p>
           <a:p xmlns:a="http://schemas.openxmlformats.org/drawingml/2006/main">
@@ -846,12 +846,12 @@
           </a:p>
           <a:p xmlns:a="http://schemas.openxmlformats.org/drawingml/2006/main">
             <a:r>
-              <a:t>- docs/Documentacion Proyecto/Documento 18 – Estructura Spring Boot.md</a:t>
-            </a:r>
-          </a:p>
-          <a:p xmlns:a="http://schemas.openxmlformats.org/drawingml/2006/main">
-            <a:r>
-              <a:t>- docs/Documentacion Proyecto/Documento 09 V2.0 - Arquitectura de Integraciones y Workflows n8n.md</a:t>
+              <a:t>- docs/Documentacion Proyecto/Documento 17 – Modelo de Dominio (DDD).md</a:t>
+            </a:r>
+          </a:p>
+          <a:p xmlns:a="http://schemas.openxmlformats.org/drawingml/2006/main">
+            <a:r>
+              <a:t>- docs/Documentacion Proyecto/Documento 30 – MVP Técnico Ejecutable.md</a:t>
             </a:r>
           </a:p>
           <a:p xmlns:a="http://schemas.openxmlformats.org/drawingml/2006/main">
@@ -1399,7 +1399,7 @@
   </p:cSld>
   <p:clrMap bg1="lt1" tx1="dk1" bg2="lt2" tx2="dk2" accent1="accent1" accent2="accent2" accent3="accent3" accent4="accent4" accent5="accent5" accent6="accent6" hlink="hlink" folHlink="folHlink"/>
   <p:sldLayoutIdLst>
-    <p:sldLayoutId xmlns:r="http://schemas.openxmlformats.org/officeDocument/2006/relationships" id="2147483649" r:id="Rfad92004ec09435e"/>
+    <p:sldLayoutId xmlns:r="http://schemas.openxmlformats.org/officeDocument/2006/relationships" id="2147483649" r:id="R0a334bd1b1184932"/>
   </p:sldLayoutIdLst>
   <p:txStyles>
     <p:titleStyle>
@@ -1950,7 +1950,7 @@
           <p:cNvPr id="8" name="cover-eyebrow">
             <a:extLst xmlns:a="http://schemas.openxmlformats.org/drawingml/2006/main">
               <a:ext uri="{FF2B5EF4-FFF2-40B4-BE49-F238E27FC236}">
-                <a16:creationId xmlns:a16="http://schemas.microsoft.com/office/drawing/2014/main" id="{7800CD88-4A2D-4F05-B0CE-0B322B757615}"/>
+                <a16:creationId xmlns:a16="http://schemas.microsoft.com/office/drawing/2014/main" id="{F0ED84D1-B0F4-460C-8597-3387FC48B353}"/>
               </a:ext>
             </a:extLst>
           </p:cNvPr>
@@ -2008,7 +2008,7 @@
           <p:cNvPr id="2" name="cover-title">
             <a:extLst xmlns:a="http://schemas.openxmlformats.org/drawingml/2006/main">
               <a:ext uri="{FF2B5EF4-FFF2-40B4-BE49-F238E27FC236}">
-                <a16:creationId xmlns:a16="http://schemas.microsoft.com/office/drawing/2014/main" id="{1D1923CA-7E51-449E-954F-D46C3EF23C47}"/>
+                <a16:creationId xmlns:a16="http://schemas.microsoft.com/office/drawing/2014/main" id="{38BC3250-3004-4BB5-8C62-D7CD333B87DB}"/>
               </a:ext>
             </a:extLst>
           </p:cNvPr>
@@ -2089,7 +2089,7 @@
           <p:cNvPr id="3" name="cover-subtitle">
             <a:extLst xmlns:a="http://schemas.openxmlformats.org/drawingml/2006/main">
               <a:ext uri="{FF2B5EF4-FFF2-40B4-BE49-F238E27FC236}">
-                <a16:creationId xmlns:a16="http://schemas.microsoft.com/office/drawing/2014/main" id="{43E68E60-5E8C-47D5-A39D-95A2CCF478DF}"/>
+                <a16:creationId xmlns:a16="http://schemas.microsoft.com/office/drawing/2014/main" id="{D9F7F91D-B30E-4F29-874C-0D2CA4EA6E30}"/>
               </a:ext>
             </a:extLst>
           </p:cNvPr>
@@ -2170,7 +2170,7 @@
           <p:cNvPr id="4" name="">
             <a:extLst xmlns:a="http://schemas.openxmlformats.org/drawingml/2006/main">
               <a:ext uri="{FF2B5EF4-FFF2-40B4-BE49-F238E27FC236}">
-                <a16:creationId xmlns:a16="http://schemas.microsoft.com/office/drawing/2014/main" id="{49F3DDD7-AE9C-43AA-BC98-A2B0A38E4C6A}"/>
+                <a16:creationId xmlns:a16="http://schemas.microsoft.com/office/drawing/2014/main" id="{F1A30895-0599-4B2B-855C-98A65778F851}"/>
               </a:ext>
             </a:extLst>
           </p:cNvPr>
@@ -2201,7 +2201,7 @@
           <p:cNvPr id="5" name="">
             <a:extLst xmlns:a="http://schemas.openxmlformats.org/drawingml/2006/main">
               <a:ext uri="{FF2B5EF4-FFF2-40B4-BE49-F238E27FC236}">
-                <a16:creationId xmlns:a16="http://schemas.microsoft.com/office/drawing/2014/main" id="{030B4926-CBE6-4B1D-9610-286F4FD4BAB8}"/>
+                <a16:creationId xmlns:a16="http://schemas.microsoft.com/office/drawing/2014/main" id="{CAEF9E62-6F53-4751-A635-2BEB9DA723E2}"/>
               </a:ext>
             </a:extLst>
           </p:cNvPr>
@@ -2232,7 +2232,7 @@
           <p:cNvPr id="6" name="cover-event">
             <a:extLst xmlns:a="http://schemas.openxmlformats.org/drawingml/2006/main">
               <a:ext uri="{FF2B5EF4-FFF2-40B4-BE49-F238E27FC236}">
-                <a16:creationId xmlns:a16="http://schemas.microsoft.com/office/drawing/2014/main" id="{1475E990-1438-4857-A87E-976F45DB1D91}"/>
+                <a16:creationId xmlns:a16="http://schemas.microsoft.com/office/drawing/2014/main" id="{3B3AA390-7D93-4C43-853E-1A575DF54934}"/>
               </a:ext>
             </a:extLst>
           </p:cNvPr>
@@ -2290,7 +2290,7 @@
           <p:cNvPr id="7" name="cover-flow">
             <a:extLst xmlns:a="http://schemas.openxmlformats.org/drawingml/2006/main">
               <a:ext uri="{FF2B5EF4-FFF2-40B4-BE49-F238E27FC236}">
-                <a16:creationId xmlns:a16="http://schemas.microsoft.com/office/drawing/2014/main" id="{1AB2BC46-258E-4026-88F0-652781A221D8}"/>
+                <a16:creationId xmlns:a16="http://schemas.microsoft.com/office/drawing/2014/main" id="{30F0B28D-446D-4A0D-849F-2BB9985BBB90}"/>
               </a:ext>
             </a:extLst>
           </p:cNvPr>
@@ -2484,7 +2484,7 @@
     </p:spTree>
     <p:extLst>
       <p:ext uri="{BB962C8B-B14F-4D97-AF65-F5344CB8AC3E}">
-        <p14:creationId xmlns:p14="http://schemas.microsoft.com/office/powerpoint/2010/main" val="1342608619"/>
+        <p14:creationId xmlns:p14="http://schemas.microsoft.com/office/powerpoint/2010/main" val="1705740104"/>
       </p:ext>
     </p:extLst>
   </p:cSld>
@@ -2515,7 +2515,7 @@
           <p:cNvPr id="8" name="">
             <a:extLst xmlns:a="http://schemas.openxmlformats.org/drawingml/2006/main">
               <a:ext uri="{FF2B5EF4-FFF2-40B4-BE49-F238E27FC236}">
-                <a16:creationId xmlns:a16="http://schemas.microsoft.com/office/drawing/2014/main" id="{621B99A1-5841-44D5-A945-1AD46A344EFD}"/>
+                <a16:creationId xmlns:a16="http://schemas.microsoft.com/office/drawing/2014/main" id="{EB9FC205-8F1C-4DFC-AD92-394D3E73F56E}"/>
               </a:ext>
             </a:extLst>
           </p:cNvPr>
@@ -2573,7 +2573,7 @@
           <p:cNvPr id="2" name="closing-title">
             <a:extLst xmlns:a="http://schemas.openxmlformats.org/drawingml/2006/main">
               <a:ext uri="{FF2B5EF4-FFF2-40B4-BE49-F238E27FC236}">
-                <a16:creationId xmlns:a16="http://schemas.microsoft.com/office/drawing/2014/main" id="{DC9B9938-CA29-4F0A-8D5E-A26FDA6BB0EE}"/>
+                <a16:creationId xmlns:a16="http://schemas.microsoft.com/office/drawing/2014/main" id="{C66D6BA8-9F24-4489-98D1-E4ECEBAA245F}"/>
               </a:ext>
             </a:extLst>
           </p:cNvPr>
@@ -2654,7 +2654,7 @@
           <p:cNvPr id="3" name="">
             <a:extLst xmlns:a="http://schemas.openxmlformats.org/drawingml/2006/main">
               <a:ext uri="{FF2B5EF4-FFF2-40B4-BE49-F238E27FC236}">
-                <a16:creationId xmlns:a16="http://schemas.microsoft.com/office/drawing/2014/main" id="{190AB61C-CD90-40DB-8B90-55270532EB27}"/>
+                <a16:creationId xmlns:a16="http://schemas.microsoft.com/office/drawing/2014/main" id="{65E48DD0-C6E9-47BB-9879-10C981015460}"/>
               </a:ext>
             </a:extLst>
           </p:cNvPr>
@@ -2685,7 +2685,7 @@
           <p:cNvPr id="4" name="">
             <a:extLst xmlns:a="http://schemas.openxmlformats.org/drawingml/2006/main">
               <a:ext uri="{FF2B5EF4-FFF2-40B4-BE49-F238E27FC236}">
-                <a16:creationId xmlns:a16="http://schemas.microsoft.com/office/drawing/2014/main" id="{3524590D-A601-4B26-8C4D-302F7758E37A}"/>
+                <a16:creationId xmlns:a16="http://schemas.microsoft.com/office/drawing/2014/main" id="{5A050A0D-B86C-48A8-B63A-134117D904DA}"/>
               </a:ext>
             </a:extLst>
           </p:cNvPr>
@@ -2743,7 +2743,7 @@
           <p:cNvPr id="5" name="">
             <a:extLst xmlns:a="http://schemas.openxmlformats.org/drawingml/2006/main">
               <a:ext uri="{FF2B5EF4-FFF2-40B4-BE49-F238E27FC236}">
-                <a16:creationId xmlns:a16="http://schemas.microsoft.com/office/drawing/2014/main" id="{B0341C8D-F3B3-401A-B262-BCE83C07BBCD}"/>
+                <a16:creationId xmlns:a16="http://schemas.microsoft.com/office/drawing/2014/main" id="{08104652-2B41-4100-A765-A125BD103866}"/>
               </a:ext>
             </a:extLst>
           </p:cNvPr>
@@ -2776,7 +2776,7 @@
           <p:cNvPr id="6" name="">
             <a:extLst xmlns:a="http://schemas.openxmlformats.org/drawingml/2006/main">
               <a:ext uri="{FF2B5EF4-FFF2-40B4-BE49-F238E27FC236}">
-                <a16:creationId xmlns:a16="http://schemas.microsoft.com/office/drawing/2014/main" id="{530259CC-DABF-4424-8A37-60FF78919531}"/>
+                <a16:creationId xmlns:a16="http://schemas.microsoft.com/office/drawing/2014/main" id="{51BF6797-C01D-46BE-B473-3C637CBB3833}"/>
               </a:ext>
             </a:extLst>
           </p:cNvPr>
@@ -2880,7 +2880,7 @@
           <p:cNvPr id="7" name="">
             <a:extLst xmlns:a="http://schemas.openxmlformats.org/drawingml/2006/main">
               <a:ext uri="{FF2B5EF4-FFF2-40B4-BE49-F238E27FC236}">
-                <a16:creationId xmlns:a16="http://schemas.microsoft.com/office/drawing/2014/main" id="{C66E67F8-297C-47BB-85AA-AFAC4109E5B2}"/>
+                <a16:creationId xmlns:a16="http://schemas.microsoft.com/office/drawing/2014/main" id="{7ACCD2C4-A84C-4950-A7BA-E08FC869B3C6}"/>
               </a:ext>
             </a:extLst>
           </p:cNvPr>
@@ -2936,7 +2936,7 @@
     </p:spTree>
     <p:extLst>
       <p:ext uri="{BB962C8B-B14F-4D97-AF65-F5344CB8AC3E}">
-        <p14:creationId xmlns:p14="http://schemas.microsoft.com/office/powerpoint/2010/main" val="490949000"/>
+        <p14:creationId xmlns:p14="http://schemas.microsoft.com/office/powerpoint/2010/main" val="580733585"/>
       </p:ext>
     </p:extLst>
   </p:cSld>
@@ -2967,7 +2967,7 @@
           <p:cNvPr id="26" name="eyebrow-2">
             <a:extLst xmlns:a="http://schemas.openxmlformats.org/drawingml/2006/main">
               <a:ext uri="{FF2B5EF4-FFF2-40B4-BE49-F238E27FC236}">
-                <a16:creationId xmlns:a16="http://schemas.microsoft.com/office/drawing/2014/main" id="{1ECEA48B-F253-4627-B5DA-70A6E78169D4}"/>
+                <a16:creationId xmlns:a16="http://schemas.microsoft.com/office/drawing/2014/main" id="{C61DA379-5E17-41EF-8EF9-1005FC4051B6}"/>
               </a:ext>
             </a:extLst>
           </p:cNvPr>
@@ -3025,7 +3025,7 @@
           <p:cNvPr id="2" name="title-2">
             <a:extLst xmlns:a="http://schemas.openxmlformats.org/drawingml/2006/main">
               <a:ext uri="{FF2B5EF4-FFF2-40B4-BE49-F238E27FC236}">
-                <a16:creationId xmlns:a16="http://schemas.microsoft.com/office/drawing/2014/main" id="{9A071501-9BF5-4474-9DA2-4BA3EF9977DB}"/>
+                <a16:creationId xmlns:a16="http://schemas.microsoft.com/office/drawing/2014/main" id="{E2367FDC-0987-4025-98BA-1770C476B4FF}"/>
               </a:ext>
             </a:extLst>
           </p:cNvPr>
@@ -3083,7 +3083,7 @@
           <p:cNvPr id="3" name="">
             <a:extLst xmlns:a="http://schemas.openxmlformats.org/drawingml/2006/main">
               <a:ext uri="{FF2B5EF4-FFF2-40B4-BE49-F238E27FC236}">
-                <a16:creationId xmlns:a16="http://schemas.microsoft.com/office/drawing/2014/main" id="{B211B076-4ADB-4B6A-AA6A-B3CB1D0517CC}"/>
+                <a16:creationId xmlns:a16="http://schemas.microsoft.com/office/drawing/2014/main" id="{058CFB90-3034-4ADD-962D-185B6FE47E52}"/>
               </a:ext>
             </a:extLst>
           </p:cNvPr>
@@ -3114,7 +3114,7 @@
           <p:cNvPr id="4" name="">
             <a:extLst xmlns:a="http://schemas.openxmlformats.org/drawingml/2006/main">
               <a:ext uri="{FF2B5EF4-FFF2-40B4-BE49-F238E27FC236}">
-                <a16:creationId xmlns:a16="http://schemas.microsoft.com/office/drawing/2014/main" id="{18D9369E-FF03-4398-9D47-6C7CCD86BF7F}"/>
+                <a16:creationId xmlns:a16="http://schemas.microsoft.com/office/drawing/2014/main" id="{BF1B7A94-26C4-4C03-AA78-B9CA70871979}"/>
               </a:ext>
             </a:extLst>
           </p:cNvPr>
@@ -3172,7 +3172,7 @@
           <p:cNvPr id="5" name="">
             <a:extLst xmlns:a="http://schemas.openxmlformats.org/drawingml/2006/main">
               <a:ext uri="{FF2B5EF4-FFF2-40B4-BE49-F238E27FC236}">
-                <a16:creationId xmlns:a16="http://schemas.microsoft.com/office/drawing/2014/main" id="{D8F41D08-81C9-4388-80FC-FB695ABA490D}"/>
+                <a16:creationId xmlns:a16="http://schemas.microsoft.com/office/drawing/2014/main" id="{30D81F92-A8F5-4635-AA69-A9B09CF4B946}"/>
               </a:ext>
             </a:extLst>
           </p:cNvPr>
@@ -3230,7 +3230,7 @@
           <p:cNvPr id="6" name="">
             <a:extLst xmlns:a="http://schemas.openxmlformats.org/drawingml/2006/main">
               <a:ext uri="{FF2B5EF4-FFF2-40B4-BE49-F238E27FC236}">
-                <a16:creationId xmlns:a16="http://schemas.microsoft.com/office/drawing/2014/main" id="{CBBB09C3-365E-457A-9027-E1C5BEB5036C}"/>
+                <a16:creationId xmlns:a16="http://schemas.microsoft.com/office/drawing/2014/main" id="{8DF146D0-6FAA-4BE1-8A76-ACBF01DA0D4E}"/>
               </a:ext>
             </a:extLst>
           </p:cNvPr>
@@ -3288,7 +3288,7 @@
           <p:cNvPr id="7" name="">
             <a:extLst xmlns:a="http://schemas.openxmlformats.org/drawingml/2006/main">
               <a:ext uri="{FF2B5EF4-FFF2-40B4-BE49-F238E27FC236}">
-                <a16:creationId xmlns:a16="http://schemas.microsoft.com/office/drawing/2014/main" id="{50C11B0E-B174-4DB6-8D07-C9190EBD6D61}"/>
+                <a16:creationId xmlns:a16="http://schemas.microsoft.com/office/drawing/2014/main" id="{CB971765-2685-4906-AB1C-FC6856DBCC50}"/>
               </a:ext>
             </a:extLst>
           </p:cNvPr>
@@ -3346,7 +3346,7 @@
           <p:cNvPr id="8" name="">
             <a:extLst xmlns:a="http://schemas.openxmlformats.org/drawingml/2006/main">
               <a:ext uri="{FF2B5EF4-FFF2-40B4-BE49-F238E27FC236}">
-                <a16:creationId xmlns:a16="http://schemas.microsoft.com/office/drawing/2014/main" id="{36E5F363-6CEA-4FB7-AEF4-297F819A71B5}"/>
+                <a16:creationId xmlns:a16="http://schemas.microsoft.com/office/drawing/2014/main" id="{BA5510DA-011F-40D7-8ADC-99634CD89782}"/>
               </a:ext>
             </a:extLst>
           </p:cNvPr>
@@ -3377,7 +3377,7 @@
           <p:cNvPr id="9" name="">
             <a:extLst xmlns:a="http://schemas.openxmlformats.org/drawingml/2006/main">
               <a:ext uri="{FF2B5EF4-FFF2-40B4-BE49-F238E27FC236}">
-                <a16:creationId xmlns:a16="http://schemas.microsoft.com/office/drawing/2014/main" id="{00EE17CD-7F30-4C21-81DD-181A42951452}"/>
+                <a16:creationId xmlns:a16="http://schemas.microsoft.com/office/drawing/2014/main" id="{E89A54DF-D83B-4980-ADF0-2B3A5E61E4B4}"/>
               </a:ext>
             </a:extLst>
           </p:cNvPr>
@@ -3408,7 +3408,7 @@
           <p:cNvPr id="10" name="">
             <a:extLst xmlns:a="http://schemas.openxmlformats.org/drawingml/2006/main">
               <a:ext uri="{FF2B5EF4-FFF2-40B4-BE49-F238E27FC236}">
-                <a16:creationId xmlns:a16="http://schemas.microsoft.com/office/drawing/2014/main" id="{39B460E9-7433-4668-9D9C-82DBB7FE2008}"/>
+                <a16:creationId xmlns:a16="http://schemas.microsoft.com/office/drawing/2014/main" id="{92CAE2C9-5B61-46F1-8A35-ACB6D7F20DA3}"/>
               </a:ext>
             </a:extLst>
           </p:cNvPr>
@@ -3441,7 +3441,7 @@
           <p:cNvPr id="11" name="">
             <a:extLst xmlns:a="http://schemas.openxmlformats.org/drawingml/2006/main">
               <a:ext uri="{FF2B5EF4-FFF2-40B4-BE49-F238E27FC236}">
-                <a16:creationId xmlns:a16="http://schemas.microsoft.com/office/drawing/2014/main" id="{2BC1BBB1-26AE-4A03-9C06-E9BC6F46482A}"/>
+                <a16:creationId xmlns:a16="http://schemas.microsoft.com/office/drawing/2014/main" id="{A411B982-9F03-48F5-B9A9-4612089A5C31}"/>
               </a:ext>
             </a:extLst>
           </p:cNvPr>
@@ -3499,7 +3499,7 @@
           <p:cNvPr id="12" name="">
             <a:extLst xmlns:a="http://schemas.openxmlformats.org/drawingml/2006/main">
               <a:ext uri="{FF2B5EF4-FFF2-40B4-BE49-F238E27FC236}">
-                <a16:creationId xmlns:a16="http://schemas.microsoft.com/office/drawing/2014/main" id="{3F7E0594-04A4-4929-A253-4DD18F83A60C}"/>
+                <a16:creationId xmlns:a16="http://schemas.microsoft.com/office/drawing/2014/main" id="{A811A19B-ADC2-42F0-8F07-53C6B6C25123}"/>
               </a:ext>
             </a:extLst>
           </p:cNvPr>
@@ -3532,7 +3532,7 @@
           <p:cNvPr id="13" name="">
             <a:extLst xmlns:a="http://schemas.openxmlformats.org/drawingml/2006/main">
               <a:ext uri="{FF2B5EF4-FFF2-40B4-BE49-F238E27FC236}">
-                <a16:creationId xmlns:a16="http://schemas.microsoft.com/office/drawing/2014/main" id="{D5A674EF-DDFC-432F-A74B-6383B26BC3E5}"/>
+                <a16:creationId xmlns:a16="http://schemas.microsoft.com/office/drawing/2014/main" id="{85D8A7EC-1CCF-4A1F-9E65-2E9F3E80DEE5}"/>
               </a:ext>
             </a:extLst>
           </p:cNvPr>
@@ -3590,7 +3590,7 @@
           <p:cNvPr id="14" name="">
             <a:extLst xmlns:a="http://schemas.openxmlformats.org/drawingml/2006/main">
               <a:ext uri="{FF2B5EF4-FFF2-40B4-BE49-F238E27FC236}">
-                <a16:creationId xmlns:a16="http://schemas.microsoft.com/office/drawing/2014/main" id="{93F5FC89-1770-442C-AF6A-4DBEB0C7E658}"/>
+                <a16:creationId xmlns:a16="http://schemas.microsoft.com/office/drawing/2014/main" id="{5AC558CD-B44B-4D9E-8955-CAD131D96C67}"/>
               </a:ext>
             </a:extLst>
           </p:cNvPr>
@@ -3623,7 +3623,7 @@
           <p:cNvPr id="15" name="">
             <a:extLst xmlns:a="http://schemas.openxmlformats.org/drawingml/2006/main">
               <a:ext uri="{FF2B5EF4-FFF2-40B4-BE49-F238E27FC236}">
-                <a16:creationId xmlns:a16="http://schemas.microsoft.com/office/drawing/2014/main" id="{76E24044-3E98-4C36-9ABF-3EC0F6229055}"/>
+                <a16:creationId xmlns:a16="http://schemas.microsoft.com/office/drawing/2014/main" id="{09429483-F2FC-4B6F-A649-DFDBA158EA80}"/>
               </a:ext>
             </a:extLst>
           </p:cNvPr>
@@ -3681,7 +3681,7 @@
           <p:cNvPr id="16" name="">
             <a:extLst xmlns:a="http://schemas.openxmlformats.org/drawingml/2006/main">
               <a:ext uri="{FF2B5EF4-FFF2-40B4-BE49-F238E27FC236}">
-                <a16:creationId xmlns:a16="http://schemas.microsoft.com/office/drawing/2014/main" id="{ED4F2B99-7401-420F-8807-40954A1C5932}"/>
+                <a16:creationId xmlns:a16="http://schemas.microsoft.com/office/drawing/2014/main" id="{243F77C4-B2F9-414F-B458-729D779392A9}"/>
               </a:ext>
             </a:extLst>
           </p:cNvPr>
@@ -3714,7 +3714,7 @@
           <p:cNvPr id="17" name="">
             <a:extLst xmlns:a="http://schemas.openxmlformats.org/drawingml/2006/main">
               <a:ext uri="{FF2B5EF4-FFF2-40B4-BE49-F238E27FC236}">
-                <a16:creationId xmlns:a16="http://schemas.microsoft.com/office/drawing/2014/main" id="{6B622BEA-EB9B-4F9B-B90F-EC6EA35EF596}"/>
+                <a16:creationId xmlns:a16="http://schemas.microsoft.com/office/drawing/2014/main" id="{FFB645B0-1C73-4685-A3E1-8AD733EA5D2A}"/>
               </a:ext>
             </a:extLst>
           </p:cNvPr>
@@ -3772,7 +3772,7 @@
           <p:cNvPr id="18" name="">
             <a:extLst xmlns:a="http://schemas.openxmlformats.org/drawingml/2006/main">
               <a:ext uri="{FF2B5EF4-FFF2-40B4-BE49-F238E27FC236}">
-                <a16:creationId xmlns:a16="http://schemas.microsoft.com/office/drawing/2014/main" id="{C8AC8058-BB20-4E6F-89F1-2FEACAC4D536}"/>
+                <a16:creationId xmlns:a16="http://schemas.microsoft.com/office/drawing/2014/main" id="{E8200002-56FA-44BC-A5D2-1F999C9B9970}"/>
               </a:ext>
             </a:extLst>
           </p:cNvPr>
@@ -3805,7 +3805,7 @@
           <p:cNvPr id="19" name="">
             <a:extLst xmlns:a="http://schemas.openxmlformats.org/drawingml/2006/main">
               <a:ext uri="{FF2B5EF4-FFF2-40B4-BE49-F238E27FC236}">
-                <a16:creationId xmlns:a16="http://schemas.microsoft.com/office/drawing/2014/main" id="{E782E644-5F0B-423E-9399-702AC4EEDBD7}"/>
+                <a16:creationId xmlns:a16="http://schemas.microsoft.com/office/drawing/2014/main" id="{40714C5B-3077-4B34-A4EF-8FF108A00216}"/>
               </a:ext>
             </a:extLst>
           </p:cNvPr>
@@ -3863,7 +3863,7 @@
           <p:cNvPr id="20" name="">
             <a:extLst xmlns:a="http://schemas.openxmlformats.org/drawingml/2006/main">
               <a:ext uri="{FF2B5EF4-FFF2-40B4-BE49-F238E27FC236}">
-                <a16:creationId xmlns:a16="http://schemas.microsoft.com/office/drawing/2014/main" id="{C4A74DB4-B734-46A9-B0C8-1F755925F0B2}"/>
+                <a16:creationId xmlns:a16="http://schemas.microsoft.com/office/drawing/2014/main" id="{5E40D588-E20A-424A-B7AE-4D2C8FC62645}"/>
               </a:ext>
             </a:extLst>
           </p:cNvPr>
@@ -3896,7 +3896,7 @@
           <p:cNvPr id="21" name="">
             <a:extLst xmlns:a="http://schemas.openxmlformats.org/drawingml/2006/main">
               <a:ext uri="{FF2B5EF4-FFF2-40B4-BE49-F238E27FC236}">
-                <a16:creationId xmlns:a16="http://schemas.microsoft.com/office/drawing/2014/main" id="{5177AEC6-8DBB-4C9B-B964-121ADA1EB597}"/>
+                <a16:creationId xmlns:a16="http://schemas.microsoft.com/office/drawing/2014/main" id="{A7031B8C-4DFA-4333-AEC0-32F2D770F23D}"/>
               </a:ext>
             </a:extLst>
           </p:cNvPr>
@@ -3977,7 +3977,7 @@
           <p:cNvPr id="22" name="">
             <a:extLst xmlns:a="http://schemas.openxmlformats.org/drawingml/2006/main">
               <a:ext uri="{FF2B5EF4-FFF2-40B4-BE49-F238E27FC236}">
-                <a16:creationId xmlns:a16="http://schemas.microsoft.com/office/drawing/2014/main" id="{C71C7379-327B-485D-9475-FCD809FDB15D}"/>
+                <a16:creationId xmlns:a16="http://schemas.microsoft.com/office/drawing/2014/main" id="{F3D6B53D-F91D-4753-A0EA-AC33C8C455BA}"/>
               </a:ext>
             </a:extLst>
           </p:cNvPr>
@@ -4008,7 +4008,7 @@
           <p:cNvPr id="23" name="">
             <a:extLst xmlns:a="http://schemas.openxmlformats.org/drawingml/2006/main">
               <a:ext uri="{FF2B5EF4-FFF2-40B4-BE49-F238E27FC236}">
-                <a16:creationId xmlns:a16="http://schemas.microsoft.com/office/drawing/2014/main" id="{B61D1593-DE08-401B-A23A-1E165BD39C62}"/>
+                <a16:creationId xmlns:a16="http://schemas.microsoft.com/office/drawing/2014/main" id="{169EA1D0-EDE8-4423-B4B2-3DF7DF1B18F9}"/>
               </a:ext>
             </a:extLst>
           </p:cNvPr>
@@ -4089,7 +4089,7 @@
           <p:cNvPr id="24" name="">
             <a:extLst xmlns:a="http://schemas.openxmlformats.org/drawingml/2006/main">
               <a:ext uri="{FF2B5EF4-FFF2-40B4-BE49-F238E27FC236}">
-                <a16:creationId xmlns:a16="http://schemas.microsoft.com/office/drawing/2014/main" id="{29817AF4-F121-4F2D-AA05-B4D4B6A9D2B1}"/>
+                <a16:creationId xmlns:a16="http://schemas.microsoft.com/office/drawing/2014/main" id="{847C41FD-6642-4F7E-A108-40F0EF5DF5B8}"/>
               </a:ext>
             </a:extLst>
           </p:cNvPr>
@@ -4147,7 +4147,7 @@
           <p:cNvPr id="25" name="footer-2">
             <a:extLst xmlns:a="http://schemas.openxmlformats.org/drawingml/2006/main">
               <a:ext uri="{FF2B5EF4-FFF2-40B4-BE49-F238E27FC236}">
-                <a16:creationId xmlns:a16="http://schemas.microsoft.com/office/drawing/2014/main" id="{FBF73B07-51FD-4208-8E3E-C38CE4B5E4D3}"/>
+                <a16:creationId xmlns:a16="http://schemas.microsoft.com/office/drawing/2014/main" id="{872562BD-BE60-4DB2-9718-DE31952723B9}"/>
               </a:ext>
             </a:extLst>
           </p:cNvPr>
@@ -4203,7 +4203,7 @@
     </p:spTree>
     <p:extLst>
       <p:ext uri="{BB962C8B-B14F-4D97-AF65-F5344CB8AC3E}">
-        <p14:creationId xmlns:p14="http://schemas.microsoft.com/office/powerpoint/2010/main" val="405588490"/>
+        <p14:creationId xmlns:p14="http://schemas.microsoft.com/office/powerpoint/2010/main" val="2116074155"/>
       </p:ext>
     </p:extLst>
   </p:cSld>
@@ -4231,10 +4231,10 @@
       </p:grpSpPr>
       <p:sp>
         <p:nvSpPr>
-          <p:cNvPr id="26" name="eyebrow-3">
-            <a:extLst xmlns:a="http://schemas.openxmlformats.org/drawingml/2006/main">
-              <a:ext uri="{FF2B5EF4-FFF2-40B4-BE49-F238E27FC236}">
-                <a16:creationId xmlns:a16="http://schemas.microsoft.com/office/drawing/2014/main" id="{87CF102B-4EF5-4664-BF76-FEA5B929DE2A}"/>
+          <p:cNvPr id="19" name="eyebrow-3">
+            <a:extLst xmlns:a="http://schemas.openxmlformats.org/drawingml/2006/main">
+              <a:ext uri="{FF2B5EF4-FFF2-40B4-BE49-F238E27FC236}">
+                <a16:creationId xmlns:a16="http://schemas.microsoft.com/office/drawing/2014/main" id="{8E206158-0966-44CB-9F4E-A40D4A22AB42}"/>
               </a:ext>
             </a:extLst>
           </p:cNvPr>
@@ -4282,7 +4282,7 @@
                 <a:ea typeface="Arial"/>
                 <a:cs typeface="Arial"/>
               </a:rPr>
-              <a:t>MODELO DE DOMINIO</a:t>
+              <a:t>ARQUITECTURA</a:t>
             </a:r>
           </a:p>
         </p:txBody>
@@ -4292,7 +4292,7 @@
           <p:cNvPr id="2" name="title-3">
             <a:extLst xmlns:a="http://schemas.openxmlformats.org/drawingml/2006/main">
               <a:ext uri="{FF2B5EF4-FFF2-40B4-BE49-F238E27FC236}">
-                <a16:creationId xmlns:a16="http://schemas.microsoft.com/office/drawing/2014/main" id="{36EE5774-20F6-44BA-9FE5-187F86C0CCEA}"/>
+                <a16:creationId xmlns:a16="http://schemas.microsoft.com/office/drawing/2014/main" id="{39EC8BCA-16AA-4B19-93E7-20319D38C2BC}"/>
               </a:ext>
             </a:extLst>
           </p:cNvPr>
@@ -4305,6 +4305,190 @@
           <a:xfrm xmlns:a="http://schemas.openxmlformats.org/drawingml/2006/main">
             <a:off x="533400" y="666750"/>
             <a:ext cx="11125200" cy="742950"/>
+          </a:xfrm>
+          <a:prstGeom xmlns:a="http://schemas.openxmlformats.org/drawingml/2006/main" prst="rect">
+            <a:avLst/>
+          </a:prstGeom>
+          <a:noFill xmlns:a="http://schemas.openxmlformats.org/drawingml/2006/main"/>
+          <a:ln xmlns:a="http://schemas.openxmlformats.org/drawingml/2006/main" w="0">
+            <a:noFill/>
+            <a:prstDash val="solid"/>
+          </a:ln>
+        </p:spPr>
+        <p:txBody>
+          <a:bodyPr xmlns:a="http://schemas.openxmlformats.org/drawingml/2006/main" lIns="0" tIns="0" rIns="0" bIns="0" anchor="t">
+            <a:normAutofit fontScale="96971"/>
+          </a:bodyPr>
+          <a:lstStyle xmlns:a="http://schemas.openxmlformats.org/drawingml/2006/main"/>
+          <a:p xmlns:a="http://schemas.openxmlformats.org/drawingml/2006/main">
+            <a:pPr algn="l">
+              <a:defRPr sz="3225" b="1">
+                <a:solidFill>
+                  <a:srgbClr val="0A0F18"/>
+                </a:solidFill>
+                <a:latin typeface="Arial"/>
+                <a:ea typeface="Arial"/>
+                <a:cs typeface="Arial"/>
+              </a:defRPr>
+            </a:pPr>
+            <a:r>
+              <a:rPr sz="3225" b="1">
+                <a:solidFill>
+                  <a:srgbClr val="0A0F18"/>
+                </a:solidFill>
+                <a:latin typeface="Arial"/>
+                <a:ea typeface="Arial"/>
+                <a:cs typeface="Arial"/>
+              </a:rPr>
+              <a:t>Spring Boot concentra el dominio y limita cada integración</a:t>
+            </a:r>
+          </a:p>
+        </p:txBody>
+      </p:sp>
+      <p:sp>
+        <p:nvSpPr>
+          <p:cNvPr id="3" name="">
+            <a:extLst xmlns:a="http://schemas.openxmlformats.org/drawingml/2006/main">
+              <a:ext uri="{FF2B5EF4-FFF2-40B4-BE49-F238E27FC236}">
+                <a16:creationId xmlns:a16="http://schemas.microsoft.com/office/drawing/2014/main" id="{B26DAFC5-6E6D-45F3-B033-4D01EC7E2844}"/>
+              </a:ext>
+            </a:extLst>
+          </p:cNvPr>
+          <p:cNvSpPr>
+            <a:spLocks xmlns:a="http://schemas.openxmlformats.org/drawingml/2006/main" noGrp="1"/>
+          </p:cNvSpPr>
+          <p:nvPr/>
+        </p:nvSpPr>
+        <p:spPr>
+          <a:xfrm xmlns:a="http://schemas.openxmlformats.org/drawingml/2006/main">
+            <a:off x="533400" y="1504950"/>
+            <a:ext cx="11125200" cy="9525"/>
+          </a:xfrm>
+          <a:prstGeom xmlns:a="http://schemas.openxmlformats.org/drawingml/2006/main" prst="rect">
+            <a:avLst/>
+          </a:prstGeom>
+          <a:solidFill xmlns:a="http://schemas.openxmlformats.org/drawingml/2006/main">
+            <a:srgbClr val="B8C0CA"/>
+          </a:solidFill>
+          <a:ln xmlns:a="http://schemas.openxmlformats.org/drawingml/2006/main" w="0">
+            <a:noFill/>
+            <a:prstDash val="solid"/>
+          </a:ln>
+        </p:spPr>
+      </p:sp>
+      <p:sp>
+        <p:nvSpPr>
+          <p:cNvPr id="4" name="">
+            <a:extLst xmlns:a="http://schemas.openxmlformats.org/drawingml/2006/main">
+              <a:ext uri="{FF2B5EF4-FFF2-40B4-BE49-F238E27FC236}">
+                <a16:creationId xmlns:a16="http://schemas.microsoft.com/office/drawing/2014/main" id="{653C1E45-A6FC-45D2-AB1C-6E90D61032E6}"/>
+              </a:ext>
+            </a:extLst>
+          </p:cNvPr>
+          <p:cNvSpPr>
+            <a:spLocks xmlns:a="http://schemas.openxmlformats.org/drawingml/2006/main" noGrp="1"/>
+          </p:cNvSpPr>
+          <p:nvPr/>
+        </p:nvSpPr>
+        <p:spPr>
+          <a:xfrm xmlns:a="http://schemas.openxmlformats.org/drawingml/2006/main">
+            <a:off x="2590800" y="3257550"/>
+            <a:ext cx="666750" cy="323850"/>
+          </a:xfrm>
+          <a:prstGeom xmlns:a="http://schemas.openxmlformats.org/drawingml/2006/main" prst="rightArrow">
+            <a:avLst/>
+          </a:prstGeom>
+          <a:solidFill xmlns:a="http://schemas.openxmlformats.org/drawingml/2006/main">
+            <a:srgbClr val="B8C0CA"/>
+          </a:solidFill>
+          <a:ln xmlns:a="http://schemas.openxmlformats.org/drawingml/2006/main" w="0">
+            <a:noFill/>
+            <a:prstDash val="solid"/>
+          </a:ln>
+        </p:spPr>
+      </p:sp>
+      <p:sp>
+        <p:nvSpPr>
+          <p:cNvPr id="5" name="">
+            <a:extLst xmlns:a="http://schemas.openxmlformats.org/drawingml/2006/main">
+              <a:ext uri="{FF2B5EF4-FFF2-40B4-BE49-F238E27FC236}">
+                <a16:creationId xmlns:a16="http://schemas.microsoft.com/office/drawing/2014/main" id="{B0F37275-06B2-4F4B-9B2B-23A010E3BFF5}"/>
+              </a:ext>
+            </a:extLst>
+          </p:cNvPr>
+          <p:cNvSpPr>
+            <a:spLocks xmlns:a="http://schemas.openxmlformats.org/drawingml/2006/main" noGrp="1"/>
+          </p:cNvSpPr>
+          <p:nvPr/>
+        </p:nvSpPr>
+        <p:spPr>
+          <a:xfrm xmlns:a="http://schemas.openxmlformats.org/drawingml/2006/main">
+            <a:off x="8572500" y="3257550"/>
+            <a:ext cx="666750" cy="323850"/>
+          </a:xfrm>
+          <a:prstGeom xmlns:a="http://schemas.openxmlformats.org/drawingml/2006/main" prst="rightArrow">
+            <a:avLst/>
+          </a:prstGeom>
+          <a:solidFill xmlns:a="http://schemas.openxmlformats.org/drawingml/2006/main">
+            <a:srgbClr val="B8C0CA"/>
+          </a:solidFill>
+          <a:ln xmlns:a="http://schemas.openxmlformats.org/drawingml/2006/main" w="0">
+            <a:noFill/>
+            <a:prstDash val="solid"/>
+          </a:ln>
+        </p:spPr>
+      </p:sp>
+      <p:sp>
+        <p:nvSpPr>
+          <p:cNvPr id="6" name="">
+            <a:extLst xmlns:a="http://schemas.openxmlformats.org/drawingml/2006/main">
+              <a:ext uri="{FF2B5EF4-FFF2-40B4-BE49-F238E27FC236}">
+                <a16:creationId xmlns:a16="http://schemas.microsoft.com/office/drawing/2014/main" id="{17EE0E9F-E0DD-4007-BCC0-AEF8240129D4}"/>
+              </a:ext>
+            </a:extLst>
+          </p:cNvPr>
+          <p:cNvSpPr>
+            <a:spLocks xmlns:a="http://schemas.openxmlformats.org/drawingml/2006/main" noGrp="1"/>
+          </p:cNvSpPr>
+          <p:nvPr/>
+        </p:nvSpPr>
+        <p:spPr>
+          <a:xfrm xmlns:a="http://schemas.openxmlformats.org/drawingml/2006/main">
+            <a:off x="552450" y="2133600"/>
+            <a:ext cx="2038350" cy="2571750"/>
+          </a:xfrm>
+          <a:prstGeom xmlns:a="http://schemas.openxmlformats.org/drawingml/2006/main" prst="roundRect">
+            <a:avLst>
+              <a:gd name="adj" fmla="val 3738"/>
+            </a:avLst>
+          </a:prstGeom>
+          <a:solidFill xmlns:a="http://schemas.openxmlformats.org/drawingml/2006/main">
+            <a:srgbClr val="DCEBFF"/>
+          </a:solidFill>
+          <a:ln xmlns:a="http://schemas.openxmlformats.org/drawingml/2006/main" w="0">
+            <a:noFill/>
+            <a:prstDash val="solid"/>
+          </a:ln>
+        </p:spPr>
+      </p:sp>
+      <p:sp>
+        <p:nvSpPr>
+          <p:cNvPr id="7" name="">
+            <a:extLst xmlns:a="http://schemas.openxmlformats.org/drawingml/2006/main">
+              <a:ext uri="{FF2B5EF4-FFF2-40B4-BE49-F238E27FC236}">
+                <a16:creationId xmlns:a16="http://schemas.microsoft.com/office/drawing/2014/main" id="{694397F2-83F1-4E23-A2EF-E5078F02412C}"/>
+              </a:ext>
+            </a:extLst>
+          </p:cNvPr>
+          <p:cNvSpPr>
+            <a:spLocks xmlns:a="http://schemas.openxmlformats.org/drawingml/2006/main" noGrp="1"/>
+          </p:cNvSpPr>
+          <p:nvPr/>
+        </p:nvSpPr>
+        <p:spPr>
+          <a:xfrm xmlns:a="http://schemas.openxmlformats.org/drawingml/2006/main">
+            <a:off x="781050" y="2381250"/>
+            <a:ext cx="1581150" cy="285750"/>
           </a:xfrm>
           <a:prstGeom xmlns:a="http://schemas.openxmlformats.org/drawingml/2006/main" prst="rect">
             <a:avLst/>
@@ -4321,294 +4505,48 @@
           </a:bodyPr>
           <a:lstStyle xmlns:a="http://schemas.openxmlformats.org/drawingml/2006/main"/>
           <a:p xmlns:a="http://schemas.openxmlformats.org/drawingml/2006/main">
-            <a:pPr algn="l">
-              <a:defRPr sz="3225" b="1">
-                <a:solidFill>
-                  <a:srgbClr val="0A0F18"/>
-                </a:solidFill>
-                <a:latin typeface="Arial"/>
-                <a:ea typeface="Arial"/>
-                <a:cs typeface="Arial"/>
-              </a:defRPr>
-            </a:pPr>
-            <a:r>
-              <a:rPr sz="3225" b="1">
-                <a:solidFill>
-                  <a:srgbClr val="0A0F18"/>
-                </a:solidFill>
-                <a:latin typeface="Arial"/>
-                <a:ea typeface="Arial"/>
-                <a:cs typeface="Arial"/>
-              </a:rPr>
-              <a:t>El flujo transforma noticias en decisiones publicables</a:t>
-            </a:r>
-          </a:p>
-        </p:txBody>
-      </p:sp>
-      <p:sp>
-        <p:nvSpPr>
-          <p:cNvPr id="3" name="">
-            <a:extLst xmlns:a="http://schemas.openxmlformats.org/drawingml/2006/main">
-              <a:ext uri="{FF2B5EF4-FFF2-40B4-BE49-F238E27FC236}">
-                <a16:creationId xmlns:a16="http://schemas.microsoft.com/office/drawing/2014/main" id="{9BB62528-E294-48FD-B37D-EA2F3430B345}"/>
-              </a:ext>
-            </a:extLst>
-          </p:cNvPr>
-          <p:cNvSpPr>
-            <a:spLocks xmlns:a="http://schemas.openxmlformats.org/drawingml/2006/main" noGrp="1"/>
-          </p:cNvSpPr>
-          <p:nvPr/>
-        </p:nvSpPr>
-        <p:spPr>
-          <a:xfrm xmlns:a="http://schemas.openxmlformats.org/drawingml/2006/main">
-            <a:off x="533400" y="1504950"/>
-            <a:ext cx="11125200" cy="9525"/>
-          </a:xfrm>
-          <a:prstGeom xmlns:a="http://schemas.openxmlformats.org/drawingml/2006/main" prst="rect">
-            <a:avLst/>
-          </a:prstGeom>
-          <a:solidFill xmlns:a="http://schemas.openxmlformats.org/drawingml/2006/main">
-            <a:srgbClr val="B8C0CA"/>
-          </a:solidFill>
-          <a:ln xmlns:a="http://schemas.openxmlformats.org/drawingml/2006/main" w="0">
-            <a:noFill/>
-            <a:prstDash val="solid"/>
-          </a:ln>
-        </p:spPr>
-      </p:sp>
-      <p:sp>
-        <p:nvSpPr>
-          <p:cNvPr id="4" name="">
-            <a:extLst xmlns:a="http://schemas.openxmlformats.org/drawingml/2006/main">
-              <a:ext uri="{FF2B5EF4-FFF2-40B4-BE49-F238E27FC236}">
-                <a16:creationId xmlns:a16="http://schemas.microsoft.com/office/drawing/2014/main" id="{08E74F7D-643B-492C-A950-A08F2DD2157D}"/>
-              </a:ext>
-            </a:extLst>
-          </p:cNvPr>
-          <p:cNvSpPr>
-            <a:spLocks xmlns:a="http://schemas.openxmlformats.org/drawingml/2006/main" noGrp="1"/>
-          </p:cNvSpPr>
-          <p:nvPr/>
-        </p:nvSpPr>
-        <p:spPr>
-          <a:xfrm xmlns:a="http://schemas.openxmlformats.org/drawingml/2006/main">
-            <a:off x="2133600" y="3105150"/>
-            <a:ext cx="495300" cy="304800"/>
-          </a:xfrm>
-          <a:prstGeom xmlns:a="http://schemas.openxmlformats.org/drawingml/2006/main" prst="rightArrow">
-            <a:avLst/>
-          </a:prstGeom>
-          <a:solidFill xmlns:a="http://schemas.openxmlformats.org/drawingml/2006/main">
-            <a:srgbClr val="0D766E"/>
-          </a:solidFill>
-          <a:ln xmlns:a="http://schemas.openxmlformats.org/drawingml/2006/main" w="0">
-            <a:noFill/>
-            <a:prstDash val="solid"/>
-          </a:ln>
-        </p:spPr>
-      </p:sp>
-      <p:sp>
-        <p:nvSpPr>
-          <p:cNvPr id="5" name="">
-            <a:extLst xmlns:a="http://schemas.openxmlformats.org/drawingml/2006/main">
-              <a:ext uri="{FF2B5EF4-FFF2-40B4-BE49-F238E27FC236}">
-                <a16:creationId xmlns:a16="http://schemas.microsoft.com/office/drawing/2014/main" id="{BBEA558D-190F-476D-88DE-92D32C5511BB}"/>
-              </a:ext>
-            </a:extLst>
-          </p:cNvPr>
-          <p:cNvSpPr>
-            <a:spLocks xmlns:a="http://schemas.openxmlformats.org/drawingml/2006/main" noGrp="1"/>
-          </p:cNvSpPr>
-          <p:nvPr/>
-        </p:nvSpPr>
-        <p:spPr>
-          <a:xfrm xmlns:a="http://schemas.openxmlformats.org/drawingml/2006/main">
-            <a:off x="4476750" y="3105150"/>
-            <a:ext cx="419100" cy="304800"/>
-          </a:xfrm>
-          <a:prstGeom xmlns:a="http://schemas.openxmlformats.org/drawingml/2006/main" prst="rightArrow">
-            <a:avLst/>
-          </a:prstGeom>
-          <a:solidFill xmlns:a="http://schemas.openxmlformats.org/drawingml/2006/main">
-            <a:srgbClr val="B8C0CA"/>
-          </a:solidFill>
-          <a:ln xmlns:a="http://schemas.openxmlformats.org/drawingml/2006/main" w="0">
-            <a:noFill/>
-            <a:prstDash val="solid"/>
-          </a:ln>
-        </p:spPr>
-      </p:sp>
-      <p:sp>
-        <p:nvSpPr>
-          <p:cNvPr id="6" name="">
-            <a:extLst xmlns:a="http://schemas.openxmlformats.org/drawingml/2006/main">
-              <a:ext uri="{FF2B5EF4-FFF2-40B4-BE49-F238E27FC236}">
-                <a16:creationId xmlns:a16="http://schemas.microsoft.com/office/drawing/2014/main" id="{D57094F6-310C-4FFA-9E25-6FE85F6B5D78}"/>
-              </a:ext>
-            </a:extLst>
-          </p:cNvPr>
-          <p:cNvSpPr>
-            <a:spLocks xmlns:a="http://schemas.openxmlformats.org/drawingml/2006/main" noGrp="1"/>
-          </p:cNvSpPr>
-          <p:nvPr/>
-        </p:nvSpPr>
-        <p:spPr>
-          <a:xfrm xmlns:a="http://schemas.openxmlformats.org/drawingml/2006/main">
-            <a:off x="6800850" y="3105150"/>
-            <a:ext cx="476250" cy="304800"/>
-          </a:xfrm>
-          <a:prstGeom xmlns:a="http://schemas.openxmlformats.org/drawingml/2006/main" prst="rightArrow">
-            <a:avLst/>
-          </a:prstGeom>
-          <a:solidFill xmlns:a="http://schemas.openxmlformats.org/drawingml/2006/main">
-            <a:srgbClr val="B8C0CA"/>
-          </a:solidFill>
-          <a:ln xmlns:a="http://schemas.openxmlformats.org/drawingml/2006/main" w="0">
-            <a:noFill/>
-            <a:prstDash val="solid"/>
-          </a:ln>
-        </p:spPr>
-      </p:sp>
-      <p:sp>
-        <p:nvSpPr>
-          <p:cNvPr id="7" name="">
-            <a:extLst xmlns:a="http://schemas.openxmlformats.org/drawingml/2006/main">
-              <a:ext uri="{FF2B5EF4-FFF2-40B4-BE49-F238E27FC236}">
-                <a16:creationId xmlns:a16="http://schemas.microsoft.com/office/drawing/2014/main" id="{27B4936A-C96E-41B9-B92D-71243EC86F36}"/>
-              </a:ext>
-            </a:extLst>
-          </p:cNvPr>
-          <p:cNvSpPr>
-            <a:spLocks xmlns:a="http://schemas.openxmlformats.org/drawingml/2006/main" noGrp="1"/>
-          </p:cNvSpPr>
-          <p:nvPr/>
-        </p:nvSpPr>
-        <p:spPr>
-          <a:xfrm xmlns:a="http://schemas.openxmlformats.org/drawingml/2006/main">
-            <a:off x="9182100" y="3105150"/>
-            <a:ext cx="419100" cy="304800"/>
-          </a:xfrm>
-          <a:prstGeom xmlns:a="http://schemas.openxmlformats.org/drawingml/2006/main" prst="rightArrow">
-            <a:avLst/>
-          </a:prstGeom>
-          <a:solidFill xmlns:a="http://schemas.openxmlformats.org/drawingml/2006/main">
-            <a:srgbClr val="B8C0CA"/>
-          </a:solidFill>
-          <a:ln xmlns:a="http://schemas.openxmlformats.org/drawingml/2006/main" w="0">
-            <a:noFill/>
-            <a:prstDash val="solid"/>
-          </a:ln>
-        </p:spPr>
+            <a:pPr algn="ctr">
+              <a:defRPr sz="1200" b="1">
+                <a:solidFill>
+                  <a:srgbClr val="3D8DFF"/>
+                </a:solidFill>
+                <a:latin typeface="Arial"/>
+                <a:ea typeface="Arial"/>
+                <a:cs typeface="Arial"/>
+              </a:defRPr>
+            </a:pPr>
+            <a:r>
+              <a:rPr sz="1200" b="1">
+                <a:solidFill>
+                  <a:srgbClr val="3D8DFF"/>
+                </a:solidFill>
+                <a:latin typeface="Arial"/>
+                <a:ea typeface="Arial"/>
+                <a:cs typeface="Arial"/>
+              </a:rPr>
+              <a:t>ENTRADA</a:t>
+            </a:r>
+          </a:p>
+        </p:txBody>
       </p:sp>
       <p:sp>
         <p:nvSpPr>
           <p:cNvPr id="8" name="">
             <a:extLst xmlns:a="http://schemas.openxmlformats.org/drawingml/2006/main">
               <a:ext uri="{FF2B5EF4-FFF2-40B4-BE49-F238E27FC236}">
-                <a16:creationId xmlns:a16="http://schemas.microsoft.com/office/drawing/2014/main" id="{A7558F8E-2993-4B97-8DC8-36CC627EAB26}"/>
-              </a:ext>
-            </a:extLst>
-          </p:cNvPr>
-          <p:cNvSpPr>
-            <a:spLocks xmlns:a="http://schemas.openxmlformats.org/drawingml/2006/main" noGrp="1"/>
-          </p:cNvSpPr>
-          <p:nvPr/>
-        </p:nvSpPr>
-        <p:spPr>
-          <a:xfrm xmlns:a="http://schemas.openxmlformats.org/drawingml/2006/main">
-            <a:off x="609600" y="2571750"/>
-            <a:ext cx="1428750" cy="1333500"/>
-          </a:xfrm>
-          <a:prstGeom xmlns:a="http://schemas.openxmlformats.org/drawingml/2006/main" prst="roundRect">
-            <a:avLst>
-              <a:gd name="adj" fmla="val 5714"/>
-            </a:avLst>
-          </a:prstGeom>
-          <a:solidFill xmlns:a="http://schemas.openxmlformats.org/drawingml/2006/main">
-            <a:srgbClr val="ECEFF2"/>
-          </a:solidFill>
-          <a:ln xmlns:a="http://schemas.openxmlformats.org/drawingml/2006/main" w="0">
-            <a:noFill/>
-            <a:prstDash val="solid"/>
-          </a:ln>
-        </p:spPr>
-      </p:sp>
-      <p:sp>
-        <p:nvSpPr>
-          <p:cNvPr id="9" name="">
-            <a:extLst xmlns:a="http://schemas.openxmlformats.org/drawingml/2006/main">
-              <a:ext uri="{FF2B5EF4-FFF2-40B4-BE49-F238E27FC236}">
-                <a16:creationId xmlns:a16="http://schemas.microsoft.com/office/drawing/2014/main" id="{C88EB20A-19BE-435D-89AD-143ADD45548F}"/>
-              </a:ext>
-            </a:extLst>
-          </p:cNvPr>
-          <p:cNvSpPr>
-            <a:spLocks xmlns:a="http://schemas.openxmlformats.org/drawingml/2006/main" noGrp="1"/>
-          </p:cNvSpPr>
-          <p:nvPr/>
-        </p:nvSpPr>
-        <p:spPr>
-          <a:xfrm xmlns:a="http://schemas.openxmlformats.org/drawingml/2006/main">
-            <a:off x="723900" y="2914650"/>
-            <a:ext cx="1200150" cy="419100"/>
-          </a:xfrm>
-          <a:prstGeom xmlns:a="http://schemas.openxmlformats.org/drawingml/2006/main" prst="rect">
-            <a:avLst/>
-          </a:prstGeom>
-          <a:noFill xmlns:a="http://schemas.openxmlformats.org/drawingml/2006/main"/>
-          <a:ln xmlns:a="http://schemas.openxmlformats.org/drawingml/2006/main" w="0">
-            <a:noFill/>
-            <a:prstDash val="solid"/>
-          </a:ln>
-        </p:spPr>
-        <p:txBody>
-          <a:bodyPr xmlns:a="http://schemas.openxmlformats.org/drawingml/2006/main" lIns="0" tIns="0" rIns="0" bIns="0" anchor="ctr">
-            <a:normAutofit fontScale="100000"/>
-          </a:bodyPr>
-          <a:lstStyle xmlns:a="http://schemas.openxmlformats.org/drawingml/2006/main"/>
-          <a:p xmlns:a="http://schemas.openxmlformats.org/drawingml/2006/main">
-            <a:pPr algn="ctr">
-              <a:defRPr sz="1650" b="1">
-                <a:solidFill>
-                  <a:srgbClr val="0A0F18"/>
-                </a:solidFill>
-                <a:latin typeface="Arial"/>
-                <a:ea typeface="Arial"/>
-                <a:cs typeface="Arial"/>
-              </a:defRPr>
-            </a:pPr>
-            <a:r>
-              <a:rPr sz="1650" b="1">
-                <a:solidFill>
-                  <a:srgbClr val="0A0F18"/>
-                </a:solidFill>
-                <a:latin typeface="Arial"/>
-                <a:ea typeface="Arial"/>
-                <a:cs typeface="Arial"/>
-              </a:rPr>
-              <a:t>NEWS</a:t>
-            </a:r>
-          </a:p>
-        </p:txBody>
-      </p:sp>
-      <p:sp>
-        <p:nvSpPr>
-          <p:cNvPr id="10" name="">
-            <a:extLst xmlns:a="http://schemas.openxmlformats.org/drawingml/2006/main">
-              <a:ext uri="{FF2B5EF4-FFF2-40B4-BE49-F238E27FC236}">
-                <a16:creationId xmlns:a16="http://schemas.microsoft.com/office/drawing/2014/main" id="{30575884-AE32-4E74-A739-4EAEF26E3FF1}"/>
-              </a:ext>
-            </a:extLst>
-          </p:cNvPr>
-          <p:cNvSpPr>
-            <a:spLocks xmlns:a="http://schemas.openxmlformats.org/drawingml/2006/main" noGrp="1"/>
-          </p:cNvSpPr>
-          <p:nvPr/>
-        </p:nvSpPr>
-        <p:spPr>
-          <a:xfrm xmlns:a="http://schemas.openxmlformats.org/drawingml/2006/main">
-            <a:off x="533400" y="4419600"/>
-            <a:ext cx="1581150" cy="666750"/>
+                <a16:creationId xmlns:a16="http://schemas.microsoft.com/office/drawing/2014/main" id="{E339BC84-6E13-4627-BE6B-1F62595CC0E3}"/>
+              </a:ext>
+            </a:extLst>
+          </p:cNvPr>
+          <p:cNvSpPr>
+            <a:spLocks xmlns:a="http://schemas.openxmlformats.org/drawingml/2006/main" noGrp="1"/>
+          </p:cNvSpPr>
+          <p:nvPr/>
+        </p:nvSpPr>
+        <p:spPr>
+          <a:xfrm xmlns:a="http://schemas.openxmlformats.org/drawingml/2006/main">
+            <a:off x="762000" y="2857500"/>
+            <a:ext cx="1619250" cy="1581150"/>
           </a:xfrm>
           <a:prstGeom xmlns:a="http://schemas.openxmlformats.org/drawingml/2006/main" prst="rect">
             <a:avLst/>
@@ -4626,76 +4564,134 @@
           <a:lstStyle xmlns:a="http://schemas.openxmlformats.org/drawingml/2006/main"/>
           <a:p xmlns:a="http://schemas.openxmlformats.org/drawingml/2006/main">
             <a:pPr algn="ctr">
-              <a:defRPr sz="1350" b="0">
-                <a:solidFill>
-                  <a:srgbClr val="576071"/>
-                </a:solidFill>
-                <a:latin typeface="Arial"/>
-                <a:ea typeface="Arial"/>
-                <a:cs typeface="Arial"/>
-              </a:defRPr>
-            </a:pPr>
-            <a:r>
-              <a:rPr sz="1350" b="0">
-                <a:solidFill>
-                  <a:srgbClr val="576071"/>
-                </a:solidFill>
-                <a:latin typeface="Arial"/>
-                <a:ea typeface="Arial"/>
-                <a:cs typeface="Arial"/>
-              </a:rPr>
-              <a:t>Materia prima</a:t>
+              <a:defRPr sz="1650" b="0">
+                <a:solidFill>
+                  <a:srgbClr val="0A0F18"/>
+                </a:solidFill>
+                <a:latin typeface="Arial"/>
+                <a:ea typeface="Arial"/>
+                <a:cs typeface="Arial"/>
+              </a:defRPr>
+            </a:pPr>
+            <a:r>
+              <a:rPr sz="1650" b="0">
+                <a:solidFill>
+                  <a:srgbClr val="0A0F18"/>
+                </a:solidFill>
+                <a:latin typeface="Arial"/>
+                <a:ea typeface="Arial"/>
+                <a:cs typeface="Arial"/>
+              </a:rPr>
+              <a:t>Fuentes RSS</a:t>
+            </a:r>
+          </a:p>
+          <a:p xmlns:a="http://schemas.openxmlformats.org/drawingml/2006/main">
+            <a:r>
+              <a:t/>
             </a:r>
           </a:p>
           <a:p xmlns:a="http://schemas.openxmlformats.org/drawingml/2006/main">
             <a:pPr algn="ctr">
-              <a:defRPr sz="1350" b="0">
-                <a:solidFill>
-                  <a:srgbClr val="576071"/>
-                </a:solidFill>
-                <a:latin typeface="Arial"/>
-                <a:ea typeface="Arial"/>
-                <a:cs typeface="Arial"/>
-              </a:defRPr>
-            </a:pPr>
-            <a:r>
-              <a:rPr sz="1350" b="0">
-                <a:solidFill>
-                  <a:srgbClr val="576071"/>
-                </a:solidFill>
-                <a:latin typeface="Arial"/>
-                <a:ea typeface="Arial"/>
-                <a:cs typeface="Arial"/>
-              </a:rPr>
-              <a:t>capturada</a:t>
-            </a:r>
-          </a:p>
-        </p:txBody>
-      </p:sp>
-      <p:sp>
-        <p:nvSpPr>
-          <p:cNvPr id="11" name="">
-            <a:extLst xmlns:a="http://schemas.openxmlformats.org/drawingml/2006/main">
-              <a:ext uri="{FF2B5EF4-FFF2-40B4-BE49-F238E27FC236}">
-                <a16:creationId xmlns:a16="http://schemas.microsoft.com/office/drawing/2014/main" id="{7487DAF5-E82D-42D2-B017-D222F948005B}"/>
-              </a:ext>
-            </a:extLst>
-          </p:cNvPr>
-          <p:cNvSpPr>
-            <a:spLocks xmlns:a="http://schemas.openxmlformats.org/drawingml/2006/main" noGrp="1"/>
-          </p:cNvSpPr>
-          <p:nvPr/>
-        </p:nvSpPr>
-        <p:spPr>
-          <a:xfrm xmlns:a="http://schemas.openxmlformats.org/drawingml/2006/main">
-            <a:off x="2724150" y="2381250"/>
-            <a:ext cx="1657350" cy="1714500"/>
-          </a:xfrm>
-          <a:prstGeom xmlns:a="http://schemas.openxmlformats.org/drawingml/2006/main" prst="ellipse">
-            <a:avLst/>
+              <a:defRPr sz="1650" b="0">
+                <a:solidFill>
+                  <a:srgbClr val="0A0F18"/>
+                </a:solidFill>
+                <a:latin typeface="Arial"/>
+                <a:ea typeface="Arial"/>
+                <a:cs typeface="Arial"/>
+              </a:defRPr>
+            </a:pPr>
+            <a:r>
+              <a:rPr sz="1650" b="0">
+                <a:solidFill>
+                  <a:srgbClr val="0A0F18"/>
+                </a:solidFill>
+                <a:latin typeface="Arial"/>
+                <a:ea typeface="Arial"/>
+                <a:cs typeface="Arial"/>
+              </a:rPr>
+              <a:t>n8n · WF-01</a:t>
+            </a:r>
+          </a:p>
+          <a:p xmlns:a="http://schemas.openxmlformats.org/drawingml/2006/main">
+            <a:pPr algn="ctr">
+              <a:defRPr sz="1650" b="0">
+                <a:solidFill>
+                  <a:srgbClr val="0A0F18"/>
+                </a:solidFill>
+                <a:latin typeface="Arial"/>
+                <a:ea typeface="Arial"/>
+                <a:cs typeface="Arial"/>
+              </a:defRPr>
+            </a:pPr>
+            <a:r>
+              <a:rPr sz="1650" b="0">
+                <a:solidFill>
+                  <a:srgbClr val="0A0F18"/>
+                </a:solidFill>
+                <a:latin typeface="Arial"/>
+                <a:ea typeface="Arial"/>
+                <a:cs typeface="Arial"/>
+              </a:rPr>
+              <a:t>Captura XML</a:t>
+            </a:r>
+          </a:p>
+          <a:p xmlns:a="http://schemas.openxmlformats.org/drawingml/2006/main">
+            <a:r>
+              <a:t/>
+            </a:r>
+          </a:p>
+          <a:p xmlns:a="http://schemas.openxmlformats.org/drawingml/2006/main">
+            <a:pPr algn="ctr">
+              <a:defRPr sz="1650" b="0">
+                <a:solidFill>
+                  <a:srgbClr val="0A0F18"/>
+                </a:solidFill>
+                <a:latin typeface="Arial"/>
+                <a:ea typeface="Arial"/>
+                <a:cs typeface="Arial"/>
+              </a:defRPr>
+            </a:pPr>
+            <a:r>
+              <a:rPr sz="1650" b="0">
+                <a:solidFill>
+                  <a:srgbClr val="0A0F18"/>
+                </a:solidFill>
+                <a:latin typeface="Arial"/>
+                <a:ea typeface="Arial"/>
+                <a:cs typeface="Arial"/>
+              </a:rPr>
+              <a:t>POST /news/bulk</a:t>
+            </a:r>
+          </a:p>
+        </p:txBody>
+      </p:sp>
+      <p:sp>
+        <p:nvSpPr>
+          <p:cNvPr id="9" name="">
+            <a:extLst xmlns:a="http://schemas.openxmlformats.org/drawingml/2006/main">
+              <a:ext uri="{FF2B5EF4-FFF2-40B4-BE49-F238E27FC236}">
+                <a16:creationId xmlns:a16="http://schemas.microsoft.com/office/drawing/2014/main" id="{2B77D1D2-2831-4E41-B4F8-B682E3109A47}"/>
+              </a:ext>
+            </a:extLst>
+          </p:cNvPr>
+          <p:cNvSpPr>
+            <a:spLocks xmlns:a="http://schemas.openxmlformats.org/drawingml/2006/main" noGrp="1"/>
+          </p:cNvSpPr>
+          <p:nvPr/>
+        </p:nvSpPr>
+        <p:spPr>
+          <a:xfrm xmlns:a="http://schemas.openxmlformats.org/drawingml/2006/main">
+            <a:off x="3257550" y="1885950"/>
+            <a:ext cx="5314950" cy="3143250"/>
+          </a:xfrm>
+          <a:prstGeom xmlns:a="http://schemas.openxmlformats.org/drawingml/2006/main" prst="roundRect">
+            <a:avLst>
+              <a:gd name="adj" fmla="val 2424"/>
+            </a:avLst>
           </a:prstGeom>
           <a:solidFill xmlns:a="http://schemas.openxmlformats.org/drawingml/2006/main">
-            <a:srgbClr val="0D766E"/>
+            <a:srgbClr val="0B1323"/>
           </a:solidFill>
           <a:ln xmlns:a="http://schemas.openxmlformats.org/drawingml/2006/main" w="0">
             <a:noFill/>
@@ -4705,80 +4701,22 @@
       </p:sp>
       <p:sp>
         <p:nvSpPr>
-          <p:cNvPr id="12" name="">
-            <a:extLst xmlns:a="http://schemas.openxmlformats.org/drawingml/2006/main">
-              <a:ext uri="{FF2B5EF4-FFF2-40B4-BE49-F238E27FC236}">
-                <a16:creationId xmlns:a16="http://schemas.microsoft.com/office/drawing/2014/main" id="{E6A305DF-55C9-4FCE-B0E6-48C5415F28A1}"/>
-              </a:ext>
-            </a:extLst>
-          </p:cNvPr>
-          <p:cNvSpPr>
-            <a:spLocks xmlns:a="http://schemas.openxmlformats.org/drawingml/2006/main" noGrp="1"/>
-          </p:cNvSpPr>
-          <p:nvPr/>
-        </p:nvSpPr>
-        <p:spPr>
-          <a:xfrm xmlns:a="http://schemas.openxmlformats.org/drawingml/2006/main">
-            <a:off x="2838450" y="2895600"/>
-            <a:ext cx="1428750" cy="419100"/>
-          </a:xfrm>
-          <a:prstGeom xmlns:a="http://schemas.openxmlformats.org/drawingml/2006/main" prst="rect">
-            <a:avLst/>
-          </a:prstGeom>
-          <a:noFill xmlns:a="http://schemas.openxmlformats.org/drawingml/2006/main"/>
-          <a:ln xmlns:a="http://schemas.openxmlformats.org/drawingml/2006/main" w="0">
-            <a:noFill/>
-            <a:prstDash val="solid"/>
-          </a:ln>
-        </p:spPr>
-        <p:txBody>
-          <a:bodyPr xmlns:a="http://schemas.openxmlformats.org/drawingml/2006/main" lIns="0" tIns="0" rIns="0" bIns="0" anchor="ctr">
-            <a:normAutofit fontScale="100000"/>
-          </a:bodyPr>
-          <a:lstStyle xmlns:a="http://schemas.openxmlformats.org/drawingml/2006/main"/>
-          <a:p xmlns:a="http://schemas.openxmlformats.org/drawingml/2006/main">
-            <a:pPr algn="ctr">
-              <a:defRPr sz="2175" b="1">
-                <a:solidFill>
-                  <a:srgbClr val="FFFFFF"/>
-                </a:solidFill>
-                <a:latin typeface="Arial"/>
-                <a:ea typeface="Arial"/>
-                <a:cs typeface="Arial"/>
-              </a:defRPr>
-            </a:pPr>
-            <a:r>
-              <a:rPr sz="2175" b="1">
-                <a:solidFill>
-                  <a:srgbClr val="FFFFFF"/>
-                </a:solidFill>
-                <a:latin typeface="Arial"/>
-                <a:ea typeface="Arial"/>
-                <a:cs typeface="Arial"/>
-              </a:rPr>
-              <a:t>EVENT</a:t>
-            </a:r>
-          </a:p>
-        </p:txBody>
-      </p:sp>
-      <p:sp>
-        <p:nvSpPr>
-          <p:cNvPr id="13" name="">
-            <a:extLst xmlns:a="http://schemas.openxmlformats.org/drawingml/2006/main">
-              <a:ext uri="{FF2B5EF4-FFF2-40B4-BE49-F238E27FC236}">
-                <a16:creationId xmlns:a16="http://schemas.microsoft.com/office/drawing/2014/main" id="{A49DBCB4-A7DE-42C5-B159-48A264931AB8}"/>
-              </a:ext>
-            </a:extLst>
-          </p:cNvPr>
-          <p:cNvSpPr>
-            <a:spLocks xmlns:a="http://schemas.openxmlformats.org/drawingml/2006/main" noGrp="1"/>
-          </p:cNvSpPr>
-          <p:nvPr/>
-        </p:nvSpPr>
-        <p:spPr>
-          <a:xfrm xmlns:a="http://schemas.openxmlformats.org/drawingml/2006/main">
-            <a:off x="2647950" y="4419600"/>
-            <a:ext cx="1809750" cy="666750"/>
+          <p:cNvPr id="10" name="">
+            <a:extLst xmlns:a="http://schemas.openxmlformats.org/drawingml/2006/main">
+              <a:ext uri="{FF2B5EF4-FFF2-40B4-BE49-F238E27FC236}">
+                <a16:creationId xmlns:a16="http://schemas.microsoft.com/office/drawing/2014/main" id="{BDF774BA-B3C2-4B8A-8F8F-96CDF52A5780}"/>
+              </a:ext>
+            </a:extLst>
+          </p:cNvPr>
+          <p:cNvSpPr>
+            <a:spLocks xmlns:a="http://schemas.openxmlformats.org/drawingml/2006/main" noGrp="1"/>
+          </p:cNvSpPr>
+          <p:nvPr/>
+        </p:nvSpPr>
+        <p:spPr>
+          <a:xfrm xmlns:a="http://schemas.openxmlformats.org/drawingml/2006/main">
+            <a:off x="3600450" y="2152650"/>
+            <a:ext cx="4629150" cy="304800"/>
           </a:xfrm>
           <a:prstGeom xmlns:a="http://schemas.openxmlformats.org/drawingml/2006/main" prst="rect">
             <a:avLst/>
@@ -4796,161 +4734,47 @@
           <a:lstStyle xmlns:a="http://schemas.openxmlformats.org/drawingml/2006/main"/>
           <a:p xmlns:a="http://schemas.openxmlformats.org/drawingml/2006/main">
             <a:pPr algn="ctr">
-              <a:defRPr sz="1350" b="0">
-                <a:solidFill>
-                  <a:srgbClr val="576071"/>
-                </a:solidFill>
-                <a:latin typeface="Arial"/>
-                <a:ea typeface="Arial"/>
-                <a:cs typeface="Arial"/>
-              </a:defRPr>
-            </a:pPr>
-            <a:r>
-              <a:rPr sz="1350" b="0">
-                <a:solidFill>
-                  <a:srgbClr val="576071"/>
-                </a:solidFill>
-                <a:latin typeface="Arial"/>
-                <a:ea typeface="Arial"/>
-                <a:cs typeface="Arial"/>
-              </a:rPr>
-              <a:t>Hecho consolidado</a:t>
-            </a:r>
-          </a:p>
-          <a:p xmlns:a="http://schemas.openxmlformats.org/drawingml/2006/main">
-            <a:pPr algn="ctr">
-              <a:defRPr sz="1350" b="0">
-                <a:solidFill>
-                  <a:srgbClr val="576071"/>
-                </a:solidFill>
-                <a:latin typeface="Arial"/>
-                <a:ea typeface="Arial"/>
-                <a:cs typeface="Arial"/>
-              </a:defRPr>
-            </a:pPr>
-            <a:r>
-              <a:rPr sz="1350" b="0">
-                <a:solidFill>
-                  <a:srgbClr val="576071"/>
-                </a:solidFill>
-                <a:latin typeface="Arial"/>
-                <a:ea typeface="Arial"/>
-                <a:cs typeface="Arial"/>
-              </a:rPr>
-              <a:t>aggregate root</a:t>
-            </a:r>
-          </a:p>
-        </p:txBody>
-      </p:sp>
-      <p:sp>
-        <p:nvSpPr>
-          <p:cNvPr id="14" name="">
-            <a:extLst xmlns:a="http://schemas.openxmlformats.org/drawingml/2006/main">
-              <a:ext uri="{FF2B5EF4-FFF2-40B4-BE49-F238E27FC236}">
-                <a16:creationId xmlns:a16="http://schemas.microsoft.com/office/drawing/2014/main" id="{BC107A7C-F184-4D7D-88E9-445E980EF6C5}"/>
-              </a:ext>
-            </a:extLst>
-          </p:cNvPr>
-          <p:cNvSpPr>
-            <a:spLocks xmlns:a="http://schemas.openxmlformats.org/drawingml/2006/main" noGrp="1"/>
-          </p:cNvSpPr>
-          <p:nvPr/>
-        </p:nvSpPr>
-        <p:spPr>
-          <a:xfrm xmlns:a="http://schemas.openxmlformats.org/drawingml/2006/main">
-            <a:off x="4991100" y="2571750"/>
-            <a:ext cx="1714500" cy="1333500"/>
-          </a:xfrm>
-          <a:prstGeom xmlns:a="http://schemas.openxmlformats.org/drawingml/2006/main" prst="roundRect">
-            <a:avLst>
-              <a:gd name="adj" fmla="val 5714"/>
-            </a:avLst>
-          </a:prstGeom>
-          <a:solidFill xmlns:a="http://schemas.openxmlformats.org/drawingml/2006/main">
-            <a:srgbClr val="ECEFF2"/>
-          </a:solidFill>
-          <a:ln xmlns:a="http://schemas.openxmlformats.org/drawingml/2006/main" w="0">
-            <a:noFill/>
-            <a:prstDash val="solid"/>
-          </a:ln>
-        </p:spPr>
-      </p:sp>
-      <p:sp>
-        <p:nvSpPr>
-          <p:cNvPr id="15" name="">
-            <a:extLst xmlns:a="http://schemas.openxmlformats.org/drawingml/2006/main">
-              <a:ext uri="{FF2B5EF4-FFF2-40B4-BE49-F238E27FC236}">
-                <a16:creationId xmlns:a16="http://schemas.microsoft.com/office/drawing/2014/main" id="{68B8F355-B0CC-4D00-8012-89C6440D0697}"/>
-              </a:ext>
-            </a:extLst>
-          </p:cNvPr>
-          <p:cNvSpPr>
-            <a:spLocks xmlns:a="http://schemas.openxmlformats.org/drawingml/2006/main" noGrp="1"/>
-          </p:cNvSpPr>
-          <p:nvPr/>
-        </p:nvSpPr>
-        <p:spPr>
-          <a:xfrm xmlns:a="http://schemas.openxmlformats.org/drawingml/2006/main">
-            <a:off x="5105400" y="2914650"/>
-            <a:ext cx="1485900" cy="419100"/>
-          </a:xfrm>
-          <a:prstGeom xmlns:a="http://schemas.openxmlformats.org/drawingml/2006/main" prst="rect">
-            <a:avLst/>
-          </a:prstGeom>
-          <a:noFill xmlns:a="http://schemas.openxmlformats.org/drawingml/2006/main"/>
-          <a:ln xmlns:a="http://schemas.openxmlformats.org/drawingml/2006/main" w="0">
-            <a:noFill/>
-            <a:prstDash val="solid"/>
-          </a:ln>
-        </p:spPr>
-        <p:txBody>
-          <a:bodyPr xmlns:a="http://schemas.openxmlformats.org/drawingml/2006/main" lIns="0" tIns="0" rIns="0" bIns="0" anchor="ctr">
-            <a:normAutofit fontScale="100000"/>
-          </a:bodyPr>
-          <a:lstStyle xmlns:a="http://schemas.openxmlformats.org/drawingml/2006/main"/>
-          <a:p xmlns:a="http://schemas.openxmlformats.org/drawingml/2006/main">
-            <a:pPr algn="ctr">
-              <a:defRPr sz="1650" b="1">
-                <a:solidFill>
-                  <a:srgbClr val="0A0F18"/>
-                </a:solidFill>
-                <a:latin typeface="Arial"/>
-                <a:ea typeface="Arial"/>
-                <a:cs typeface="Arial"/>
-              </a:defRPr>
-            </a:pPr>
-            <a:r>
-              <a:rPr sz="1650" b="1">
-                <a:solidFill>
-                  <a:srgbClr val="0A0F18"/>
-                </a:solidFill>
-                <a:latin typeface="Arial"/>
-                <a:ea typeface="Arial"/>
-                <a:cs typeface="Arial"/>
-              </a:rPr>
-              <a:t>ANALYSIS</a:t>
-            </a:r>
-          </a:p>
-        </p:txBody>
-      </p:sp>
-      <p:sp>
-        <p:nvSpPr>
-          <p:cNvPr id="16" name="">
-            <a:extLst xmlns:a="http://schemas.openxmlformats.org/drawingml/2006/main">
-              <a:ext uri="{FF2B5EF4-FFF2-40B4-BE49-F238E27FC236}">
-                <a16:creationId xmlns:a16="http://schemas.microsoft.com/office/drawing/2014/main" id="{3A83BFAF-C936-4C66-ACCB-5775D5D0D9C7}"/>
-              </a:ext>
-            </a:extLst>
-          </p:cNvPr>
-          <p:cNvSpPr>
-            <a:spLocks xmlns:a="http://schemas.openxmlformats.org/drawingml/2006/main" noGrp="1"/>
-          </p:cNvSpPr>
-          <p:nvPr/>
-        </p:nvSpPr>
-        <p:spPr>
-          <a:xfrm xmlns:a="http://schemas.openxmlformats.org/drawingml/2006/main">
-            <a:off x="4914900" y="4419600"/>
-            <a:ext cx="1866900" cy="666750"/>
+              <a:defRPr sz="1350" b="1">
+                <a:solidFill>
+                  <a:srgbClr val="D9F0EB"/>
+                </a:solidFill>
+                <a:latin typeface="Arial"/>
+                <a:ea typeface="Arial"/>
+                <a:cs typeface="Arial"/>
+              </a:defRPr>
+            </a:pPr>
+            <a:r>
+              <a:rPr sz="1350" b="1">
+                <a:solidFill>
+                  <a:srgbClr val="D9F0EB"/>
+                </a:solidFill>
+                <a:latin typeface="Arial"/>
+                <a:ea typeface="Arial"/>
+                <a:cs typeface="Arial"/>
+              </a:rPr>
+              <a:t>SPRING BOOT · MONOLITO MODULAR</a:t>
+            </a:r>
+          </a:p>
+        </p:txBody>
+      </p:sp>
+      <p:sp>
+        <p:nvSpPr>
+          <p:cNvPr id="11" name="">
+            <a:extLst xmlns:a="http://schemas.openxmlformats.org/drawingml/2006/main">
+              <a:ext uri="{FF2B5EF4-FFF2-40B4-BE49-F238E27FC236}">
+                <a16:creationId xmlns:a16="http://schemas.microsoft.com/office/drawing/2014/main" id="{1C65AB59-27FC-4946-9A74-EEF5BA8C030F}"/>
+              </a:ext>
+            </a:extLst>
+          </p:cNvPr>
+          <p:cNvSpPr>
+            <a:spLocks xmlns:a="http://schemas.openxmlformats.org/drawingml/2006/main" noGrp="1"/>
+          </p:cNvSpPr>
+          <p:nvPr/>
+        </p:nvSpPr>
+        <p:spPr>
+          <a:xfrm xmlns:a="http://schemas.openxmlformats.org/drawingml/2006/main">
+            <a:off x="3638550" y="2609850"/>
+            <a:ext cx="4552950" cy="342900"/>
           </a:xfrm>
           <a:prstGeom xmlns:a="http://schemas.openxmlformats.org/drawingml/2006/main" prst="rect">
             <a:avLst/>
@@ -4968,78 +4792,259 @@
           <a:lstStyle xmlns:a="http://schemas.openxmlformats.org/drawingml/2006/main"/>
           <a:p xmlns:a="http://schemas.openxmlformats.org/drawingml/2006/main">
             <a:pPr algn="ctr">
-              <a:defRPr sz="1350" b="0">
-                <a:solidFill>
-                  <a:srgbClr val="576071"/>
-                </a:solidFill>
-                <a:latin typeface="Arial"/>
-                <a:ea typeface="Arial"/>
-                <a:cs typeface="Arial"/>
-              </a:defRPr>
-            </a:pPr>
-            <a:r>
-              <a:rPr sz="1350" b="0">
-                <a:solidFill>
-                  <a:srgbClr val="576071"/>
-                </a:solidFill>
-                <a:latin typeface="Arial"/>
-                <a:ea typeface="Arial"/>
-                <a:cs typeface="Arial"/>
-              </a:rPr>
-              <a:t>Lectura IA</a:t>
-            </a:r>
-          </a:p>
+              <a:defRPr sz="1500" b="0">
+                <a:solidFill>
+                  <a:srgbClr val="FFFFFF"/>
+                </a:solidFill>
+                <a:latin typeface="Arial"/>
+                <a:ea typeface="Arial"/>
+                <a:cs typeface="Arial"/>
+              </a:defRPr>
+            </a:pPr>
+            <a:r>
+              <a:rPr sz="1500" b="0">
+                <a:solidFill>
+                  <a:srgbClr val="FFFFFF"/>
+                </a:solidFill>
+                <a:latin typeface="Arial"/>
+                <a:ea typeface="Arial"/>
+                <a:cs typeface="Arial"/>
+              </a:rPr>
+              <a:t>domain  ·  application  ·  infrastructure  ·  api</a:t>
+            </a:r>
+          </a:p>
+        </p:txBody>
+      </p:sp>
+      <p:sp>
+        <p:nvSpPr>
+          <p:cNvPr id="12" name="">
+            <a:extLst xmlns:a="http://schemas.openxmlformats.org/drawingml/2006/main">
+              <a:ext uri="{FF2B5EF4-FFF2-40B4-BE49-F238E27FC236}">
+                <a16:creationId xmlns:a16="http://schemas.microsoft.com/office/drawing/2014/main" id="{E3201635-B590-4BF2-BF72-2ED3C77B1948}"/>
+              </a:ext>
+            </a:extLst>
+          </p:cNvPr>
+          <p:cNvSpPr>
+            <a:spLocks xmlns:a="http://schemas.openxmlformats.org/drawingml/2006/main" noGrp="1"/>
+          </p:cNvSpPr>
+          <p:nvPr/>
+        </p:nvSpPr>
+        <p:spPr>
+          <a:xfrm xmlns:a="http://schemas.openxmlformats.org/drawingml/2006/main">
+            <a:off x="3733800" y="3124200"/>
+            <a:ext cx="4362450" cy="9525"/>
+          </a:xfrm>
+          <a:prstGeom xmlns:a="http://schemas.openxmlformats.org/drawingml/2006/main" prst="rect">
+            <a:avLst/>
+          </a:prstGeom>
+          <a:solidFill xmlns:a="http://schemas.openxmlformats.org/drawingml/2006/main">
+            <a:srgbClr val="526076"/>
+          </a:solidFill>
+          <a:ln xmlns:a="http://schemas.openxmlformats.org/drawingml/2006/main" w="0">
+            <a:noFill/>
+            <a:prstDash val="solid"/>
+          </a:ln>
+        </p:spPr>
+      </p:sp>
+      <p:sp>
+        <p:nvSpPr>
+          <p:cNvPr id="13" name="">
+            <a:extLst xmlns:a="http://schemas.openxmlformats.org/drawingml/2006/main">
+              <a:ext uri="{FF2B5EF4-FFF2-40B4-BE49-F238E27FC236}">
+                <a16:creationId xmlns:a16="http://schemas.microsoft.com/office/drawing/2014/main" id="{C29864A6-E383-44CD-931C-03731BFF832C}"/>
+              </a:ext>
+            </a:extLst>
+          </p:cNvPr>
+          <p:cNvSpPr>
+            <a:spLocks xmlns:a="http://schemas.openxmlformats.org/drawingml/2006/main" noGrp="1"/>
+          </p:cNvSpPr>
+          <p:nvPr/>
+        </p:nvSpPr>
+        <p:spPr>
+          <a:xfrm xmlns:a="http://schemas.openxmlformats.org/drawingml/2006/main">
+            <a:off x="3810000" y="3371850"/>
+            <a:ext cx="4210050" cy="1200150"/>
+          </a:xfrm>
+          <a:prstGeom xmlns:a="http://schemas.openxmlformats.org/drawingml/2006/main" prst="rect">
+            <a:avLst/>
+          </a:prstGeom>
+          <a:noFill xmlns:a="http://schemas.openxmlformats.org/drawingml/2006/main"/>
+          <a:ln xmlns:a="http://schemas.openxmlformats.org/drawingml/2006/main" w="0">
+            <a:noFill/>
+            <a:prstDash val="solid"/>
+          </a:ln>
+        </p:spPr>
+        <p:txBody>
+          <a:bodyPr xmlns:a="http://schemas.openxmlformats.org/drawingml/2006/main" lIns="0" tIns="0" rIns="0" bIns="0" anchor="t">
+            <a:normAutofit fontScale="83333"/>
+          </a:bodyPr>
+          <a:lstStyle xmlns:a="http://schemas.openxmlformats.org/drawingml/2006/main"/>
           <a:p xmlns:a="http://schemas.openxmlformats.org/drawingml/2006/main">
             <a:pPr algn="ctr">
-              <a:defRPr sz="1350" b="0">
-                <a:solidFill>
-                  <a:srgbClr val="576071"/>
-                </a:solidFill>
-                <a:latin typeface="Arial"/>
-                <a:ea typeface="Arial"/>
-                <a:cs typeface="Arial"/>
-              </a:defRPr>
-            </a:pPr>
-            <a:r>
-              <a:rPr sz="1350" b="0">
-                <a:solidFill>
-                  <a:srgbClr val="576071"/>
-                </a:solidFill>
-                <a:latin typeface="Arial"/>
-                <a:ea typeface="Arial"/>
-                <a:cs typeface="Arial"/>
-              </a:rPr>
-              <a:t>con contexto</a:t>
-            </a:r>
-          </a:p>
-        </p:txBody>
-      </p:sp>
-      <p:sp>
-        <p:nvSpPr>
-          <p:cNvPr id="17" name="">
-            <a:extLst xmlns:a="http://schemas.openxmlformats.org/drawingml/2006/main">
-              <a:ext uri="{FF2B5EF4-FFF2-40B4-BE49-F238E27FC236}">
-                <a16:creationId xmlns:a16="http://schemas.microsoft.com/office/drawing/2014/main" id="{B9F4EC32-506D-43A3-9EAB-25ABA7A3CCCA}"/>
-              </a:ext>
-            </a:extLst>
-          </p:cNvPr>
-          <p:cNvSpPr>
-            <a:spLocks xmlns:a="http://schemas.openxmlformats.org/drawingml/2006/main" noGrp="1"/>
-          </p:cNvSpPr>
-          <p:nvPr/>
-        </p:nvSpPr>
-        <p:spPr>
-          <a:xfrm xmlns:a="http://schemas.openxmlformats.org/drawingml/2006/main">
-            <a:off x="7372350" y="2571750"/>
-            <a:ext cx="1714500" cy="1333500"/>
+              <a:defRPr sz="1575" b="0">
+                <a:solidFill>
+                  <a:srgbClr val="FFFFFF"/>
+                </a:solidFill>
+                <a:latin typeface="Arial"/>
+                <a:ea typeface="Arial"/>
+                <a:cs typeface="Arial"/>
+              </a:defRPr>
+            </a:pPr>
+            <a:r>
+              <a:rPr sz="1575" b="0">
+                <a:solidFill>
+                  <a:srgbClr val="FFFFFF"/>
+                </a:solidFill>
+                <a:latin typeface="Arial"/>
+                <a:ea typeface="Arial"/>
+                <a:cs typeface="Arial"/>
+              </a:rPr>
+              <a:t>Reglas de negocio</a:t>
+            </a:r>
+          </a:p>
+          <a:p xmlns:a="http://schemas.openxmlformats.org/drawingml/2006/main">
+            <a:pPr algn="ctr">
+              <a:defRPr sz="1575" b="0">
+                <a:solidFill>
+                  <a:srgbClr val="FFFFFF"/>
+                </a:solidFill>
+                <a:latin typeface="Arial"/>
+                <a:ea typeface="Arial"/>
+                <a:cs typeface="Arial"/>
+              </a:defRPr>
+            </a:pPr>
+            <a:r>
+              <a:rPr sz="1575" b="0">
+                <a:solidFill>
+                  <a:srgbClr val="FFFFFF"/>
+                </a:solidFill>
+                <a:latin typeface="Arial"/>
+                <a:ea typeface="Arial"/>
+                <a:cs typeface="Arial"/>
+              </a:rPr>
+              <a:t>Casos de uso</a:t>
+            </a:r>
+          </a:p>
+          <a:p xmlns:a="http://schemas.openxmlformats.org/drawingml/2006/main">
+            <a:pPr algn="ctr">
+              <a:defRPr sz="1575" b="0">
+                <a:solidFill>
+                  <a:srgbClr val="FFFFFF"/>
+                </a:solidFill>
+                <a:latin typeface="Arial"/>
+                <a:ea typeface="Arial"/>
+                <a:cs typeface="Arial"/>
+              </a:defRPr>
+            </a:pPr>
+            <a:r>
+              <a:rPr sz="1575" b="0">
+                <a:solidFill>
+                  <a:srgbClr val="FFFFFF"/>
+                </a:solidFill>
+                <a:latin typeface="Arial"/>
+                <a:ea typeface="Arial"/>
+                <a:cs typeface="Arial"/>
+              </a:rPr>
+              <a:t>JWT y roles</a:t>
+            </a:r>
+          </a:p>
+          <a:p xmlns:a="http://schemas.openxmlformats.org/drawingml/2006/main">
+            <a:pPr algn="ctr">
+              <a:defRPr sz="1575" b="0">
+                <a:solidFill>
+                  <a:srgbClr val="FFFFFF"/>
+                </a:solidFill>
+                <a:latin typeface="Arial"/>
+                <a:ea typeface="Arial"/>
+                <a:cs typeface="Arial"/>
+              </a:defRPr>
+            </a:pPr>
+            <a:r>
+              <a:rPr sz="1575" b="0">
+                <a:solidFill>
+                  <a:srgbClr val="FFFFFF"/>
+                </a:solidFill>
+                <a:latin typeface="Arial"/>
+                <a:ea typeface="Arial"/>
+                <a:cs typeface="Arial"/>
+              </a:rPr>
+              <a:t>IA y validación</a:t>
+            </a:r>
+          </a:p>
+          <a:p xmlns:a="http://schemas.openxmlformats.org/drawingml/2006/main">
+            <a:pPr algn="ctr">
+              <a:defRPr sz="1575" b="0">
+                <a:solidFill>
+                  <a:srgbClr val="FFFFFF"/>
+                </a:solidFill>
+                <a:latin typeface="Arial"/>
+                <a:ea typeface="Arial"/>
+                <a:cs typeface="Arial"/>
+              </a:defRPr>
+            </a:pPr>
+            <a:r>
+              <a:rPr sz="1575" b="0">
+                <a:solidFill>
+                  <a:srgbClr val="FFFFFF"/>
+                </a:solidFill>
+                <a:latin typeface="Arial"/>
+                <a:ea typeface="Arial"/>
+                <a:cs typeface="Arial"/>
+              </a:rPr>
+              <a:t>Automatizaciones</a:t>
+            </a:r>
+          </a:p>
+          <a:p xmlns:a="http://schemas.openxmlformats.org/drawingml/2006/main">
+            <a:pPr algn="ctr">
+              <a:defRPr sz="1575" b="0">
+                <a:solidFill>
+                  <a:srgbClr val="FFFFFF"/>
+                </a:solidFill>
+                <a:latin typeface="Arial"/>
+                <a:ea typeface="Arial"/>
+                <a:cs typeface="Arial"/>
+              </a:defRPr>
+            </a:pPr>
+            <a:r>
+              <a:rPr sz="1575" b="0">
+                <a:solidFill>
+                  <a:srgbClr val="FFFFFF"/>
+                </a:solidFill>
+                <a:latin typeface="Arial"/>
+                <a:ea typeface="Arial"/>
+                <a:cs typeface="Arial"/>
+              </a:rPr>
+              <a:t>Telegram y auditoría</a:t>
+            </a:r>
+          </a:p>
+        </p:txBody>
+      </p:sp>
+      <p:sp>
+        <p:nvSpPr>
+          <p:cNvPr id="14" name="">
+            <a:extLst xmlns:a="http://schemas.openxmlformats.org/drawingml/2006/main">
+              <a:ext uri="{FF2B5EF4-FFF2-40B4-BE49-F238E27FC236}">
+                <a16:creationId xmlns:a16="http://schemas.microsoft.com/office/drawing/2014/main" id="{4B0A1130-DB93-4ABC-90E4-D03BE5D04C48}"/>
+              </a:ext>
+            </a:extLst>
+          </p:cNvPr>
+          <p:cNvSpPr>
+            <a:spLocks xmlns:a="http://schemas.openxmlformats.org/drawingml/2006/main" noGrp="1"/>
+          </p:cNvSpPr>
+          <p:nvPr/>
+        </p:nvSpPr>
+        <p:spPr>
+          <a:xfrm xmlns:a="http://schemas.openxmlformats.org/drawingml/2006/main">
+            <a:off x="9239250" y="2133600"/>
+            <a:ext cx="2400300" cy="2571750"/>
           </a:xfrm>
           <a:prstGeom xmlns:a="http://schemas.openxmlformats.org/drawingml/2006/main" prst="roundRect">
             <a:avLst>
-              <a:gd name="adj" fmla="val 5714"/>
+              <a:gd name="adj" fmla="val 3175"/>
             </a:avLst>
           </a:prstGeom>
           <a:solidFill xmlns:a="http://schemas.openxmlformats.org/drawingml/2006/main">
-            <a:srgbClr val="ECEFF2"/>
+            <a:srgbClr val="D9F0EB"/>
           </a:solidFill>
           <a:ln xmlns:a="http://schemas.openxmlformats.org/drawingml/2006/main" w="0">
             <a:noFill/>
@@ -5049,80 +5054,22 @@
       </p:sp>
       <p:sp>
         <p:nvSpPr>
-          <p:cNvPr id="18" name="">
-            <a:extLst xmlns:a="http://schemas.openxmlformats.org/drawingml/2006/main">
-              <a:ext uri="{FF2B5EF4-FFF2-40B4-BE49-F238E27FC236}">
-                <a16:creationId xmlns:a16="http://schemas.microsoft.com/office/drawing/2014/main" id="{C59A37B3-9858-44E5-B5F1-5FBA9C71495A}"/>
-              </a:ext>
-            </a:extLst>
-          </p:cNvPr>
-          <p:cNvSpPr>
-            <a:spLocks xmlns:a="http://schemas.openxmlformats.org/drawingml/2006/main" noGrp="1"/>
-          </p:cNvSpPr>
-          <p:nvPr/>
-        </p:nvSpPr>
-        <p:spPr>
-          <a:xfrm xmlns:a="http://schemas.openxmlformats.org/drawingml/2006/main">
-            <a:off x="7486650" y="2914650"/>
-            <a:ext cx="1485900" cy="419100"/>
-          </a:xfrm>
-          <a:prstGeom xmlns:a="http://schemas.openxmlformats.org/drawingml/2006/main" prst="rect">
-            <a:avLst/>
-          </a:prstGeom>
-          <a:noFill xmlns:a="http://schemas.openxmlformats.org/drawingml/2006/main"/>
-          <a:ln xmlns:a="http://schemas.openxmlformats.org/drawingml/2006/main" w="0">
-            <a:noFill/>
-            <a:prstDash val="solid"/>
-          </a:ln>
-        </p:spPr>
-        <p:txBody>
-          <a:bodyPr xmlns:a="http://schemas.openxmlformats.org/drawingml/2006/main" lIns="0" tIns="0" rIns="0" bIns="0" anchor="ctr">
-            <a:normAutofit fontScale="100000"/>
-          </a:bodyPr>
-          <a:lstStyle xmlns:a="http://schemas.openxmlformats.org/drawingml/2006/main"/>
-          <a:p xmlns:a="http://schemas.openxmlformats.org/drawingml/2006/main">
-            <a:pPr algn="ctr">
-              <a:defRPr sz="1650" b="1">
-                <a:solidFill>
-                  <a:srgbClr val="0A0F18"/>
-                </a:solidFill>
-                <a:latin typeface="Arial"/>
-                <a:ea typeface="Arial"/>
-                <a:cs typeface="Arial"/>
-              </a:defRPr>
-            </a:pPr>
-            <a:r>
-              <a:rPr sz="1650" b="1">
-                <a:solidFill>
-                  <a:srgbClr val="0A0F18"/>
-                </a:solidFill>
-                <a:latin typeface="Arial"/>
-                <a:ea typeface="Arial"/>
-                <a:cs typeface="Arial"/>
-              </a:rPr>
-              <a:t>CONTENT</a:t>
-            </a:r>
-          </a:p>
-        </p:txBody>
-      </p:sp>
-      <p:sp>
-        <p:nvSpPr>
-          <p:cNvPr id="19" name="">
-            <a:extLst xmlns:a="http://schemas.openxmlformats.org/drawingml/2006/main">
-              <a:ext uri="{FF2B5EF4-FFF2-40B4-BE49-F238E27FC236}">
-                <a16:creationId xmlns:a16="http://schemas.microsoft.com/office/drawing/2014/main" id="{D869B06B-26D1-4DB9-BD19-D54F104D9A67}"/>
-              </a:ext>
-            </a:extLst>
-          </p:cNvPr>
-          <p:cNvSpPr>
-            <a:spLocks xmlns:a="http://schemas.openxmlformats.org/drawingml/2006/main" noGrp="1"/>
-          </p:cNvSpPr>
-          <p:nvPr/>
-        </p:nvSpPr>
-        <p:spPr>
-          <a:xfrm xmlns:a="http://schemas.openxmlformats.org/drawingml/2006/main">
-            <a:off x="7296150" y="4419600"/>
-            <a:ext cx="1866900" cy="666750"/>
+          <p:cNvPr id="15" name="">
+            <a:extLst xmlns:a="http://schemas.openxmlformats.org/drawingml/2006/main">
+              <a:ext uri="{FF2B5EF4-FFF2-40B4-BE49-F238E27FC236}">
+                <a16:creationId xmlns:a16="http://schemas.microsoft.com/office/drawing/2014/main" id="{A542E035-8903-4A72-8A90-65D2C59522DC}"/>
+              </a:ext>
+            </a:extLst>
+          </p:cNvPr>
+          <p:cNvSpPr>
+            <a:spLocks xmlns:a="http://schemas.openxmlformats.org/drawingml/2006/main" noGrp="1"/>
+          </p:cNvSpPr>
+          <p:nvPr/>
+        </p:nvSpPr>
+        <p:spPr>
+          <a:xfrm xmlns:a="http://schemas.openxmlformats.org/drawingml/2006/main">
+            <a:off x="9486900" y="2381250"/>
+            <a:ext cx="1905000" cy="285750"/>
           </a:xfrm>
           <a:prstGeom xmlns:a="http://schemas.openxmlformats.org/drawingml/2006/main" prst="rect">
             <a:avLst/>
@@ -5140,192 +5087,47 @@
           <a:lstStyle xmlns:a="http://schemas.openxmlformats.org/drawingml/2006/main"/>
           <a:p xmlns:a="http://schemas.openxmlformats.org/drawingml/2006/main">
             <a:pPr algn="ctr">
-              <a:defRPr sz="1350" b="0">
-                <a:solidFill>
-                  <a:srgbClr val="576071"/>
-                </a:solidFill>
-                <a:latin typeface="Arial"/>
-                <a:ea typeface="Arial"/>
-                <a:cs typeface="Arial"/>
-              </a:defRPr>
-            </a:pPr>
-            <a:r>
-              <a:rPr sz="1350" b="0">
-                <a:solidFill>
-                  <a:srgbClr val="576071"/>
-                </a:solidFill>
-                <a:latin typeface="Arial"/>
-                <a:ea typeface="Arial"/>
-                <a:cs typeface="Arial"/>
-              </a:rPr>
-              <a:t>Borrador sujeto</a:t>
-            </a:r>
-          </a:p>
-          <a:p xmlns:a="http://schemas.openxmlformats.org/drawingml/2006/main">
-            <a:pPr algn="ctr">
-              <a:defRPr sz="1350" b="0">
-                <a:solidFill>
-                  <a:srgbClr val="576071"/>
-                </a:solidFill>
-                <a:latin typeface="Arial"/>
-                <a:ea typeface="Arial"/>
-                <a:cs typeface="Arial"/>
-              </a:defRPr>
-            </a:pPr>
-            <a:r>
-              <a:rPr sz="1350" b="0">
-                <a:solidFill>
-                  <a:srgbClr val="576071"/>
-                </a:solidFill>
-                <a:latin typeface="Arial"/>
-                <a:ea typeface="Arial"/>
-                <a:cs typeface="Arial"/>
-              </a:rPr>
-              <a:t>a revisión</a:t>
-            </a:r>
-          </a:p>
-        </p:txBody>
-      </p:sp>
-      <p:sp>
-        <p:nvSpPr>
-          <p:cNvPr id="20" name="">
-            <a:extLst xmlns:a="http://schemas.openxmlformats.org/drawingml/2006/main">
-              <a:ext uri="{FF2B5EF4-FFF2-40B4-BE49-F238E27FC236}">
-                <a16:creationId xmlns:a16="http://schemas.microsoft.com/office/drawing/2014/main" id="{657263FD-BD25-465F-9F5E-3C6059FC7141}"/>
-              </a:ext>
-            </a:extLst>
-          </p:cNvPr>
-          <p:cNvSpPr>
-            <a:spLocks xmlns:a="http://schemas.openxmlformats.org/drawingml/2006/main" noGrp="1"/>
-          </p:cNvSpPr>
-          <p:nvPr/>
-        </p:nvSpPr>
-        <p:spPr>
-          <a:xfrm xmlns:a="http://schemas.openxmlformats.org/drawingml/2006/main">
-            <a:off x="9601200" y="2190750"/>
-            <a:ext cx="2076450" cy="3143250"/>
-          </a:xfrm>
-          <a:prstGeom xmlns:a="http://schemas.openxmlformats.org/drawingml/2006/main" prst="rect">
-            <a:avLst/>
-          </a:prstGeom>
-          <a:solidFill xmlns:a="http://schemas.openxmlformats.org/drawingml/2006/main">
-            <a:srgbClr val="FBFCFD"/>
-          </a:solidFill>
-          <a:ln xmlns:a="http://schemas.openxmlformats.org/drawingml/2006/main" w="0">
-            <a:noFill/>
-            <a:prstDash val="solid"/>
-          </a:ln>
-        </p:spPr>
-      </p:sp>
-      <p:sp>
-        <p:nvSpPr>
-          <p:cNvPr id="21" name="">
-            <a:extLst xmlns:a="http://schemas.openxmlformats.org/drawingml/2006/main">
-              <a:ext uri="{FF2B5EF4-FFF2-40B4-BE49-F238E27FC236}">
-                <a16:creationId xmlns:a16="http://schemas.microsoft.com/office/drawing/2014/main" id="{46C68E32-C9FE-4831-B9D3-BCED7B78B23E}"/>
-              </a:ext>
-            </a:extLst>
-          </p:cNvPr>
-          <p:cNvSpPr>
-            <a:spLocks xmlns:a="http://schemas.openxmlformats.org/drawingml/2006/main" noGrp="1"/>
-          </p:cNvSpPr>
-          <p:nvPr/>
-        </p:nvSpPr>
-        <p:spPr>
-          <a:xfrm xmlns:a="http://schemas.openxmlformats.org/drawingml/2006/main">
-            <a:off x="9696450" y="2571750"/>
-            <a:ext cx="1847850" cy="1333500"/>
-          </a:xfrm>
-          <a:prstGeom xmlns:a="http://schemas.openxmlformats.org/drawingml/2006/main" prst="roundRect">
-            <a:avLst>
-              <a:gd name="adj" fmla="val 5714"/>
-            </a:avLst>
-          </a:prstGeom>
-          <a:solidFill xmlns:a="http://schemas.openxmlformats.org/drawingml/2006/main">
-            <a:srgbClr val="ECEFF2"/>
-          </a:solidFill>
-          <a:ln xmlns:a="http://schemas.openxmlformats.org/drawingml/2006/main" w="0">
-            <a:noFill/>
-            <a:prstDash val="solid"/>
-          </a:ln>
-        </p:spPr>
-      </p:sp>
-      <p:sp>
-        <p:nvSpPr>
-          <p:cNvPr id="22" name="">
-            <a:extLst xmlns:a="http://schemas.openxmlformats.org/drawingml/2006/main">
-              <a:ext uri="{FF2B5EF4-FFF2-40B4-BE49-F238E27FC236}">
-                <a16:creationId xmlns:a16="http://schemas.microsoft.com/office/drawing/2014/main" id="{E84B74D5-5F49-45D2-8517-B371BCF59EA4}"/>
-              </a:ext>
-            </a:extLst>
-          </p:cNvPr>
-          <p:cNvSpPr>
-            <a:spLocks xmlns:a="http://schemas.openxmlformats.org/drawingml/2006/main" noGrp="1"/>
-          </p:cNvSpPr>
-          <p:nvPr/>
-        </p:nvSpPr>
-        <p:spPr>
-          <a:xfrm xmlns:a="http://schemas.openxmlformats.org/drawingml/2006/main">
-            <a:off x="9810750" y="2914650"/>
-            <a:ext cx="1619250" cy="419100"/>
-          </a:xfrm>
-          <a:prstGeom xmlns:a="http://schemas.openxmlformats.org/drawingml/2006/main" prst="rect">
-            <a:avLst/>
-          </a:prstGeom>
-          <a:noFill xmlns:a="http://schemas.openxmlformats.org/drawingml/2006/main"/>
-          <a:ln xmlns:a="http://schemas.openxmlformats.org/drawingml/2006/main" w="0">
-            <a:noFill/>
-            <a:prstDash val="solid"/>
-          </a:ln>
-        </p:spPr>
-        <p:txBody>
-          <a:bodyPr xmlns:a="http://schemas.openxmlformats.org/drawingml/2006/main" lIns="0" tIns="0" rIns="0" bIns="0" anchor="ctr">
-            <a:normAutofit fontScale="100000"/>
-          </a:bodyPr>
-          <a:lstStyle xmlns:a="http://schemas.openxmlformats.org/drawingml/2006/main"/>
-          <a:p xmlns:a="http://schemas.openxmlformats.org/drawingml/2006/main">
-            <a:pPr algn="ctr">
-              <a:defRPr sz="1650" b="1">
-                <a:solidFill>
-                  <a:srgbClr val="0A0F18"/>
-                </a:solidFill>
-                <a:latin typeface="Arial"/>
-                <a:ea typeface="Arial"/>
-                <a:cs typeface="Arial"/>
-              </a:defRPr>
-            </a:pPr>
-            <a:r>
-              <a:rPr sz="1650" b="1">
-                <a:solidFill>
-                  <a:srgbClr val="0A0F18"/>
-                </a:solidFill>
-                <a:latin typeface="Arial"/>
-                <a:ea typeface="Arial"/>
-                <a:cs typeface="Arial"/>
-              </a:rPr>
-              <a:t>PUBLICATION</a:t>
-            </a:r>
-          </a:p>
-        </p:txBody>
-      </p:sp>
-      <p:sp>
-        <p:nvSpPr>
-          <p:cNvPr id="23" name="">
-            <a:extLst xmlns:a="http://schemas.openxmlformats.org/drawingml/2006/main">
-              <a:ext uri="{FF2B5EF4-FFF2-40B4-BE49-F238E27FC236}">
-                <a16:creationId xmlns:a16="http://schemas.microsoft.com/office/drawing/2014/main" id="{4D1884C5-141A-4B9D-9F63-5079F85C6638}"/>
-              </a:ext>
-            </a:extLst>
-          </p:cNvPr>
-          <p:cNvSpPr>
-            <a:spLocks xmlns:a="http://schemas.openxmlformats.org/drawingml/2006/main" noGrp="1"/>
-          </p:cNvSpPr>
-          <p:nvPr/>
-        </p:nvSpPr>
-        <p:spPr>
-          <a:xfrm xmlns:a="http://schemas.openxmlformats.org/drawingml/2006/main">
-            <a:off x="9620250" y="4419600"/>
-            <a:ext cx="2000250" cy="666750"/>
+              <a:defRPr sz="1200" b="1">
+                <a:solidFill>
+                  <a:srgbClr val="0D766E"/>
+                </a:solidFill>
+                <a:latin typeface="Arial"/>
+                <a:ea typeface="Arial"/>
+                <a:cs typeface="Arial"/>
+              </a:defRPr>
+            </a:pPr>
+            <a:r>
+              <a:rPr sz="1200" b="1">
+                <a:solidFill>
+                  <a:srgbClr val="0D766E"/>
+                </a:solidFill>
+                <a:latin typeface="Arial"/>
+                <a:ea typeface="Arial"/>
+                <a:cs typeface="Arial"/>
+              </a:rPr>
+              <a:t>SALIDAS</a:t>
+            </a:r>
+          </a:p>
+        </p:txBody>
+      </p:sp>
+      <p:sp>
+        <p:nvSpPr>
+          <p:cNvPr id="16" name="">
+            <a:extLst xmlns:a="http://schemas.openxmlformats.org/drawingml/2006/main">
+              <a:ext uri="{FF2B5EF4-FFF2-40B4-BE49-F238E27FC236}">
+                <a16:creationId xmlns:a16="http://schemas.microsoft.com/office/drawing/2014/main" id="{858A8268-5AF7-494C-9A8E-C7E374D70E22}"/>
+              </a:ext>
+            </a:extLst>
+          </p:cNvPr>
+          <p:cNvSpPr>
+            <a:spLocks xmlns:a="http://schemas.openxmlformats.org/drawingml/2006/main" noGrp="1"/>
+          </p:cNvSpPr>
+          <p:nvPr/>
+        </p:nvSpPr>
+        <p:spPr>
+          <a:xfrm xmlns:a="http://schemas.openxmlformats.org/drawingml/2006/main">
+            <a:off x="9505950" y="2876550"/>
+            <a:ext cx="1866900" cy="1600200"/>
           </a:xfrm>
           <a:prstGeom xmlns:a="http://schemas.openxmlformats.org/drawingml/2006/main" prst="rect">
             <a:avLst/>
@@ -5343,70 +5145,139 @@
           <a:lstStyle xmlns:a="http://schemas.openxmlformats.org/drawingml/2006/main"/>
           <a:p xmlns:a="http://schemas.openxmlformats.org/drawingml/2006/main">
             <a:pPr algn="ctr">
-              <a:defRPr sz="1350" b="0">
-                <a:solidFill>
-                  <a:srgbClr val="576071"/>
-                </a:solidFill>
-                <a:latin typeface="Arial"/>
-                <a:ea typeface="Arial"/>
-                <a:cs typeface="Arial"/>
-              </a:defRPr>
-            </a:pPr>
-            <a:r>
-              <a:rPr sz="1350" b="0">
-                <a:solidFill>
-                  <a:srgbClr val="576071"/>
-                </a:solidFill>
-                <a:latin typeface="Arial"/>
-                <a:ea typeface="Arial"/>
-                <a:cs typeface="Arial"/>
-              </a:rPr>
-              <a:t>Envío aprobado</a:t>
+              <a:defRPr sz="1650" b="0">
+                <a:solidFill>
+                  <a:srgbClr val="0A0F18"/>
+                </a:solidFill>
+                <a:latin typeface="Arial"/>
+                <a:ea typeface="Arial"/>
+                <a:cs typeface="Arial"/>
+              </a:defRPr>
+            </a:pPr>
+            <a:r>
+              <a:rPr sz="1650" b="0">
+                <a:solidFill>
+                  <a:srgbClr val="0A0F18"/>
+                </a:solidFill>
+                <a:latin typeface="Arial"/>
+                <a:ea typeface="Arial"/>
+                <a:cs typeface="Arial"/>
+              </a:rPr>
+              <a:t>Angular</a:t>
             </a:r>
           </a:p>
           <a:p xmlns:a="http://schemas.openxmlformats.org/drawingml/2006/main">
             <a:pPr algn="ctr">
-              <a:defRPr sz="1350" b="0">
-                <a:solidFill>
-                  <a:srgbClr val="576071"/>
-                </a:solidFill>
-                <a:latin typeface="Arial"/>
-                <a:ea typeface="Arial"/>
-                <a:cs typeface="Arial"/>
-              </a:defRPr>
-            </a:pPr>
-            <a:r>
-              <a:rPr sz="1350" b="0">
-                <a:solidFill>
-                  <a:srgbClr val="576071"/>
-                </a:solidFill>
-                <a:latin typeface="Arial"/>
-                <a:ea typeface="Arial"/>
-                <a:cs typeface="Arial"/>
-              </a:rPr>
-              <a:t>y trazable</a:t>
-            </a:r>
-          </a:p>
-        </p:txBody>
-      </p:sp>
-      <p:sp>
-        <p:nvSpPr>
-          <p:cNvPr id="24" name="">
-            <a:extLst xmlns:a="http://schemas.openxmlformats.org/drawingml/2006/main">
-              <a:ext uri="{FF2B5EF4-FFF2-40B4-BE49-F238E27FC236}">
-                <a16:creationId xmlns:a16="http://schemas.microsoft.com/office/drawing/2014/main" id="{BF5CC87C-5809-4B36-A25B-930569904925}"/>
-              </a:ext>
-            </a:extLst>
-          </p:cNvPr>
-          <p:cNvSpPr>
-            <a:spLocks xmlns:a="http://schemas.openxmlformats.org/drawingml/2006/main" noGrp="1"/>
-          </p:cNvSpPr>
-          <p:nvPr/>
-        </p:nvSpPr>
-        <p:spPr>
-          <a:xfrm xmlns:a="http://schemas.openxmlformats.org/drawingml/2006/main">
-            <a:off x="2286000" y="5581650"/>
-            <a:ext cx="7620000" cy="400050"/>
+              <a:defRPr sz="1650" b="0">
+                <a:solidFill>
+                  <a:srgbClr val="0A0F18"/>
+                </a:solidFill>
+                <a:latin typeface="Arial"/>
+                <a:ea typeface="Arial"/>
+                <a:cs typeface="Arial"/>
+              </a:defRPr>
+            </a:pPr>
+            <a:r>
+              <a:rPr sz="1650" b="0">
+                <a:solidFill>
+                  <a:srgbClr val="0A0F18"/>
+                </a:solidFill>
+                <a:latin typeface="Arial"/>
+                <a:ea typeface="Arial"/>
+                <a:cs typeface="Arial"/>
+              </a:rPr>
+              <a:t>PostgreSQL</a:t>
+            </a:r>
+          </a:p>
+          <a:p xmlns:a="http://schemas.openxmlformats.org/drawingml/2006/main">
+            <a:pPr algn="ctr">
+              <a:defRPr sz="1650" b="0">
+                <a:solidFill>
+                  <a:srgbClr val="0A0F18"/>
+                </a:solidFill>
+                <a:latin typeface="Arial"/>
+                <a:ea typeface="Arial"/>
+                <a:cs typeface="Arial"/>
+              </a:defRPr>
+            </a:pPr>
+            <a:r>
+              <a:rPr sz="1650" b="0">
+                <a:solidFill>
+                  <a:srgbClr val="0A0F18"/>
+                </a:solidFill>
+                <a:latin typeface="Arial"/>
+                <a:ea typeface="Arial"/>
+                <a:cs typeface="Arial"/>
+              </a:rPr>
+              <a:t>Gemini opcional</a:t>
+            </a:r>
+          </a:p>
+          <a:p xmlns:a="http://schemas.openxmlformats.org/drawingml/2006/main">
+            <a:pPr algn="ctr">
+              <a:defRPr sz="1650" b="0">
+                <a:solidFill>
+                  <a:srgbClr val="0A0F18"/>
+                </a:solidFill>
+                <a:latin typeface="Arial"/>
+                <a:ea typeface="Arial"/>
+                <a:cs typeface="Arial"/>
+              </a:defRPr>
+            </a:pPr>
+            <a:r>
+              <a:rPr sz="1650" b="0">
+                <a:solidFill>
+                  <a:srgbClr val="0A0F18"/>
+                </a:solidFill>
+                <a:latin typeface="Arial"/>
+                <a:ea typeface="Arial"/>
+                <a:cs typeface="Arial"/>
+              </a:rPr>
+              <a:t>Telegram</a:t>
+            </a:r>
+          </a:p>
+          <a:p xmlns:a="http://schemas.openxmlformats.org/drawingml/2006/main">
+            <a:pPr algn="ctr">
+              <a:defRPr sz="1650" b="0">
+                <a:solidFill>
+                  <a:srgbClr val="0A0F18"/>
+                </a:solidFill>
+                <a:latin typeface="Arial"/>
+                <a:ea typeface="Arial"/>
+                <a:cs typeface="Arial"/>
+              </a:defRPr>
+            </a:pPr>
+            <a:r>
+              <a:rPr sz="1650" b="0">
+                <a:solidFill>
+                  <a:srgbClr val="0A0F18"/>
+                </a:solidFill>
+                <a:latin typeface="Arial"/>
+                <a:ea typeface="Arial"/>
+                <a:cs typeface="Arial"/>
+              </a:rPr>
+              <a:t>MailHog</a:t>
+            </a:r>
+          </a:p>
+        </p:txBody>
+      </p:sp>
+      <p:sp>
+        <p:nvSpPr>
+          <p:cNvPr id="17" name="">
+            <a:extLst xmlns:a="http://schemas.openxmlformats.org/drawingml/2006/main">
+              <a:ext uri="{FF2B5EF4-FFF2-40B4-BE49-F238E27FC236}">
+                <a16:creationId xmlns:a16="http://schemas.microsoft.com/office/drawing/2014/main" id="{1C1FA576-F89A-45D0-8F31-DCCA40793E61}"/>
+              </a:ext>
+            </a:extLst>
+          </p:cNvPr>
+          <p:cNvSpPr>
+            <a:spLocks xmlns:a="http://schemas.openxmlformats.org/drawingml/2006/main" noGrp="1"/>
+          </p:cNvSpPr>
+          <p:nvPr/>
+        </p:nvSpPr>
+        <p:spPr>
+          <a:xfrm xmlns:a="http://schemas.openxmlformats.org/drawingml/2006/main">
+            <a:off x="3257550" y="5467350"/>
+            <a:ext cx="5314950" cy="361950"/>
           </a:xfrm>
           <a:prstGeom xmlns:a="http://schemas.openxmlformats.org/drawingml/2006/main" prst="rect">
             <a:avLst/>
@@ -5424,7 +5295,7 @@
           <a:lstStyle xmlns:a="http://schemas.openxmlformats.org/drawingml/2006/main"/>
           <a:p xmlns:a="http://schemas.openxmlformats.org/drawingml/2006/main">
             <a:pPr algn="ctr">
-              <a:defRPr sz="2100" b="1">
+              <a:defRPr sz="1725" b="1">
                 <a:solidFill>
                   <a:srgbClr val="0D766E"/>
                 </a:solidFill>
@@ -5434,7 +5305,7 @@
               </a:defRPr>
             </a:pPr>
             <a:r>
-              <a:rPr sz="2100" b="1">
+              <a:rPr sz="1725" b="1">
                 <a:solidFill>
                   <a:srgbClr val="0D766E"/>
                 </a:solidFill>
@@ -5442,17 +5313,17 @@
                 <a:ea typeface="Arial"/>
                 <a:cs typeface="Arial"/>
               </a:rPr>
-              <a:t>La IA propone. El dominio valida. Una persona aprueba.</a:t>
-            </a:r>
-          </a:p>
-        </p:txBody>
-      </p:sp>
-      <p:sp>
-        <p:nvSpPr>
-          <p:cNvPr id="25" name="footer-3">
-            <a:extLst xmlns:a="http://schemas.openxmlformats.org/drawingml/2006/main">
-              <a:ext uri="{FF2B5EF4-FFF2-40B4-BE49-F238E27FC236}">
-                <a16:creationId xmlns:a16="http://schemas.microsoft.com/office/drawing/2014/main" id="{57E29170-EC2E-4CA9-AD67-45B09E8175B3}"/>
+              <a:t>DDD · Clean Architecture · PostgreSQL + Flyway</a:t>
+            </a:r>
+          </a:p>
+        </p:txBody>
+      </p:sp>
+      <p:sp>
+        <p:nvSpPr>
+          <p:cNvPr id="18" name="footer-3">
+            <a:extLst xmlns:a="http://schemas.openxmlformats.org/drawingml/2006/main">
+              <a:ext uri="{FF2B5EF4-FFF2-40B4-BE49-F238E27FC236}">
+                <a16:creationId xmlns:a16="http://schemas.microsoft.com/office/drawing/2014/main" id="{B36D3FAE-C804-4C98-A0A8-EC4E09B83C11}"/>
               </a:ext>
             </a:extLst>
           </p:cNvPr>
@@ -5508,7 +5379,7 @@
     </p:spTree>
     <p:extLst>
       <p:ext uri="{BB962C8B-B14F-4D97-AF65-F5344CB8AC3E}">
-        <p14:creationId xmlns:p14="http://schemas.microsoft.com/office/powerpoint/2010/main" val="364367291"/>
+        <p14:creationId xmlns:p14="http://schemas.microsoft.com/office/powerpoint/2010/main" val="185070881"/>
       </p:ext>
     </p:extLst>
   </p:cSld>
@@ -5536,10 +5407,10 @@
       </p:grpSpPr>
       <p:sp>
         <p:nvSpPr>
-          <p:cNvPr id="19" name="eyebrow-4">
-            <a:extLst xmlns:a="http://schemas.openxmlformats.org/drawingml/2006/main">
-              <a:ext uri="{FF2B5EF4-FFF2-40B4-BE49-F238E27FC236}">
-                <a16:creationId xmlns:a16="http://schemas.microsoft.com/office/drawing/2014/main" id="{69621545-3F68-4425-A2D9-8A908395BF25}"/>
+          <p:cNvPr id="26" name="eyebrow-4">
+            <a:extLst xmlns:a="http://schemas.openxmlformats.org/drawingml/2006/main">
+              <a:ext uri="{FF2B5EF4-FFF2-40B4-BE49-F238E27FC236}">
+                <a16:creationId xmlns:a16="http://schemas.microsoft.com/office/drawing/2014/main" id="{745B5817-742F-4E48-896E-F23A227B7239}"/>
               </a:ext>
             </a:extLst>
           </p:cNvPr>
@@ -5587,7 +5458,7 @@
                 <a:ea typeface="Arial"/>
                 <a:cs typeface="Arial"/>
               </a:rPr>
-              <a:t>ARQUITECTURA</a:t>
+              <a:t>MODELO DE DOMINIO</a:t>
             </a:r>
           </a:p>
         </p:txBody>
@@ -5597,7 +5468,7 @@
           <p:cNvPr id="2" name="title-4">
             <a:extLst xmlns:a="http://schemas.openxmlformats.org/drawingml/2006/main">
               <a:ext uri="{FF2B5EF4-FFF2-40B4-BE49-F238E27FC236}">
-                <a16:creationId xmlns:a16="http://schemas.microsoft.com/office/drawing/2014/main" id="{374CCD76-DB21-476C-A089-5F7112C41F8E}"/>
+                <a16:creationId xmlns:a16="http://schemas.microsoft.com/office/drawing/2014/main" id="{3A890180-F9A8-48DA-849C-94B39D9E34F5}"/>
               </a:ext>
             </a:extLst>
           </p:cNvPr>
@@ -5622,7 +5493,7 @@
         </p:spPr>
         <p:txBody>
           <a:bodyPr xmlns:a="http://schemas.openxmlformats.org/drawingml/2006/main" lIns="0" tIns="0" rIns="0" bIns="0" anchor="t">
-            <a:normAutofit fontScale="96971"/>
+            <a:normAutofit fontScale="100000"/>
           </a:bodyPr>
           <a:lstStyle xmlns:a="http://schemas.openxmlformats.org/drawingml/2006/main"/>
           <a:p xmlns:a="http://schemas.openxmlformats.org/drawingml/2006/main">
@@ -5645,7 +5516,7 @@
                 <a:ea typeface="Arial"/>
                 <a:cs typeface="Arial"/>
               </a:rPr>
-              <a:t>Spring Boot concentra el dominio y limita cada integración</a:t>
+              <a:t>El flujo transforma noticias en decisiones publicables</a:t>
             </a:r>
           </a:p>
         </p:txBody>
@@ -5655,7 +5526,7 @@
           <p:cNvPr id="3" name="">
             <a:extLst xmlns:a="http://schemas.openxmlformats.org/drawingml/2006/main">
               <a:ext uri="{FF2B5EF4-FFF2-40B4-BE49-F238E27FC236}">
-                <a16:creationId xmlns:a16="http://schemas.microsoft.com/office/drawing/2014/main" id="{44E93298-F3B9-48A5-BD0E-ADCC30269DF3}"/>
+                <a16:creationId xmlns:a16="http://schemas.microsoft.com/office/drawing/2014/main" id="{E8A2485D-6642-4930-87AC-0DEA6C7F3E77}"/>
               </a:ext>
             </a:extLst>
           </p:cNvPr>
@@ -5686,19 +5557,50 @@
           <p:cNvPr id="4" name="">
             <a:extLst xmlns:a="http://schemas.openxmlformats.org/drawingml/2006/main">
               <a:ext uri="{FF2B5EF4-FFF2-40B4-BE49-F238E27FC236}">
-                <a16:creationId xmlns:a16="http://schemas.microsoft.com/office/drawing/2014/main" id="{CD4B2192-3403-41D5-A0D5-C974324B994E}"/>
-              </a:ext>
-            </a:extLst>
-          </p:cNvPr>
-          <p:cNvSpPr>
-            <a:spLocks xmlns:a="http://schemas.openxmlformats.org/drawingml/2006/main" noGrp="1"/>
-          </p:cNvSpPr>
-          <p:nvPr/>
-        </p:nvSpPr>
-        <p:spPr>
-          <a:xfrm xmlns:a="http://schemas.openxmlformats.org/drawingml/2006/main">
-            <a:off x="2590800" y="3257550"/>
-            <a:ext cx="666750" cy="323850"/>
+                <a16:creationId xmlns:a16="http://schemas.microsoft.com/office/drawing/2014/main" id="{B2D14768-E92D-42BC-A8FB-CE5A2D3FC474}"/>
+              </a:ext>
+            </a:extLst>
+          </p:cNvPr>
+          <p:cNvSpPr>
+            <a:spLocks xmlns:a="http://schemas.openxmlformats.org/drawingml/2006/main" noGrp="1"/>
+          </p:cNvSpPr>
+          <p:nvPr/>
+        </p:nvSpPr>
+        <p:spPr>
+          <a:xfrm xmlns:a="http://schemas.openxmlformats.org/drawingml/2006/main">
+            <a:off x="2133600" y="3105150"/>
+            <a:ext cx="495300" cy="304800"/>
+          </a:xfrm>
+          <a:prstGeom xmlns:a="http://schemas.openxmlformats.org/drawingml/2006/main" prst="rightArrow">
+            <a:avLst/>
+          </a:prstGeom>
+          <a:solidFill xmlns:a="http://schemas.openxmlformats.org/drawingml/2006/main">
+            <a:srgbClr val="0D766E"/>
+          </a:solidFill>
+          <a:ln xmlns:a="http://schemas.openxmlformats.org/drawingml/2006/main" w="0">
+            <a:noFill/>
+            <a:prstDash val="solid"/>
+          </a:ln>
+        </p:spPr>
+      </p:sp>
+      <p:sp>
+        <p:nvSpPr>
+          <p:cNvPr id="5" name="">
+            <a:extLst xmlns:a="http://schemas.openxmlformats.org/drawingml/2006/main">
+              <a:ext uri="{FF2B5EF4-FFF2-40B4-BE49-F238E27FC236}">
+                <a16:creationId xmlns:a16="http://schemas.microsoft.com/office/drawing/2014/main" id="{05BFBC7C-3FE9-4995-B4D2-98FEE86F9FBD}"/>
+              </a:ext>
+            </a:extLst>
+          </p:cNvPr>
+          <p:cNvSpPr>
+            <a:spLocks xmlns:a="http://schemas.openxmlformats.org/drawingml/2006/main" noGrp="1"/>
+          </p:cNvSpPr>
+          <p:nvPr/>
+        </p:nvSpPr>
+        <p:spPr>
+          <a:xfrm xmlns:a="http://schemas.openxmlformats.org/drawingml/2006/main">
+            <a:off x="4476750" y="3105150"/>
+            <a:ext cx="419100" cy="304800"/>
           </a:xfrm>
           <a:prstGeom xmlns:a="http://schemas.openxmlformats.org/drawingml/2006/main" prst="rightArrow">
             <a:avLst/>
@@ -5714,22 +5616,22 @@
       </p:sp>
       <p:sp>
         <p:nvSpPr>
-          <p:cNvPr id="5" name="">
-            <a:extLst xmlns:a="http://schemas.openxmlformats.org/drawingml/2006/main">
-              <a:ext uri="{FF2B5EF4-FFF2-40B4-BE49-F238E27FC236}">
-                <a16:creationId xmlns:a16="http://schemas.microsoft.com/office/drawing/2014/main" id="{F2F26048-86DD-4136-9D0F-C3F640690E74}"/>
-              </a:ext>
-            </a:extLst>
-          </p:cNvPr>
-          <p:cNvSpPr>
-            <a:spLocks xmlns:a="http://schemas.openxmlformats.org/drawingml/2006/main" noGrp="1"/>
-          </p:cNvSpPr>
-          <p:nvPr/>
-        </p:nvSpPr>
-        <p:spPr>
-          <a:xfrm xmlns:a="http://schemas.openxmlformats.org/drawingml/2006/main">
-            <a:off x="8572500" y="3257550"/>
-            <a:ext cx="666750" cy="323850"/>
+          <p:cNvPr id="6" name="">
+            <a:extLst xmlns:a="http://schemas.openxmlformats.org/drawingml/2006/main">
+              <a:ext uri="{FF2B5EF4-FFF2-40B4-BE49-F238E27FC236}">
+                <a16:creationId xmlns:a16="http://schemas.microsoft.com/office/drawing/2014/main" id="{0907D0C4-D0BB-4767-BE62-EA363532C4E1}"/>
+              </a:ext>
+            </a:extLst>
+          </p:cNvPr>
+          <p:cNvSpPr>
+            <a:spLocks xmlns:a="http://schemas.openxmlformats.org/drawingml/2006/main" noGrp="1"/>
+          </p:cNvSpPr>
+          <p:nvPr/>
+        </p:nvSpPr>
+        <p:spPr>
+          <a:xfrm xmlns:a="http://schemas.openxmlformats.org/drawingml/2006/main">
+            <a:off x="6800850" y="3105150"/>
+            <a:ext cx="476250" cy="304800"/>
           </a:xfrm>
           <a:prstGeom xmlns:a="http://schemas.openxmlformats.org/drawingml/2006/main" prst="rightArrow">
             <a:avLst/>
@@ -5745,30 +5647,61 @@
       </p:sp>
       <p:sp>
         <p:nvSpPr>
-          <p:cNvPr id="6" name="">
-            <a:extLst xmlns:a="http://schemas.openxmlformats.org/drawingml/2006/main">
-              <a:ext uri="{FF2B5EF4-FFF2-40B4-BE49-F238E27FC236}">
-                <a16:creationId xmlns:a16="http://schemas.microsoft.com/office/drawing/2014/main" id="{634E0F40-036D-4E87-9CCE-CA9AB1B8D56E}"/>
-              </a:ext>
-            </a:extLst>
-          </p:cNvPr>
-          <p:cNvSpPr>
-            <a:spLocks xmlns:a="http://schemas.openxmlformats.org/drawingml/2006/main" noGrp="1"/>
-          </p:cNvSpPr>
-          <p:nvPr/>
-        </p:nvSpPr>
-        <p:spPr>
-          <a:xfrm xmlns:a="http://schemas.openxmlformats.org/drawingml/2006/main">
-            <a:off x="552450" y="2133600"/>
-            <a:ext cx="2038350" cy="2571750"/>
+          <p:cNvPr id="7" name="">
+            <a:extLst xmlns:a="http://schemas.openxmlformats.org/drawingml/2006/main">
+              <a:ext uri="{FF2B5EF4-FFF2-40B4-BE49-F238E27FC236}">
+                <a16:creationId xmlns:a16="http://schemas.microsoft.com/office/drawing/2014/main" id="{1DF1DC9D-3046-4DAE-BDA7-6B008B4C9755}"/>
+              </a:ext>
+            </a:extLst>
+          </p:cNvPr>
+          <p:cNvSpPr>
+            <a:spLocks xmlns:a="http://schemas.openxmlformats.org/drawingml/2006/main" noGrp="1"/>
+          </p:cNvSpPr>
+          <p:nvPr/>
+        </p:nvSpPr>
+        <p:spPr>
+          <a:xfrm xmlns:a="http://schemas.openxmlformats.org/drawingml/2006/main">
+            <a:off x="9182100" y="3105150"/>
+            <a:ext cx="419100" cy="304800"/>
+          </a:xfrm>
+          <a:prstGeom xmlns:a="http://schemas.openxmlformats.org/drawingml/2006/main" prst="rightArrow">
+            <a:avLst/>
+          </a:prstGeom>
+          <a:solidFill xmlns:a="http://schemas.openxmlformats.org/drawingml/2006/main">
+            <a:srgbClr val="B8C0CA"/>
+          </a:solidFill>
+          <a:ln xmlns:a="http://schemas.openxmlformats.org/drawingml/2006/main" w="0">
+            <a:noFill/>
+            <a:prstDash val="solid"/>
+          </a:ln>
+        </p:spPr>
+      </p:sp>
+      <p:sp>
+        <p:nvSpPr>
+          <p:cNvPr id="8" name="">
+            <a:extLst xmlns:a="http://schemas.openxmlformats.org/drawingml/2006/main">
+              <a:ext uri="{FF2B5EF4-FFF2-40B4-BE49-F238E27FC236}">
+                <a16:creationId xmlns:a16="http://schemas.microsoft.com/office/drawing/2014/main" id="{13F06A00-285E-411D-9200-67E603A8C7F6}"/>
+              </a:ext>
+            </a:extLst>
+          </p:cNvPr>
+          <p:cNvSpPr>
+            <a:spLocks xmlns:a="http://schemas.openxmlformats.org/drawingml/2006/main" noGrp="1"/>
+          </p:cNvSpPr>
+          <p:nvPr/>
+        </p:nvSpPr>
+        <p:spPr>
+          <a:xfrm xmlns:a="http://schemas.openxmlformats.org/drawingml/2006/main">
+            <a:off x="609600" y="2571750"/>
+            <a:ext cx="1428750" cy="1333500"/>
           </a:xfrm>
           <a:prstGeom xmlns:a="http://schemas.openxmlformats.org/drawingml/2006/main" prst="roundRect">
             <a:avLst>
-              <a:gd name="adj" fmla="val 3738"/>
+              <a:gd name="adj" fmla="val 5714"/>
             </a:avLst>
           </a:prstGeom>
           <a:solidFill xmlns:a="http://schemas.openxmlformats.org/drawingml/2006/main">
-            <a:srgbClr val="DCEBFF"/>
+            <a:srgbClr val="ECEFF2"/>
           </a:solidFill>
           <a:ln xmlns:a="http://schemas.openxmlformats.org/drawingml/2006/main" w="0">
             <a:noFill/>
@@ -5778,22 +5711,80 @@
       </p:sp>
       <p:sp>
         <p:nvSpPr>
-          <p:cNvPr id="7" name="">
-            <a:extLst xmlns:a="http://schemas.openxmlformats.org/drawingml/2006/main">
-              <a:ext uri="{FF2B5EF4-FFF2-40B4-BE49-F238E27FC236}">
-                <a16:creationId xmlns:a16="http://schemas.microsoft.com/office/drawing/2014/main" id="{3352DF55-D5B8-4BC0-8052-9D5B26974C76}"/>
-              </a:ext>
-            </a:extLst>
-          </p:cNvPr>
-          <p:cNvSpPr>
-            <a:spLocks xmlns:a="http://schemas.openxmlformats.org/drawingml/2006/main" noGrp="1"/>
-          </p:cNvSpPr>
-          <p:nvPr/>
-        </p:nvSpPr>
-        <p:spPr>
-          <a:xfrm xmlns:a="http://schemas.openxmlformats.org/drawingml/2006/main">
-            <a:off x="781050" y="2381250"/>
-            <a:ext cx="1581150" cy="285750"/>
+          <p:cNvPr id="9" name="">
+            <a:extLst xmlns:a="http://schemas.openxmlformats.org/drawingml/2006/main">
+              <a:ext uri="{FF2B5EF4-FFF2-40B4-BE49-F238E27FC236}">
+                <a16:creationId xmlns:a16="http://schemas.microsoft.com/office/drawing/2014/main" id="{4352791C-BA5D-46BA-9868-0B4584D5D72C}"/>
+              </a:ext>
+            </a:extLst>
+          </p:cNvPr>
+          <p:cNvSpPr>
+            <a:spLocks xmlns:a="http://schemas.openxmlformats.org/drawingml/2006/main" noGrp="1"/>
+          </p:cNvSpPr>
+          <p:nvPr/>
+        </p:nvSpPr>
+        <p:spPr>
+          <a:xfrm xmlns:a="http://schemas.openxmlformats.org/drawingml/2006/main">
+            <a:off x="723900" y="2914650"/>
+            <a:ext cx="1200150" cy="419100"/>
+          </a:xfrm>
+          <a:prstGeom xmlns:a="http://schemas.openxmlformats.org/drawingml/2006/main" prst="rect">
+            <a:avLst/>
+          </a:prstGeom>
+          <a:noFill xmlns:a="http://schemas.openxmlformats.org/drawingml/2006/main"/>
+          <a:ln xmlns:a="http://schemas.openxmlformats.org/drawingml/2006/main" w="0">
+            <a:noFill/>
+            <a:prstDash val="solid"/>
+          </a:ln>
+        </p:spPr>
+        <p:txBody>
+          <a:bodyPr xmlns:a="http://schemas.openxmlformats.org/drawingml/2006/main" lIns="0" tIns="0" rIns="0" bIns="0" anchor="ctr">
+            <a:normAutofit fontScale="100000"/>
+          </a:bodyPr>
+          <a:lstStyle xmlns:a="http://schemas.openxmlformats.org/drawingml/2006/main"/>
+          <a:p xmlns:a="http://schemas.openxmlformats.org/drawingml/2006/main">
+            <a:pPr algn="ctr">
+              <a:defRPr sz="1650" b="1">
+                <a:solidFill>
+                  <a:srgbClr val="0A0F18"/>
+                </a:solidFill>
+                <a:latin typeface="Arial"/>
+                <a:ea typeface="Arial"/>
+                <a:cs typeface="Arial"/>
+              </a:defRPr>
+            </a:pPr>
+            <a:r>
+              <a:rPr sz="1650" b="1">
+                <a:solidFill>
+                  <a:srgbClr val="0A0F18"/>
+                </a:solidFill>
+                <a:latin typeface="Arial"/>
+                <a:ea typeface="Arial"/>
+                <a:cs typeface="Arial"/>
+              </a:rPr>
+              <a:t>NEWS</a:t>
+            </a:r>
+          </a:p>
+        </p:txBody>
+      </p:sp>
+      <p:sp>
+        <p:nvSpPr>
+          <p:cNvPr id="10" name="">
+            <a:extLst xmlns:a="http://schemas.openxmlformats.org/drawingml/2006/main">
+              <a:ext uri="{FF2B5EF4-FFF2-40B4-BE49-F238E27FC236}">
+                <a16:creationId xmlns:a16="http://schemas.microsoft.com/office/drawing/2014/main" id="{9D6997C2-03F1-4163-B09C-06ADAF3E59CF}"/>
+              </a:ext>
+            </a:extLst>
+          </p:cNvPr>
+          <p:cNvSpPr>
+            <a:spLocks xmlns:a="http://schemas.openxmlformats.org/drawingml/2006/main" noGrp="1"/>
+          </p:cNvSpPr>
+          <p:nvPr/>
+        </p:nvSpPr>
+        <p:spPr>
+          <a:xfrm xmlns:a="http://schemas.openxmlformats.org/drawingml/2006/main">
+            <a:off x="533400" y="4419600"/>
+            <a:ext cx="1581150" cy="666750"/>
           </a:xfrm>
           <a:prstGeom xmlns:a="http://schemas.openxmlformats.org/drawingml/2006/main" prst="rect">
             <a:avLst/>
@@ -5811,47 +5802,159 @@
           <a:lstStyle xmlns:a="http://schemas.openxmlformats.org/drawingml/2006/main"/>
           <a:p xmlns:a="http://schemas.openxmlformats.org/drawingml/2006/main">
             <a:pPr algn="ctr">
-              <a:defRPr sz="1200" b="1">
-                <a:solidFill>
-                  <a:srgbClr val="3D8DFF"/>
-                </a:solidFill>
-                <a:latin typeface="Arial"/>
-                <a:ea typeface="Arial"/>
-                <a:cs typeface="Arial"/>
-              </a:defRPr>
-            </a:pPr>
-            <a:r>
-              <a:rPr sz="1200" b="1">
-                <a:solidFill>
-                  <a:srgbClr val="3D8DFF"/>
-                </a:solidFill>
-                <a:latin typeface="Arial"/>
-                <a:ea typeface="Arial"/>
-                <a:cs typeface="Arial"/>
-              </a:rPr>
-              <a:t>ENTRADA</a:t>
-            </a:r>
-          </a:p>
-        </p:txBody>
-      </p:sp>
-      <p:sp>
-        <p:nvSpPr>
-          <p:cNvPr id="8" name="">
-            <a:extLst xmlns:a="http://schemas.openxmlformats.org/drawingml/2006/main">
-              <a:ext uri="{FF2B5EF4-FFF2-40B4-BE49-F238E27FC236}">
-                <a16:creationId xmlns:a16="http://schemas.microsoft.com/office/drawing/2014/main" id="{B8B3E472-BD65-4DB4-9051-D01500230623}"/>
-              </a:ext>
-            </a:extLst>
-          </p:cNvPr>
-          <p:cNvSpPr>
-            <a:spLocks xmlns:a="http://schemas.openxmlformats.org/drawingml/2006/main" noGrp="1"/>
-          </p:cNvSpPr>
-          <p:nvPr/>
-        </p:nvSpPr>
-        <p:spPr>
-          <a:xfrm xmlns:a="http://schemas.openxmlformats.org/drawingml/2006/main">
-            <a:off x="762000" y="2857500"/>
-            <a:ext cx="1619250" cy="1581150"/>
+              <a:defRPr sz="1350" b="0">
+                <a:solidFill>
+                  <a:srgbClr val="576071"/>
+                </a:solidFill>
+                <a:latin typeface="Arial"/>
+                <a:ea typeface="Arial"/>
+                <a:cs typeface="Arial"/>
+              </a:defRPr>
+            </a:pPr>
+            <a:r>
+              <a:rPr sz="1350" b="0">
+                <a:solidFill>
+                  <a:srgbClr val="576071"/>
+                </a:solidFill>
+                <a:latin typeface="Arial"/>
+                <a:ea typeface="Arial"/>
+                <a:cs typeface="Arial"/>
+              </a:rPr>
+              <a:t>Materia prima</a:t>
+            </a:r>
+          </a:p>
+          <a:p xmlns:a="http://schemas.openxmlformats.org/drawingml/2006/main">
+            <a:pPr algn="ctr">
+              <a:defRPr sz="1350" b="0">
+                <a:solidFill>
+                  <a:srgbClr val="576071"/>
+                </a:solidFill>
+                <a:latin typeface="Arial"/>
+                <a:ea typeface="Arial"/>
+                <a:cs typeface="Arial"/>
+              </a:defRPr>
+            </a:pPr>
+            <a:r>
+              <a:rPr sz="1350" b="0">
+                <a:solidFill>
+                  <a:srgbClr val="576071"/>
+                </a:solidFill>
+                <a:latin typeface="Arial"/>
+                <a:ea typeface="Arial"/>
+                <a:cs typeface="Arial"/>
+              </a:rPr>
+              <a:t>capturada</a:t>
+            </a:r>
+          </a:p>
+        </p:txBody>
+      </p:sp>
+      <p:sp>
+        <p:nvSpPr>
+          <p:cNvPr id="11" name="">
+            <a:extLst xmlns:a="http://schemas.openxmlformats.org/drawingml/2006/main">
+              <a:ext uri="{FF2B5EF4-FFF2-40B4-BE49-F238E27FC236}">
+                <a16:creationId xmlns:a16="http://schemas.microsoft.com/office/drawing/2014/main" id="{15EC687E-8973-4D98-9A44-A649E1BF12F5}"/>
+              </a:ext>
+            </a:extLst>
+          </p:cNvPr>
+          <p:cNvSpPr>
+            <a:spLocks xmlns:a="http://schemas.openxmlformats.org/drawingml/2006/main" noGrp="1"/>
+          </p:cNvSpPr>
+          <p:nvPr/>
+        </p:nvSpPr>
+        <p:spPr>
+          <a:xfrm xmlns:a="http://schemas.openxmlformats.org/drawingml/2006/main">
+            <a:off x="2724150" y="2381250"/>
+            <a:ext cx="1657350" cy="1714500"/>
+          </a:xfrm>
+          <a:prstGeom xmlns:a="http://schemas.openxmlformats.org/drawingml/2006/main" prst="ellipse">
+            <a:avLst/>
+          </a:prstGeom>
+          <a:solidFill xmlns:a="http://schemas.openxmlformats.org/drawingml/2006/main">
+            <a:srgbClr val="0D766E"/>
+          </a:solidFill>
+          <a:ln xmlns:a="http://schemas.openxmlformats.org/drawingml/2006/main" w="0">
+            <a:noFill/>
+            <a:prstDash val="solid"/>
+          </a:ln>
+        </p:spPr>
+      </p:sp>
+      <p:sp>
+        <p:nvSpPr>
+          <p:cNvPr id="12" name="">
+            <a:extLst xmlns:a="http://schemas.openxmlformats.org/drawingml/2006/main">
+              <a:ext uri="{FF2B5EF4-FFF2-40B4-BE49-F238E27FC236}">
+                <a16:creationId xmlns:a16="http://schemas.microsoft.com/office/drawing/2014/main" id="{4F56B4C8-66FC-47E8-AEC4-DF7C992A0C2D}"/>
+              </a:ext>
+            </a:extLst>
+          </p:cNvPr>
+          <p:cNvSpPr>
+            <a:spLocks xmlns:a="http://schemas.openxmlformats.org/drawingml/2006/main" noGrp="1"/>
+          </p:cNvSpPr>
+          <p:nvPr/>
+        </p:nvSpPr>
+        <p:spPr>
+          <a:xfrm xmlns:a="http://schemas.openxmlformats.org/drawingml/2006/main">
+            <a:off x="2838450" y="2895600"/>
+            <a:ext cx="1428750" cy="419100"/>
+          </a:xfrm>
+          <a:prstGeom xmlns:a="http://schemas.openxmlformats.org/drawingml/2006/main" prst="rect">
+            <a:avLst/>
+          </a:prstGeom>
+          <a:noFill xmlns:a="http://schemas.openxmlformats.org/drawingml/2006/main"/>
+          <a:ln xmlns:a="http://schemas.openxmlformats.org/drawingml/2006/main" w="0">
+            <a:noFill/>
+            <a:prstDash val="solid"/>
+          </a:ln>
+        </p:spPr>
+        <p:txBody>
+          <a:bodyPr xmlns:a="http://schemas.openxmlformats.org/drawingml/2006/main" lIns="0" tIns="0" rIns="0" bIns="0" anchor="ctr">
+            <a:normAutofit fontScale="100000"/>
+          </a:bodyPr>
+          <a:lstStyle xmlns:a="http://schemas.openxmlformats.org/drawingml/2006/main"/>
+          <a:p xmlns:a="http://schemas.openxmlformats.org/drawingml/2006/main">
+            <a:pPr algn="ctr">
+              <a:defRPr sz="2175" b="1">
+                <a:solidFill>
+                  <a:srgbClr val="FFFFFF"/>
+                </a:solidFill>
+                <a:latin typeface="Arial"/>
+                <a:ea typeface="Arial"/>
+                <a:cs typeface="Arial"/>
+              </a:defRPr>
+            </a:pPr>
+            <a:r>
+              <a:rPr sz="2175" b="1">
+                <a:solidFill>
+                  <a:srgbClr val="FFFFFF"/>
+                </a:solidFill>
+                <a:latin typeface="Arial"/>
+                <a:ea typeface="Arial"/>
+                <a:cs typeface="Arial"/>
+              </a:rPr>
+              <a:t>EVENT</a:t>
+            </a:r>
+          </a:p>
+        </p:txBody>
+      </p:sp>
+      <p:sp>
+        <p:nvSpPr>
+          <p:cNvPr id="13" name="">
+            <a:extLst xmlns:a="http://schemas.openxmlformats.org/drawingml/2006/main">
+              <a:ext uri="{FF2B5EF4-FFF2-40B4-BE49-F238E27FC236}">
+                <a16:creationId xmlns:a16="http://schemas.microsoft.com/office/drawing/2014/main" id="{75AA8607-0E92-4CC2-8E79-AF26C18E15BC}"/>
+              </a:ext>
+            </a:extLst>
+          </p:cNvPr>
+          <p:cNvSpPr>
+            <a:spLocks xmlns:a="http://schemas.openxmlformats.org/drawingml/2006/main" noGrp="1"/>
+          </p:cNvSpPr>
+          <p:nvPr/>
+        </p:nvSpPr>
+        <p:spPr>
+          <a:xfrm xmlns:a="http://schemas.openxmlformats.org/drawingml/2006/main">
+            <a:off x="2647950" y="4419600"/>
+            <a:ext cx="1809750" cy="666750"/>
           </a:xfrm>
           <a:prstGeom xmlns:a="http://schemas.openxmlformats.org/drawingml/2006/main" prst="rect">
             <a:avLst/>
@@ -5869,134 +5972,78 @@
           <a:lstStyle xmlns:a="http://schemas.openxmlformats.org/drawingml/2006/main"/>
           <a:p xmlns:a="http://schemas.openxmlformats.org/drawingml/2006/main">
             <a:pPr algn="ctr">
-              <a:defRPr sz="1650" b="0">
-                <a:solidFill>
-                  <a:srgbClr val="0A0F18"/>
-                </a:solidFill>
-                <a:latin typeface="Arial"/>
-                <a:ea typeface="Arial"/>
-                <a:cs typeface="Arial"/>
-              </a:defRPr>
-            </a:pPr>
-            <a:r>
-              <a:rPr sz="1650" b="0">
-                <a:solidFill>
-                  <a:srgbClr val="0A0F18"/>
-                </a:solidFill>
-                <a:latin typeface="Arial"/>
-                <a:ea typeface="Arial"/>
-                <a:cs typeface="Arial"/>
-              </a:rPr>
-              <a:t>Fuentes RSS</a:t>
-            </a:r>
-          </a:p>
-          <a:p xmlns:a="http://schemas.openxmlformats.org/drawingml/2006/main">
-            <a:r>
-              <a:t/>
+              <a:defRPr sz="1350" b="0">
+                <a:solidFill>
+                  <a:srgbClr val="576071"/>
+                </a:solidFill>
+                <a:latin typeface="Arial"/>
+                <a:ea typeface="Arial"/>
+                <a:cs typeface="Arial"/>
+              </a:defRPr>
+            </a:pPr>
+            <a:r>
+              <a:rPr sz="1350" b="0">
+                <a:solidFill>
+                  <a:srgbClr val="576071"/>
+                </a:solidFill>
+                <a:latin typeface="Arial"/>
+                <a:ea typeface="Arial"/>
+                <a:cs typeface="Arial"/>
+              </a:rPr>
+              <a:t>Hecho consolidado</a:t>
             </a:r>
           </a:p>
           <a:p xmlns:a="http://schemas.openxmlformats.org/drawingml/2006/main">
             <a:pPr algn="ctr">
-              <a:defRPr sz="1650" b="0">
-                <a:solidFill>
-                  <a:srgbClr val="0A0F18"/>
-                </a:solidFill>
-                <a:latin typeface="Arial"/>
-                <a:ea typeface="Arial"/>
-                <a:cs typeface="Arial"/>
-              </a:defRPr>
-            </a:pPr>
-            <a:r>
-              <a:rPr sz="1650" b="0">
-                <a:solidFill>
-                  <a:srgbClr val="0A0F18"/>
-                </a:solidFill>
-                <a:latin typeface="Arial"/>
-                <a:ea typeface="Arial"/>
-                <a:cs typeface="Arial"/>
-              </a:rPr>
-              <a:t>n8n · WF-01</a:t>
-            </a:r>
-          </a:p>
-          <a:p xmlns:a="http://schemas.openxmlformats.org/drawingml/2006/main">
-            <a:pPr algn="ctr">
-              <a:defRPr sz="1650" b="0">
-                <a:solidFill>
-                  <a:srgbClr val="0A0F18"/>
-                </a:solidFill>
-                <a:latin typeface="Arial"/>
-                <a:ea typeface="Arial"/>
-                <a:cs typeface="Arial"/>
-              </a:defRPr>
-            </a:pPr>
-            <a:r>
-              <a:rPr sz="1650" b="0">
-                <a:solidFill>
-                  <a:srgbClr val="0A0F18"/>
-                </a:solidFill>
-                <a:latin typeface="Arial"/>
-                <a:ea typeface="Arial"/>
-                <a:cs typeface="Arial"/>
-              </a:rPr>
-              <a:t>Captura XML</a:t>
-            </a:r>
-          </a:p>
-          <a:p xmlns:a="http://schemas.openxmlformats.org/drawingml/2006/main">
-            <a:r>
-              <a:t/>
-            </a:r>
-          </a:p>
-          <a:p xmlns:a="http://schemas.openxmlformats.org/drawingml/2006/main">
-            <a:pPr algn="ctr">
-              <a:defRPr sz="1650" b="0">
-                <a:solidFill>
-                  <a:srgbClr val="0A0F18"/>
-                </a:solidFill>
-                <a:latin typeface="Arial"/>
-                <a:ea typeface="Arial"/>
-                <a:cs typeface="Arial"/>
-              </a:defRPr>
-            </a:pPr>
-            <a:r>
-              <a:rPr sz="1650" b="0">
-                <a:solidFill>
-                  <a:srgbClr val="0A0F18"/>
-                </a:solidFill>
-                <a:latin typeface="Arial"/>
-                <a:ea typeface="Arial"/>
-                <a:cs typeface="Arial"/>
-              </a:rPr>
-              <a:t>POST /news/bulk</a:t>
-            </a:r>
-          </a:p>
-        </p:txBody>
-      </p:sp>
-      <p:sp>
-        <p:nvSpPr>
-          <p:cNvPr id="9" name="">
-            <a:extLst xmlns:a="http://schemas.openxmlformats.org/drawingml/2006/main">
-              <a:ext uri="{FF2B5EF4-FFF2-40B4-BE49-F238E27FC236}">
-                <a16:creationId xmlns:a16="http://schemas.microsoft.com/office/drawing/2014/main" id="{3605D626-E0A7-4424-98BE-3DDFE3E6367C}"/>
-              </a:ext>
-            </a:extLst>
-          </p:cNvPr>
-          <p:cNvSpPr>
-            <a:spLocks xmlns:a="http://schemas.openxmlformats.org/drawingml/2006/main" noGrp="1"/>
-          </p:cNvSpPr>
-          <p:nvPr/>
-        </p:nvSpPr>
-        <p:spPr>
-          <a:xfrm xmlns:a="http://schemas.openxmlformats.org/drawingml/2006/main">
-            <a:off x="3257550" y="1885950"/>
-            <a:ext cx="5314950" cy="3143250"/>
+              <a:defRPr sz="1350" b="0">
+                <a:solidFill>
+                  <a:srgbClr val="576071"/>
+                </a:solidFill>
+                <a:latin typeface="Arial"/>
+                <a:ea typeface="Arial"/>
+                <a:cs typeface="Arial"/>
+              </a:defRPr>
+            </a:pPr>
+            <a:r>
+              <a:rPr sz="1350" b="0">
+                <a:solidFill>
+                  <a:srgbClr val="576071"/>
+                </a:solidFill>
+                <a:latin typeface="Arial"/>
+                <a:ea typeface="Arial"/>
+                <a:cs typeface="Arial"/>
+              </a:rPr>
+              <a:t>aggregate root</a:t>
+            </a:r>
+          </a:p>
+        </p:txBody>
+      </p:sp>
+      <p:sp>
+        <p:nvSpPr>
+          <p:cNvPr id="14" name="">
+            <a:extLst xmlns:a="http://schemas.openxmlformats.org/drawingml/2006/main">
+              <a:ext uri="{FF2B5EF4-FFF2-40B4-BE49-F238E27FC236}">
+                <a16:creationId xmlns:a16="http://schemas.microsoft.com/office/drawing/2014/main" id="{CB700A04-6102-45DB-8C61-70F859AEDE66}"/>
+              </a:ext>
+            </a:extLst>
+          </p:cNvPr>
+          <p:cNvSpPr>
+            <a:spLocks xmlns:a="http://schemas.openxmlformats.org/drawingml/2006/main" noGrp="1"/>
+          </p:cNvSpPr>
+          <p:nvPr/>
+        </p:nvSpPr>
+        <p:spPr>
+          <a:xfrm xmlns:a="http://schemas.openxmlformats.org/drawingml/2006/main">
+            <a:off x="4991100" y="2571750"/>
+            <a:ext cx="1714500" cy="1333500"/>
           </a:xfrm>
           <a:prstGeom xmlns:a="http://schemas.openxmlformats.org/drawingml/2006/main" prst="roundRect">
             <a:avLst>
-              <a:gd name="adj" fmla="val 2424"/>
+              <a:gd name="adj" fmla="val 5714"/>
             </a:avLst>
           </a:prstGeom>
           <a:solidFill xmlns:a="http://schemas.openxmlformats.org/drawingml/2006/main">
-            <a:srgbClr val="0B1323"/>
+            <a:srgbClr val="ECEFF2"/>
           </a:solidFill>
           <a:ln xmlns:a="http://schemas.openxmlformats.org/drawingml/2006/main" w="0">
             <a:noFill/>
@@ -6006,22 +6053,80 @@
       </p:sp>
       <p:sp>
         <p:nvSpPr>
-          <p:cNvPr id="10" name="">
-            <a:extLst xmlns:a="http://schemas.openxmlformats.org/drawingml/2006/main">
-              <a:ext uri="{FF2B5EF4-FFF2-40B4-BE49-F238E27FC236}">
-                <a16:creationId xmlns:a16="http://schemas.microsoft.com/office/drawing/2014/main" id="{ADCC2482-ACC3-4B9F-8499-6E7C44568F97}"/>
-              </a:ext>
-            </a:extLst>
-          </p:cNvPr>
-          <p:cNvSpPr>
-            <a:spLocks xmlns:a="http://schemas.openxmlformats.org/drawingml/2006/main" noGrp="1"/>
-          </p:cNvSpPr>
-          <p:nvPr/>
-        </p:nvSpPr>
-        <p:spPr>
-          <a:xfrm xmlns:a="http://schemas.openxmlformats.org/drawingml/2006/main">
-            <a:off x="3600450" y="2152650"/>
-            <a:ext cx="4629150" cy="304800"/>
+          <p:cNvPr id="15" name="">
+            <a:extLst xmlns:a="http://schemas.openxmlformats.org/drawingml/2006/main">
+              <a:ext uri="{FF2B5EF4-FFF2-40B4-BE49-F238E27FC236}">
+                <a16:creationId xmlns:a16="http://schemas.microsoft.com/office/drawing/2014/main" id="{C45AC017-BA21-40D5-B2DE-A13E9D7588A8}"/>
+              </a:ext>
+            </a:extLst>
+          </p:cNvPr>
+          <p:cNvSpPr>
+            <a:spLocks xmlns:a="http://schemas.openxmlformats.org/drawingml/2006/main" noGrp="1"/>
+          </p:cNvSpPr>
+          <p:nvPr/>
+        </p:nvSpPr>
+        <p:spPr>
+          <a:xfrm xmlns:a="http://schemas.openxmlformats.org/drawingml/2006/main">
+            <a:off x="5105400" y="2914650"/>
+            <a:ext cx="1485900" cy="419100"/>
+          </a:xfrm>
+          <a:prstGeom xmlns:a="http://schemas.openxmlformats.org/drawingml/2006/main" prst="rect">
+            <a:avLst/>
+          </a:prstGeom>
+          <a:noFill xmlns:a="http://schemas.openxmlformats.org/drawingml/2006/main"/>
+          <a:ln xmlns:a="http://schemas.openxmlformats.org/drawingml/2006/main" w="0">
+            <a:noFill/>
+            <a:prstDash val="solid"/>
+          </a:ln>
+        </p:spPr>
+        <p:txBody>
+          <a:bodyPr xmlns:a="http://schemas.openxmlformats.org/drawingml/2006/main" lIns="0" tIns="0" rIns="0" bIns="0" anchor="ctr">
+            <a:normAutofit fontScale="100000"/>
+          </a:bodyPr>
+          <a:lstStyle xmlns:a="http://schemas.openxmlformats.org/drawingml/2006/main"/>
+          <a:p xmlns:a="http://schemas.openxmlformats.org/drawingml/2006/main">
+            <a:pPr algn="ctr">
+              <a:defRPr sz="1650" b="1">
+                <a:solidFill>
+                  <a:srgbClr val="0A0F18"/>
+                </a:solidFill>
+                <a:latin typeface="Arial"/>
+                <a:ea typeface="Arial"/>
+                <a:cs typeface="Arial"/>
+              </a:defRPr>
+            </a:pPr>
+            <a:r>
+              <a:rPr sz="1650" b="1">
+                <a:solidFill>
+                  <a:srgbClr val="0A0F18"/>
+                </a:solidFill>
+                <a:latin typeface="Arial"/>
+                <a:ea typeface="Arial"/>
+                <a:cs typeface="Arial"/>
+              </a:rPr>
+              <a:t>ANALYSIS</a:t>
+            </a:r>
+          </a:p>
+        </p:txBody>
+      </p:sp>
+      <p:sp>
+        <p:nvSpPr>
+          <p:cNvPr id="16" name="">
+            <a:extLst xmlns:a="http://schemas.openxmlformats.org/drawingml/2006/main">
+              <a:ext uri="{FF2B5EF4-FFF2-40B4-BE49-F238E27FC236}">
+                <a16:creationId xmlns:a16="http://schemas.microsoft.com/office/drawing/2014/main" id="{2298AFA8-71C8-460F-AF90-2C0287B11D62}"/>
+              </a:ext>
+            </a:extLst>
+          </p:cNvPr>
+          <p:cNvSpPr>
+            <a:spLocks xmlns:a="http://schemas.openxmlformats.org/drawingml/2006/main" noGrp="1"/>
+          </p:cNvSpPr>
+          <p:nvPr/>
+        </p:nvSpPr>
+        <p:spPr>
+          <a:xfrm xmlns:a="http://schemas.openxmlformats.org/drawingml/2006/main">
+            <a:off x="4914900" y="4419600"/>
+            <a:ext cx="1866900" cy="666750"/>
           </a:xfrm>
           <a:prstGeom xmlns:a="http://schemas.openxmlformats.org/drawingml/2006/main" prst="rect">
             <a:avLst/>
@@ -6039,47 +6144,161 @@
           <a:lstStyle xmlns:a="http://schemas.openxmlformats.org/drawingml/2006/main"/>
           <a:p xmlns:a="http://schemas.openxmlformats.org/drawingml/2006/main">
             <a:pPr algn="ctr">
-              <a:defRPr sz="1350" b="1">
-                <a:solidFill>
-                  <a:srgbClr val="D9F0EB"/>
-                </a:solidFill>
-                <a:latin typeface="Arial"/>
-                <a:ea typeface="Arial"/>
-                <a:cs typeface="Arial"/>
-              </a:defRPr>
-            </a:pPr>
-            <a:r>
-              <a:rPr sz="1350" b="1">
-                <a:solidFill>
-                  <a:srgbClr val="D9F0EB"/>
-                </a:solidFill>
-                <a:latin typeface="Arial"/>
-                <a:ea typeface="Arial"/>
-                <a:cs typeface="Arial"/>
-              </a:rPr>
-              <a:t>SPRING BOOT · MONOLITO MODULAR</a:t>
-            </a:r>
-          </a:p>
-        </p:txBody>
-      </p:sp>
-      <p:sp>
-        <p:nvSpPr>
-          <p:cNvPr id="11" name="">
-            <a:extLst xmlns:a="http://schemas.openxmlformats.org/drawingml/2006/main">
-              <a:ext uri="{FF2B5EF4-FFF2-40B4-BE49-F238E27FC236}">
-                <a16:creationId xmlns:a16="http://schemas.microsoft.com/office/drawing/2014/main" id="{2D4D4D23-40FB-470E-9120-147128E796A3}"/>
-              </a:ext>
-            </a:extLst>
-          </p:cNvPr>
-          <p:cNvSpPr>
-            <a:spLocks xmlns:a="http://schemas.openxmlformats.org/drawingml/2006/main" noGrp="1"/>
-          </p:cNvSpPr>
-          <p:nvPr/>
-        </p:nvSpPr>
-        <p:spPr>
-          <a:xfrm xmlns:a="http://schemas.openxmlformats.org/drawingml/2006/main">
-            <a:off x="3638550" y="2609850"/>
-            <a:ext cx="4552950" cy="342900"/>
+              <a:defRPr sz="1350" b="0">
+                <a:solidFill>
+                  <a:srgbClr val="576071"/>
+                </a:solidFill>
+                <a:latin typeface="Arial"/>
+                <a:ea typeface="Arial"/>
+                <a:cs typeface="Arial"/>
+              </a:defRPr>
+            </a:pPr>
+            <a:r>
+              <a:rPr sz="1350" b="0">
+                <a:solidFill>
+                  <a:srgbClr val="576071"/>
+                </a:solidFill>
+                <a:latin typeface="Arial"/>
+                <a:ea typeface="Arial"/>
+                <a:cs typeface="Arial"/>
+              </a:rPr>
+              <a:t>Lectura IA</a:t>
+            </a:r>
+          </a:p>
+          <a:p xmlns:a="http://schemas.openxmlformats.org/drawingml/2006/main">
+            <a:pPr algn="ctr">
+              <a:defRPr sz="1350" b="0">
+                <a:solidFill>
+                  <a:srgbClr val="576071"/>
+                </a:solidFill>
+                <a:latin typeface="Arial"/>
+                <a:ea typeface="Arial"/>
+                <a:cs typeface="Arial"/>
+              </a:defRPr>
+            </a:pPr>
+            <a:r>
+              <a:rPr sz="1350" b="0">
+                <a:solidFill>
+                  <a:srgbClr val="576071"/>
+                </a:solidFill>
+                <a:latin typeface="Arial"/>
+                <a:ea typeface="Arial"/>
+                <a:cs typeface="Arial"/>
+              </a:rPr>
+              <a:t>con contexto</a:t>
+            </a:r>
+          </a:p>
+        </p:txBody>
+      </p:sp>
+      <p:sp>
+        <p:nvSpPr>
+          <p:cNvPr id="17" name="">
+            <a:extLst xmlns:a="http://schemas.openxmlformats.org/drawingml/2006/main">
+              <a:ext uri="{FF2B5EF4-FFF2-40B4-BE49-F238E27FC236}">
+                <a16:creationId xmlns:a16="http://schemas.microsoft.com/office/drawing/2014/main" id="{D9C5262D-425A-43F4-9D24-5C3CAA2708B9}"/>
+              </a:ext>
+            </a:extLst>
+          </p:cNvPr>
+          <p:cNvSpPr>
+            <a:spLocks xmlns:a="http://schemas.openxmlformats.org/drawingml/2006/main" noGrp="1"/>
+          </p:cNvSpPr>
+          <p:nvPr/>
+        </p:nvSpPr>
+        <p:spPr>
+          <a:xfrm xmlns:a="http://schemas.openxmlformats.org/drawingml/2006/main">
+            <a:off x="7372350" y="2571750"/>
+            <a:ext cx="1714500" cy="1333500"/>
+          </a:xfrm>
+          <a:prstGeom xmlns:a="http://schemas.openxmlformats.org/drawingml/2006/main" prst="roundRect">
+            <a:avLst>
+              <a:gd name="adj" fmla="val 5714"/>
+            </a:avLst>
+          </a:prstGeom>
+          <a:solidFill xmlns:a="http://schemas.openxmlformats.org/drawingml/2006/main">
+            <a:srgbClr val="ECEFF2"/>
+          </a:solidFill>
+          <a:ln xmlns:a="http://schemas.openxmlformats.org/drawingml/2006/main" w="0">
+            <a:noFill/>
+            <a:prstDash val="solid"/>
+          </a:ln>
+        </p:spPr>
+      </p:sp>
+      <p:sp>
+        <p:nvSpPr>
+          <p:cNvPr id="18" name="">
+            <a:extLst xmlns:a="http://schemas.openxmlformats.org/drawingml/2006/main">
+              <a:ext uri="{FF2B5EF4-FFF2-40B4-BE49-F238E27FC236}">
+                <a16:creationId xmlns:a16="http://schemas.microsoft.com/office/drawing/2014/main" id="{4313FBA9-4072-4F21-A95C-1A774EF6335C}"/>
+              </a:ext>
+            </a:extLst>
+          </p:cNvPr>
+          <p:cNvSpPr>
+            <a:spLocks xmlns:a="http://schemas.openxmlformats.org/drawingml/2006/main" noGrp="1"/>
+          </p:cNvSpPr>
+          <p:nvPr/>
+        </p:nvSpPr>
+        <p:spPr>
+          <a:xfrm xmlns:a="http://schemas.openxmlformats.org/drawingml/2006/main">
+            <a:off x="7486650" y="2914650"/>
+            <a:ext cx="1485900" cy="419100"/>
+          </a:xfrm>
+          <a:prstGeom xmlns:a="http://schemas.openxmlformats.org/drawingml/2006/main" prst="rect">
+            <a:avLst/>
+          </a:prstGeom>
+          <a:noFill xmlns:a="http://schemas.openxmlformats.org/drawingml/2006/main"/>
+          <a:ln xmlns:a="http://schemas.openxmlformats.org/drawingml/2006/main" w="0">
+            <a:noFill/>
+            <a:prstDash val="solid"/>
+          </a:ln>
+        </p:spPr>
+        <p:txBody>
+          <a:bodyPr xmlns:a="http://schemas.openxmlformats.org/drawingml/2006/main" lIns="0" tIns="0" rIns="0" bIns="0" anchor="ctr">
+            <a:normAutofit fontScale="100000"/>
+          </a:bodyPr>
+          <a:lstStyle xmlns:a="http://schemas.openxmlformats.org/drawingml/2006/main"/>
+          <a:p xmlns:a="http://schemas.openxmlformats.org/drawingml/2006/main">
+            <a:pPr algn="ctr">
+              <a:defRPr sz="1650" b="1">
+                <a:solidFill>
+                  <a:srgbClr val="0A0F18"/>
+                </a:solidFill>
+                <a:latin typeface="Arial"/>
+                <a:ea typeface="Arial"/>
+                <a:cs typeface="Arial"/>
+              </a:defRPr>
+            </a:pPr>
+            <a:r>
+              <a:rPr sz="1650" b="1">
+                <a:solidFill>
+                  <a:srgbClr val="0A0F18"/>
+                </a:solidFill>
+                <a:latin typeface="Arial"/>
+                <a:ea typeface="Arial"/>
+                <a:cs typeface="Arial"/>
+              </a:rPr>
+              <a:t>CONTENT</a:t>
+            </a:r>
+          </a:p>
+        </p:txBody>
+      </p:sp>
+      <p:sp>
+        <p:nvSpPr>
+          <p:cNvPr id="19" name="">
+            <a:extLst xmlns:a="http://schemas.openxmlformats.org/drawingml/2006/main">
+              <a:ext uri="{FF2B5EF4-FFF2-40B4-BE49-F238E27FC236}">
+                <a16:creationId xmlns:a16="http://schemas.microsoft.com/office/drawing/2014/main" id="{BC1C4772-D528-440B-98CF-7A41FD9C24F4}"/>
+              </a:ext>
+            </a:extLst>
+          </p:cNvPr>
+          <p:cNvSpPr>
+            <a:spLocks xmlns:a="http://schemas.openxmlformats.org/drawingml/2006/main" noGrp="1"/>
+          </p:cNvSpPr>
+          <p:nvPr/>
+        </p:nvSpPr>
+        <p:spPr>
+          <a:xfrm xmlns:a="http://schemas.openxmlformats.org/drawingml/2006/main">
+            <a:off x="7296150" y="4419600"/>
+            <a:ext cx="1866900" cy="666750"/>
           </a:xfrm>
           <a:prstGeom xmlns:a="http://schemas.openxmlformats.org/drawingml/2006/main" prst="rect">
             <a:avLst/>
@@ -6097,53 +6316,76 @@
           <a:lstStyle xmlns:a="http://schemas.openxmlformats.org/drawingml/2006/main"/>
           <a:p xmlns:a="http://schemas.openxmlformats.org/drawingml/2006/main">
             <a:pPr algn="ctr">
-              <a:defRPr sz="1500" b="0">
-                <a:solidFill>
-                  <a:srgbClr val="FFFFFF"/>
-                </a:solidFill>
-                <a:latin typeface="Arial"/>
-                <a:ea typeface="Arial"/>
-                <a:cs typeface="Arial"/>
-              </a:defRPr>
-            </a:pPr>
-            <a:r>
-              <a:rPr sz="1500" b="0">
-                <a:solidFill>
-                  <a:srgbClr val="FFFFFF"/>
-                </a:solidFill>
-                <a:latin typeface="Arial"/>
-                <a:ea typeface="Arial"/>
-                <a:cs typeface="Arial"/>
-              </a:rPr>
-              <a:t>domain  ·  application  ·  infrastructure  ·  api</a:t>
-            </a:r>
-          </a:p>
-        </p:txBody>
-      </p:sp>
-      <p:sp>
-        <p:nvSpPr>
-          <p:cNvPr id="12" name="">
-            <a:extLst xmlns:a="http://schemas.openxmlformats.org/drawingml/2006/main">
-              <a:ext uri="{FF2B5EF4-FFF2-40B4-BE49-F238E27FC236}">
-                <a16:creationId xmlns:a16="http://schemas.microsoft.com/office/drawing/2014/main" id="{5C6466B3-988C-485A-977C-2538484C979A}"/>
-              </a:ext>
-            </a:extLst>
-          </p:cNvPr>
-          <p:cNvSpPr>
-            <a:spLocks xmlns:a="http://schemas.openxmlformats.org/drawingml/2006/main" noGrp="1"/>
-          </p:cNvSpPr>
-          <p:nvPr/>
-        </p:nvSpPr>
-        <p:spPr>
-          <a:xfrm xmlns:a="http://schemas.openxmlformats.org/drawingml/2006/main">
-            <a:off x="3733800" y="3124200"/>
-            <a:ext cx="4362450" cy="9525"/>
+              <a:defRPr sz="1350" b="0">
+                <a:solidFill>
+                  <a:srgbClr val="576071"/>
+                </a:solidFill>
+                <a:latin typeface="Arial"/>
+                <a:ea typeface="Arial"/>
+                <a:cs typeface="Arial"/>
+              </a:defRPr>
+            </a:pPr>
+            <a:r>
+              <a:rPr sz="1350" b="0">
+                <a:solidFill>
+                  <a:srgbClr val="576071"/>
+                </a:solidFill>
+                <a:latin typeface="Arial"/>
+                <a:ea typeface="Arial"/>
+                <a:cs typeface="Arial"/>
+              </a:rPr>
+              <a:t>Borrador sujeto</a:t>
+            </a:r>
+          </a:p>
+          <a:p xmlns:a="http://schemas.openxmlformats.org/drawingml/2006/main">
+            <a:pPr algn="ctr">
+              <a:defRPr sz="1350" b="0">
+                <a:solidFill>
+                  <a:srgbClr val="576071"/>
+                </a:solidFill>
+                <a:latin typeface="Arial"/>
+                <a:ea typeface="Arial"/>
+                <a:cs typeface="Arial"/>
+              </a:defRPr>
+            </a:pPr>
+            <a:r>
+              <a:rPr sz="1350" b="0">
+                <a:solidFill>
+                  <a:srgbClr val="576071"/>
+                </a:solidFill>
+                <a:latin typeface="Arial"/>
+                <a:ea typeface="Arial"/>
+                <a:cs typeface="Arial"/>
+              </a:rPr>
+              <a:t>a revisión</a:t>
+            </a:r>
+          </a:p>
+        </p:txBody>
+      </p:sp>
+      <p:sp>
+        <p:nvSpPr>
+          <p:cNvPr id="20" name="">
+            <a:extLst xmlns:a="http://schemas.openxmlformats.org/drawingml/2006/main">
+              <a:ext uri="{FF2B5EF4-FFF2-40B4-BE49-F238E27FC236}">
+                <a16:creationId xmlns:a16="http://schemas.microsoft.com/office/drawing/2014/main" id="{E525F89A-B695-4AAE-9F80-48973DB52692}"/>
+              </a:ext>
+            </a:extLst>
+          </p:cNvPr>
+          <p:cNvSpPr>
+            <a:spLocks xmlns:a="http://schemas.openxmlformats.org/drawingml/2006/main" noGrp="1"/>
+          </p:cNvSpPr>
+          <p:nvPr/>
+        </p:nvSpPr>
+        <p:spPr>
+          <a:xfrm xmlns:a="http://schemas.openxmlformats.org/drawingml/2006/main">
+            <a:off x="9601200" y="2190750"/>
+            <a:ext cx="2076450" cy="3143250"/>
           </a:xfrm>
           <a:prstGeom xmlns:a="http://schemas.openxmlformats.org/drawingml/2006/main" prst="rect">
             <a:avLst/>
           </a:prstGeom>
           <a:solidFill xmlns:a="http://schemas.openxmlformats.org/drawingml/2006/main">
-            <a:srgbClr val="526076"/>
+            <a:srgbClr val="FBFCFD"/>
           </a:solidFill>
           <a:ln xmlns:a="http://schemas.openxmlformats.org/drawingml/2006/main" w="0">
             <a:noFill/>
@@ -6153,203 +6395,30 @@
       </p:sp>
       <p:sp>
         <p:nvSpPr>
-          <p:cNvPr id="13" name="">
-            <a:extLst xmlns:a="http://schemas.openxmlformats.org/drawingml/2006/main">
-              <a:ext uri="{FF2B5EF4-FFF2-40B4-BE49-F238E27FC236}">
-                <a16:creationId xmlns:a16="http://schemas.microsoft.com/office/drawing/2014/main" id="{5ACCF6A1-BFB0-4C12-AF26-C38FFE0069FC}"/>
-              </a:ext>
-            </a:extLst>
-          </p:cNvPr>
-          <p:cNvSpPr>
-            <a:spLocks xmlns:a="http://schemas.openxmlformats.org/drawingml/2006/main" noGrp="1"/>
-          </p:cNvSpPr>
-          <p:nvPr/>
-        </p:nvSpPr>
-        <p:spPr>
-          <a:xfrm xmlns:a="http://schemas.openxmlformats.org/drawingml/2006/main">
-            <a:off x="3810000" y="3371850"/>
-            <a:ext cx="4210050" cy="1200150"/>
-          </a:xfrm>
-          <a:prstGeom xmlns:a="http://schemas.openxmlformats.org/drawingml/2006/main" prst="rect">
-            <a:avLst/>
-          </a:prstGeom>
-          <a:noFill xmlns:a="http://schemas.openxmlformats.org/drawingml/2006/main"/>
-          <a:ln xmlns:a="http://schemas.openxmlformats.org/drawingml/2006/main" w="0">
-            <a:noFill/>
-            <a:prstDash val="solid"/>
-          </a:ln>
-        </p:spPr>
-        <p:txBody>
-          <a:bodyPr xmlns:a="http://schemas.openxmlformats.org/drawingml/2006/main" lIns="0" tIns="0" rIns="0" bIns="0" anchor="t">
-            <a:normAutofit fontScale="83333"/>
-          </a:bodyPr>
-          <a:lstStyle xmlns:a="http://schemas.openxmlformats.org/drawingml/2006/main"/>
-          <a:p xmlns:a="http://schemas.openxmlformats.org/drawingml/2006/main">
-            <a:pPr algn="ctr">
-              <a:defRPr sz="1575" b="0">
-                <a:solidFill>
-                  <a:srgbClr val="FFFFFF"/>
-                </a:solidFill>
-                <a:latin typeface="Arial"/>
-                <a:ea typeface="Arial"/>
-                <a:cs typeface="Arial"/>
-              </a:defRPr>
-            </a:pPr>
-            <a:r>
-              <a:rPr sz="1575" b="0">
-                <a:solidFill>
-                  <a:srgbClr val="FFFFFF"/>
-                </a:solidFill>
-                <a:latin typeface="Arial"/>
-                <a:ea typeface="Arial"/>
-                <a:cs typeface="Arial"/>
-              </a:rPr>
-              <a:t>Reglas de negocio</a:t>
-            </a:r>
-          </a:p>
-          <a:p xmlns:a="http://schemas.openxmlformats.org/drawingml/2006/main">
-            <a:pPr algn="ctr">
-              <a:defRPr sz="1575" b="0">
-                <a:solidFill>
-                  <a:srgbClr val="FFFFFF"/>
-                </a:solidFill>
-                <a:latin typeface="Arial"/>
-                <a:ea typeface="Arial"/>
-                <a:cs typeface="Arial"/>
-              </a:defRPr>
-            </a:pPr>
-            <a:r>
-              <a:rPr sz="1575" b="0">
-                <a:solidFill>
-                  <a:srgbClr val="FFFFFF"/>
-                </a:solidFill>
-                <a:latin typeface="Arial"/>
-                <a:ea typeface="Arial"/>
-                <a:cs typeface="Arial"/>
-              </a:rPr>
-              <a:t>Casos de uso</a:t>
-            </a:r>
-          </a:p>
-          <a:p xmlns:a="http://schemas.openxmlformats.org/drawingml/2006/main">
-            <a:pPr algn="ctr">
-              <a:defRPr sz="1575" b="0">
-                <a:solidFill>
-                  <a:srgbClr val="FFFFFF"/>
-                </a:solidFill>
-                <a:latin typeface="Arial"/>
-                <a:ea typeface="Arial"/>
-                <a:cs typeface="Arial"/>
-              </a:defRPr>
-            </a:pPr>
-            <a:r>
-              <a:rPr sz="1575" b="0">
-                <a:solidFill>
-                  <a:srgbClr val="FFFFFF"/>
-                </a:solidFill>
-                <a:latin typeface="Arial"/>
-                <a:ea typeface="Arial"/>
-                <a:cs typeface="Arial"/>
-              </a:rPr>
-              <a:t>JWT y roles</a:t>
-            </a:r>
-          </a:p>
-          <a:p xmlns:a="http://schemas.openxmlformats.org/drawingml/2006/main">
-            <a:pPr algn="ctr">
-              <a:defRPr sz="1575" b="0">
-                <a:solidFill>
-                  <a:srgbClr val="FFFFFF"/>
-                </a:solidFill>
-                <a:latin typeface="Arial"/>
-                <a:ea typeface="Arial"/>
-                <a:cs typeface="Arial"/>
-              </a:defRPr>
-            </a:pPr>
-            <a:r>
-              <a:rPr sz="1575" b="0">
-                <a:solidFill>
-                  <a:srgbClr val="FFFFFF"/>
-                </a:solidFill>
-                <a:latin typeface="Arial"/>
-                <a:ea typeface="Arial"/>
-                <a:cs typeface="Arial"/>
-              </a:rPr>
-              <a:t>IA y validación</a:t>
-            </a:r>
-          </a:p>
-          <a:p xmlns:a="http://schemas.openxmlformats.org/drawingml/2006/main">
-            <a:pPr algn="ctr">
-              <a:defRPr sz="1575" b="0">
-                <a:solidFill>
-                  <a:srgbClr val="FFFFFF"/>
-                </a:solidFill>
-                <a:latin typeface="Arial"/>
-                <a:ea typeface="Arial"/>
-                <a:cs typeface="Arial"/>
-              </a:defRPr>
-            </a:pPr>
-            <a:r>
-              <a:rPr sz="1575" b="0">
-                <a:solidFill>
-                  <a:srgbClr val="FFFFFF"/>
-                </a:solidFill>
-                <a:latin typeface="Arial"/>
-                <a:ea typeface="Arial"/>
-                <a:cs typeface="Arial"/>
-              </a:rPr>
-              <a:t>Automatizaciones</a:t>
-            </a:r>
-          </a:p>
-          <a:p xmlns:a="http://schemas.openxmlformats.org/drawingml/2006/main">
-            <a:pPr algn="ctr">
-              <a:defRPr sz="1575" b="0">
-                <a:solidFill>
-                  <a:srgbClr val="FFFFFF"/>
-                </a:solidFill>
-                <a:latin typeface="Arial"/>
-                <a:ea typeface="Arial"/>
-                <a:cs typeface="Arial"/>
-              </a:defRPr>
-            </a:pPr>
-            <a:r>
-              <a:rPr sz="1575" b="0">
-                <a:solidFill>
-                  <a:srgbClr val="FFFFFF"/>
-                </a:solidFill>
-                <a:latin typeface="Arial"/>
-                <a:ea typeface="Arial"/>
-                <a:cs typeface="Arial"/>
-              </a:rPr>
-              <a:t>Telegram y auditoría</a:t>
-            </a:r>
-          </a:p>
-        </p:txBody>
-      </p:sp>
-      <p:sp>
-        <p:nvSpPr>
-          <p:cNvPr id="14" name="">
-            <a:extLst xmlns:a="http://schemas.openxmlformats.org/drawingml/2006/main">
-              <a:ext uri="{FF2B5EF4-FFF2-40B4-BE49-F238E27FC236}">
-                <a16:creationId xmlns:a16="http://schemas.microsoft.com/office/drawing/2014/main" id="{75114916-EC2F-44FF-B2A4-A4DA16CE3FA5}"/>
-              </a:ext>
-            </a:extLst>
-          </p:cNvPr>
-          <p:cNvSpPr>
-            <a:spLocks xmlns:a="http://schemas.openxmlformats.org/drawingml/2006/main" noGrp="1"/>
-          </p:cNvSpPr>
-          <p:nvPr/>
-        </p:nvSpPr>
-        <p:spPr>
-          <a:xfrm xmlns:a="http://schemas.openxmlformats.org/drawingml/2006/main">
-            <a:off x="9239250" y="2133600"/>
-            <a:ext cx="2400300" cy="2571750"/>
+          <p:cNvPr id="21" name="">
+            <a:extLst xmlns:a="http://schemas.openxmlformats.org/drawingml/2006/main">
+              <a:ext uri="{FF2B5EF4-FFF2-40B4-BE49-F238E27FC236}">
+                <a16:creationId xmlns:a16="http://schemas.microsoft.com/office/drawing/2014/main" id="{932C5FE0-071D-4374-B27F-226367D72092}"/>
+              </a:ext>
+            </a:extLst>
+          </p:cNvPr>
+          <p:cNvSpPr>
+            <a:spLocks xmlns:a="http://schemas.openxmlformats.org/drawingml/2006/main" noGrp="1"/>
+          </p:cNvSpPr>
+          <p:nvPr/>
+        </p:nvSpPr>
+        <p:spPr>
+          <a:xfrm xmlns:a="http://schemas.openxmlformats.org/drawingml/2006/main">
+            <a:off x="9696450" y="2571750"/>
+            <a:ext cx="1847850" cy="1333500"/>
           </a:xfrm>
           <a:prstGeom xmlns:a="http://schemas.openxmlformats.org/drawingml/2006/main" prst="roundRect">
             <a:avLst>
-              <a:gd name="adj" fmla="val 3175"/>
+              <a:gd name="adj" fmla="val 5714"/>
             </a:avLst>
           </a:prstGeom>
           <a:solidFill xmlns:a="http://schemas.openxmlformats.org/drawingml/2006/main">
-            <a:srgbClr val="D9F0EB"/>
+            <a:srgbClr val="ECEFF2"/>
           </a:solidFill>
           <a:ln xmlns:a="http://schemas.openxmlformats.org/drawingml/2006/main" w="0">
             <a:noFill/>
@@ -6359,22 +6428,80 @@
       </p:sp>
       <p:sp>
         <p:nvSpPr>
-          <p:cNvPr id="15" name="">
-            <a:extLst xmlns:a="http://schemas.openxmlformats.org/drawingml/2006/main">
-              <a:ext uri="{FF2B5EF4-FFF2-40B4-BE49-F238E27FC236}">
-                <a16:creationId xmlns:a16="http://schemas.microsoft.com/office/drawing/2014/main" id="{14825346-D4CB-4A21-B2C4-E3292BBC4246}"/>
-              </a:ext>
-            </a:extLst>
-          </p:cNvPr>
-          <p:cNvSpPr>
-            <a:spLocks xmlns:a="http://schemas.openxmlformats.org/drawingml/2006/main" noGrp="1"/>
-          </p:cNvSpPr>
-          <p:nvPr/>
-        </p:nvSpPr>
-        <p:spPr>
-          <a:xfrm xmlns:a="http://schemas.openxmlformats.org/drawingml/2006/main">
-            <a:off x="9486900" y="2381250"/>
-            <a:ext cx="1905000" cy="285750"/>
+          <p:cNvPr id="22" name="">
+            <a:extLst xmlns:a="http://schemas.openxmlformats.org/drawingml/2006/main">
+              <a:ext uri="{FF2B5EF4-FFF2-40B4-BE49-F238E27FC236}">
+                <a16:creationId xmlns:a16="http://schemas.microsoft.com/office/drawing/2014/main" id="{F22564EE-72BF-4424-A6ED-BA972C5ACD75}"/>
+              </a:ext>
+            </a:extLst>
+          </p:cNvPr>
+          <p:cNvSpPr>
+            <a:spLocks xmlns:a="http://schemas.openxmlformats.org/drawingml/2006/main" noGrp="1"/>
+          </p:cNvSpPr>
+          <p:nvPr/>
+        </p:nvSpPr>
+        <p:spPr>
+          <a:xfrm xmlns:a="http://schemas.openxmlformats.org/drawingml/2006/main">
+            <a:off x="9810750" y="2914650"/>
+            <a:ext cx="1619250" cy="419100"/>
+          </a:xfrm>
+          <a:prstGeom xmlns:a="http://schemas.openxmlformats.org/drawingml/2006/main" prst="rect">
+            <a:avLst/>
+          </a:prstGeom>
+          <a:noFill xmlns:a="http://schemas.openxmlformats.org/drawingml/2006/main"/>
+          <a:ln xmlns:a="http://schemas.openxmlformats.org/drawingml/2006/main" w="0">
+            <a:noFill/>
+            <a:prstDash val="solid"/>
+          </a:ln>
+        </p:spPr>
+        <p:txBody>
+          <a:bodyPr xmlns:a="http://schemas.openxmlformats.org/drawingml/2006/main" lIns="0" tIns="0" rIns="0" bIns="0" anchor="ctr">
+            <a:normAutofit fontScale="100000"/>
+          </a:bodyPr>
+          <a:lstStyle xmlns:a="http://schemas.openxmlformats.org/drawingml/2006/main"/>
+          <a:p xmlns:a="http://schemas.openxmlformats.org/drawingml/2006/main">
+            <a:pPr algn="ctr">
+              <a:defRPr sz="1650" b="1">
+                <a:solidFill>
+                  <a:srgbClr val="0A0F18"/>
+                </a:solidFill>
+                <a:latin typeface="Arial"/>
+                <a:ea typeface="Arial"/>
+                <a:cs typeface="Arial"/>
+              </a:defRPr>
+            </a:pPr>
+            <a:r>
+              <a:rPr sz="1650" b="1">
+                <a:solidFill>
+                  <a:srgbClr val="0A0F18"/>
+                </a:solidFill>
+                <a:latin typeface="Arial"/>
+                <a:ea typeface="Arial"/>
+                <a:cs typeface="Arial"/>
+              </a:rPr>
+              <a:t>PUBLICATION</a:t>
+            </a:r>
+          </a:p>
+        </p:txBody>
+      </p:sp>
+      <p:sp>
+        <p:nvSpPr>
+          <p:cNvPr id="23" name="">
+            <a:extLst xmlns:a="http://schemas.openxmlformats.org/drawingml/2006/main">
+              <a:ext uri="{FF2B5EF4-FFF2-40B4-BE49-F238E27FC236}">
+                <a16:creationId xmlns:a16="http://schemas.microsoft.com/office/drawing/2014/main" id="{C06402E8-8735-4368-A28C-A0EE7DF3989E}"/>
+              </a:ext>
+            </a:extLst>
+          </p:cNvPr>
+          <p:cNvSpPr>
+            <a:spLocks xmlns:a="http://schemas.openxmlformats.org/drawingml/2006/main" noGrp="1"/>
+          </p:cNvSpPr>
+          <p:nvPr/>
+        </p:nvSpPr>
+        <p:spPr>
+          <a:xfrm xmlns:a="http://schemas.openxmlformats.org/drawingml/2006/main">
+            <a:off x="9620250" y="4419600"/>
+            <a:ext cx="2000250" cy="666750"/>
           </a:xfrm>
           <a:prstGeom xmlns:a="http://schemas.openxmlformats.org/drawingml/2006/main" prst="rect">
             <a:avLst/>
@@ -6392,47 +6519,70 @@
           <a:lstStyle xmlns:a="http://schemas.openxmlformats.org/drawingml/2006/main"/>
           <a:p xmlns:a="http://schemas.openxmlformats.org/drawingml/2006/main">
             <a:pPr algn="ctr">
-              <a:defRPr sz="1200" b="1">
-                <a:solidFill>
-                  <a:srgbClr val="0D766E"/>
-                </a:solidFill>
-                <a:latin typeface="Arial"/>
-                <a:ea typeface="Arial"/>
-                <a:cs typeface="Arial"/>
-              </a:defRPr>
-            </a:pPr>
-            <a:r>
-              <a:rPr sz="1200" b="1">
-                <a:solidFill>
-                  <a:srgbClr val="0D766E"/>
-                </a:solidFill>
-                <a:latin typeface="Arial"/>
-                <a:ea typeface="Arial"/>
-                <a:cs typeface="Arial"/>
-              </a:rPr>
-              <a:t>SALIDAS</a:t>
-            </a:r>
-          </a:p>
-        </p:txBody>
-      </p:sp>
-      <p:sp>
-        <p:nvSpPr>
-          <p:cNvPr id="16" name="">
-            <a:extLst xmlns:a="http://schemas.openxmlformats.org/drawingml/2006/main">
-              <a:ext uri="{FF2B5EF4-FFF2-40B4-BE49-F238E27FC236}">
-                <a16:creationId xmlns:a16="http://schemas.microsoft.com/office/drawing/2014/main" id="{DCB69DB7-2960-4F45-8D33-15AF7850E358}"/>
-              </a:ext>
-            </a:extLst>
-          </p:cNvPr>
-          <p:cNvSpPr>
-            <a:spLocks xmlns:a="http://schemas.openxmlformats.org/drawingml/2006/main" noGrp="1"/>
-          </p:cNvSpPr>
-          <p:nvPr/>
-        </p:nvSpPr>
-        <p:spPr>
-          <a:xfrm xmlns:a="http://schemas.openxmlformats.org/drawingml/2006/main">
-            <a:off x="9505950" y="2876550"/>
-            <a:ext cx="1866900" cy="1600200"/>
+              <a:defRPr sz="1350" b="0">
+                <a:solidFill>
+                  <a:srgbClr val="576071"/>
+                </a:solidFill>
+                <a:latin typeface="Arial"/>
+                <a:ea typeface="Arial"/>
+                <a:cs typeface="Arial"/>
+              </a:defRPr>
+            </a:pPr>
+            <a:r>
+              <a:rPr sz="1350" b="0">
+                <a:solidFill>
+                  <a:srgbClr val="576071"/>
+                </a:solidFill>
+                <a:latin typeface="Arial"/>
+                <a:ea typeface="Arial"/>
+                <a:cs typeface="Arial"/>
+              </a:rPr>
+              <a:t>Envío aprobado</a:t>
+            </a:r>
+          </a:p>
+          <a:p xmlns:a="http://schemas.openxmlformats.org/drawingml/2006/main">
+            <a:pPr algn="ctr">
+              <a:defRPr sz="1350" b="0">
+                <a:solidFill>
+                  <a:srgbClr val="576071"/>
+                </a:solidFill>
+                <a:latin typeface="Arial"/>
+                <a:ea typeface="Arial"/>
+                <a:cs typeface="Arial"/>
+              </a:defRPr>
+            </a:pPr>
+            <a:r>
+              <a:rPr sz="1350" b="0">
+                <a:solidFill>
+                  <a:srgbClr val="576071"/>
+                </a:solidFill>
+                <a:latin typeface="Arial"/>
+                <a:ea typeface="Arial"/>
+                <a:cs typeface="Arial"/>
+              </a:rPr>
+              <a:t>y trazable</a:t>
+            </a:r>
+          </a:p>
+        </p:txBody>
+      </p:sp>
+      <p:sp>
+        <p:nvSpPr>
+          <p:cNvPr id="24" name="">
+            <a:extLst xmlns:a="http://schemas.openxmlformats.org/drawingml/2006/main">
+              <a:ext uri="{FF2B5EF4-FFF2-40B4-BE49-F238E27FC236}">
+                <a16:creationId xmlns:a16="http://schemas.microsoft.com/office/drawing/2014/main" id="{17A220E9-55A1-4883-93D4-9325C3D7DE41}"/>
+              </a:ext>
+            </a:extLst>
+          </p:cNvPr>
+          <p:cNvSpPr>
+            <a:spLocks xmlns:a="http://schemas.openxmlformats.org/drawingml/2006/main" noGrp="1"/>
+          </p:cNvSpPr>
+          <p:nvPr/>
+        </p:nvSpPr>
+        <p:spPr>
+          <a:xfrm xmlns:a="http://schemas.openxmlformats.org/drawingml/2006/main">
+            <a:off x="2286000" y="5581650"/>
+            <a:ext cx="7620000" cy="400050"/>
           </a:xfrm>
           <a:prstGeom xmlns:a="http://schemas.openxmlformats.org/drawingml/2006/main" prst="rect">
             <a:avLst/>
@@ -6450,139 +6600,47 @@
           <a:lstStyle xmlns:a="http://schemas.openxmlformats.org/drawingml/2006/main"/>
           <a:p xmlns:a="http://schemas.openxmlformats.org/drawingml/2006/main">
             <a:pPr algn="ctr">
-              <a:defRPr sz="1650" b="0">
-                <a:solidFill>
-                  <a:srgbClr val="0A0F18"/>
-                </a:solidFill>
-                <a:latin typeface="Arial"/>
-                <a:ea typeface="Arial"/>
-                <a:cs typeface="Arial"/>
-              </a:defRPr>
-            </a:pPr>
-            <a:r>
-              <a:rPr sz="1650" b="0">
-                <a:solidFill>
-                  <a:srgbClr val="0A0F18"/>
-                </a:solidFill>
-                <a:latin typeface="Arial"/>
-                <a:ea typeface="Arial"/>
-                <a:cs typeface="Arial"/>
-              </a:rPr>
-              <a:t>Angular</a:t>
-            </a:r>
-          </a:p>
-          <a:p xmlns:a="http://schemas.openxmlformats.org/drawingml/2006/main">
-            <a:pPr algn="ctr">
-              <a:defRPr sz="1650" b="0">
-                <a:solidFill>
-                  <a:srgbClr val="0A0F18"/>
-                </a:solidFill>
-                <a:latin typeface="Arial"/>
-                <a:ea typeface="Arial"/>
-                <a:cs typeface="Arial"/>
-              </a:defRPr>
-            </a:pPr>
-            <a:r>
-              <a:rPr sz="1650" b="0">
-                <a:solidFill>
-                  <a:srgbClr val="0A0F18"/>
-                </a:solidFill>
-                <a:latin typeface="Arial"/>
-                <a:ea typeface="Arial"/>
-                <a:cs typeface="Arial"/>
-              </a:rPr>
-              <a:t>PostgreSQL</a:t>
-            </a:r>
-          </a:p>
-          <a:p xmlns:a="http://schemas.openxmlformats.org/drawingml/2006/main">
-            <a:pPr algn="ctr">
-              <a:defRPr sz="1650" b="0">
-                <a:solidFill>
-                  <a:srgbClr val="0A0F18"/>
-                </a:solidFill>
-                <a:latin typeface="Arial"/>
-                <a:ea typeface="Arial"/>
-                <a:cs typeface="Arial"/>
-              </a:defRPr>
-            </a:pPr>
-            <a:r>
-              <a:rPr sz="1650" b="0">
-                <a:solidFill>
-                  <a:srgbClr val="0A0F18"/>
-                </a:solidFill>
-                <a:latin typeface="Arial"/>
-                <a:ea typeface="Arial"/>
-                <a:cs typeface="Arial"/>
-              </a:rPr>
-              <a:t>Gemini opcional</a:t>
-            </a:r>
-          </a:p>
-          <a:p xmlns:a="http://schemas.openxmlformats.org/drawingml/2006/main">
-            <a:pPr algn="ctr">
-              <a:defRPr sz="1650" b="0">
-                <a:solidFill>
-                  <a:srgbClr val="0A0F18"/>
-                </a:solidFill>
-                <a:latin typeface="Arial"/>
-                <a:ea typeface="Arial"/>
-                <a:cs typeface="Arial"/>
-              </a:defRPr>
-            </a:pPr>
-            <a:r>
-              <a:rPr sz="1650" b="0">
-                <a:solidFill>
-                  <a:srgbClr val="0A0F18"/>
-                </a:solidFill>
-                <a:latin typeface="Arial"/>
-                <a:ea typeface="Arial"/>
-                <a:cs typeface="Arial"/>
-              </a:rPr>
-              <a:t>Telegram</a:t>
-            </a:r>
-          </a:p>
-          <a:p xmlns:a="http://schemas.openxmlformats.org/drawingml/2006/main">
-            <a:pPr algn="ctr">
-              <a:defRPr sz="1650" b="0">
-                <a:solidFill>
-                  <a:srgbClr val="0A0F18"/>
-                </a:solidFill>
-                <a:latin typeface="Arial"/>
-                <a:ea typeface="Arial"/>
-                <a:cs typeface="Arial"/>
-              </a:defRPr>
-            </a:pPr>
-            <a:r>
-              <a:rPr sz="1650" b="0">
-                <a:solidFill>
-                  <a:srgbClr val="0A0F18"/>
-                </a:solidFill>
-                <a:latin typeface="Arial"/>
-                <a:ea typeface="Arial"/>
-                <a:cs typeface="Arial"/>
-              </a:rPr>
-              <a:t>MailHog</a:t>
-            </a:r>
-          </a:p>
-        </p:txBody>
-      </p:sp>
-      <p:sp>
-        <p:nvSpPr>
-          <p:cNvPr id="17" name="">
-            <a:extLst xmlns:a="http://schemas.openxmlformats.org/drawingml/2006/main">
-              <a:ext uri="{FF2B5EF4-FFF2-40B4-BE49-F238E27FC236}">
-                <a16:creationId xmlns:a16="http://schemas.microsoft.com/office/drawing/2014/main" id="{7B91B6C4-453A-413E-83A0-7A6DD4DBEC2A}"/>
-              </a:ext>
-            </a:extLst>
-          </p:cNvPr>
-          <p:cNvSpPr>
-            <a:spLocks xmlns:a="http://schemas.openxmlformats.org/drawingml/2006/main" noGrp="1"/>
-          </p:cNvSpPr>
-          <p:nvPr/>
-        </p:nvSpPr>
-        <p:spPr>
-          <a:xfrm xmlns:a="http://schemas.openxmlformats.org/drawingml/2006/main">
-            <a:off x="3257550" y="5467350"/>
-            <a:ext cx="5314950" cy="361950"/>
+              <a:defRPr sz="2100" b="1">
+                <a:solidFill>
+                  <a:srgbClr val="0D766E"/>
+                </a:solidFill>
+                <a:latin typeface="Arial"/>
+                <a:ea typeface="Arial"/>
+                <a:cs typeface="Arial"/>
+              </a:defRPr>
+            </a:pPr>
+            <a:r>
+              <a:rPr sz="2100" b="1">
+                <a:solidFill>
+                  <a:srgbClr val="0D766E"/>
+                </a:solidFill>
+                <a:latin typeface="Arial"/>
+                <a:ea typeface="Arial"/>
+                <a:cs typeface="Arial"/>
+              </a:rPr>
+              <a:t>La IA propone. El dominio valida. Una persona aprueba.</a:t>
+            </a:r>
+          </a:p>
+        </p:txBody>
+      </p:sp>
+      <p:sp>
+        <p:nvSpPr>
+          <p:cNvPr id="25" name="footer-4">
+            <a:extLst xmlns:a="http://schemas.openxmlformats.org/drawingml/2006/main">
+              <a:ext uri="{FF2B5EF4-FFF2-40B4-BE49-F238E27FC236}">
+                <a16:creationId xmlns:a16="http://schemas.microsoft.com/office/drawing/2014/main" id="{068ACAC8-0906-4A49-9155-8BF757BAE14A}"/>
+              </a:ext>
+            </a:extLst>
+          </p:cNvPr>
+          <p:cNvSpPr>
+            <a:spLocks xmlns:a="http://schemas.openxmlformats.org/drawingml/2006/main" noGrp="1"/>
+          </p:cNvSpPr>
+          <p:nvPr/>
+        </p:nvSpPr>
+        <p:spPr>
+          <a:xfrm xmlns:a="http://schemas.openxmlformats.org/drawingml/2006/main">
+            <a:off x="11239500" y="6391275"/>
+            <a:ext cx="419100" cy="190500"/>
           </a:xfrm>
           <a:prstGeom xmlns:a="http://schemas.openxmlformats.org/drawingml/2006/main" prst="rect">
             <a:avLst/>
@@ -6599,64 +6657,6 @@
           </a:bodyPr>
           <a:lstStyle xmlns:a="http://schemas.openxmlformats.org/drawingml/2006/main"/>
           <a:p xmlns:a="http://schemas.openxmlformats.org/drawingml/2006/main">
-            <a:pPr algn="ctr">
-              <a:defRPr sz="1725" b="1">
-                <a:solidFill>
-                  <a:srgbClr val="0D766E"/>
-                </a:solidFill>
-                <a:latin typeface="Arial"/>
-                <a:ea typeface="Arial"/>
-                <a:cs typeface="Arial"/>
-              </a:defRPr>
-            </a:pPr>
-            <a:r>
-              <a:rPr sz="1725" b="1">
-                <a:solidFill>
-                  <a:srgbClr val="0D766E"/>
-                </a:solidFill>
-                <a:latin typeface="Arial"/>
-                <a:ea typeface="Arial"/>
-                <a:cs typeface="Arial"/>
-              </a:rPr>
-              <a:t>DDD · Clean Architecture · PostgreSQL + Flyway</a:t>
-            </a:r>
-          </a:p>
-        </p:txBody>
-      </p:sp>
-      <p:sp>
-        <p:nvSpPr>
-          <p:cNvPr id="18" name="footer-4">
-            <a:extLst xmlns:a="http://schemas.openxmlformats.org/drawingml/2006/main">
-              <a:ext uri="{FF2B5EF4-FFF2-40B4-BE49-F238E27FC236}">
-                <a16:creationId xmlns:a16="http://schemas.microsoft.com/office/drawing/2014/main" id="{1F8FB12D-0BFC-4B3A-853E-03ABDEF0D0AB}"/>
-              </a:ext>
-            </a:extLst>
-          </p:cNvPr>
-          <p:cNvSpPr>
-            <a:spLocks xmlns:a="http://schemas.openxmlformats.org/drawingml/2006/main" noGrp="1"/>
-          </p:cNvSpPr>
-          <p:nvPr/>
-        </p:nvSpPr>
-        <p:spPr>
-          <a:xfrm xmlns:a="http://schemas.openxmlformats.org/drawingml/2006/main">
-            <a:off x="11239500" y="6391275"/>
-            <a:ext cx="419100" cy="190500"/>
-          </a:xfrm>
-          <a:prstGeom xmlns:a="http://schemas.openxmlformats.org/drawingml/2006/main" prst="rect">
-            <a:avLst/>
-          </a:prstGeom>
-          <a:noFill xmlns:a="http://schemas.openxmlformats.org/drawingml/2006/main"/>
-          <a:ln xmlns:a="http://schemas.openxmlformats.org/drawingml/2006/main" w="0">
-            <a:noFill/>
-            <a:prstDash val="solid"/>
-          </a:ln>
-        </p:spPr>
-        <p:txBody>
-          <a:bodyPr xmlns:a="http://schemas.openxmlformats.org/drawingml/2006/main" lIns="0" tIns="0" rIns="0" bIns="0" anchor="t">
-            <a:normAutofit fontScale="100000"/>
-          </a:bodyPr>
-          <a:lstStyle xmlns:a="http://schemas.openxmlformats.org/drawingml/2006/main"/>
-          <a:p xmlns:a="http://schemas.openxmlformats.org/drawingml/2006/main">
             <a:pPr algn="r">
               <a:defRPr sz="900" b="0">
                 <a:solidFill>
@@ -6684,7 +6684,7 @@
     </p:spTree>
     <p:extLst>
       <p:ext uri="{BB962C8B-B14F-4D97-AF65-F5344CB8AC3E}">
-        <p14:creationId xmlns:p14="http://schemas.microsoft.com/office/powerpoint/2010/main" val="1870423492"/>
+        <p14:creationId xmlns:p14="http://schemas.microsoft.com/office/powerpoint/2010/main" val="658288803"/>
       </p:ext>
     </p:extLst>
   </p:cSld>
@@ -6715,7 +6715,7 @@
           <p:cNvPr id="10" name="eyebrow-5">
             <a:extLst xmlns:a="http://schemas.openxmlformats.org/drawingml/2006/main">
               <a:ext uri="{FF2B5EF4-FFF2-40B4-BE49-F238E27FC236}">
-                <a16:creationId xmlns:a16="http://schemas.microsoft.com/office/drawing/2014/main" id="{7E56216E-45D4-4882-9E9A-BAB2971179BA}"/>
+                <a16:creationId xmlns:a16="http://schemas.microsoft.com/office/drawing/2014/main" id="{FBB0CB79-0826-4C0E-95DD-8A57CEACF78E}"/>
               </a:ext>
             </a:extLst>
           </p:cNvPr>
@@ -6773,7 +6773,7 @@
           <p:cNvPr id="2" name="title-5">
             <a:extLst xmlns:a="http://schemas.openxmlformats.org/drawingml/2006/main">
               <a:ext uri="{FF2B5EF4-FFF2-40B4-BE49-F238E27FC236}">
-                <a16:creationId xmlns:a16="http://schemas.microsoft.com/office/drawing/2014/main" id="{C0AD5540-73DC-4401-803C-2083AC66319D}"/>
+                <a16:creationId xmlns:a16="http://schemas.microsoft.com/office/drawing/2014/main" id="{4777B076-AEA8-4039-A259-EDB04A9666C3}"/>
               </a:ext>
             </a:extLst>
           </p:cNvPr>
@@ -6831,7 +6831,7 @@
           <p:cNvPr id="3" name="">
             <a:extLst xmlns:a="http://schemas.openxmlformats.org/drawingml/2006/main">
               <a:ext uri="{FF2B5EF4-FFF2-40B4-BE49-F238E27FC236}">
-                <a16:creationId xmlns:a16="http://schemas.microsoft.com/office/drawing/2014/main" id="{E346AF09-97F2-4330-A55D-57EC9C1E177E}"/>
+                <a16:creationId xmlns:a16="http://schemas.microsoft.com/office/drawing/2014/main" id="{C004C66B-D77E-4F69-8916-9B875614C3BE}"/>
               </a:ext>
             </a:extLst>
           </p:cNvPr>
@@ -6862,7 +6862,7 @@
           <p:cNvPr id="4" name="">
             <a:extLst xmlns:a="http://schemas.openxmlformats.org/drawingml/2006/main">
               <a:ext uri="{FF2B5EF4-FFF2-40B4-BE49-F238E27FC236}">
-                <a16:creationId xmlns:a16="http://schemas.microsoft.com/office/drawing/2014/main" id="{7E793F8C-B8BA-40CC-A0AC-1180E1FC9F10}"/>
+                <a16:creationId xmlns:a16="http://schemas.microsoft.com/office/drawing/2014/main" id="{872C2A65-9BD8-4454-B7F9-97A38C1DA859}"/>
               </a:ext>
             </a:extLst>
           </p:cNvPr>
@@ -6920,7 +6920,7 @@
           <p:cNvPr id="5" name="">
             <a:extLst xmlns:a="http://schemas.openxmlformats.org/drawingml/2006/main">
               <a:ext uri="{FF2B5EF4-FFF2-40B4-BE49-F238E27FC236}">
-                <a16:creationId xmlns:a16="http://schemas.microsoft.com/office/drawing/2014/main" id="{2756B26F-4A1C-4A84-939A-64D200C87375}"/>
+                <a16:creationId xmlns:a16="http://schemas.microsoft.com/office/drawing/2014/main" id="{FC7593C6-5B92-4F2D-BFDD-982CBF98983F}"/>
               </a:ext>
             </a:extLst>
           </p:cNvPr>
@@ -7070,7 +7070,7 @@
           <p:cNvPr id="6" name="">
             <a:extLst xmlns:a="http://schemas.openxmlformats.org/drawingml/2006/main">
               <a:ext uri="{FF2B5EF4-FFF2-40B4-BE49-F238E27FC236}">
-                <a16:creationId xmlns:a16="http://schemas.microsoft.com/office/drawing/2014/main" id="{F6DFB90D-3C36-4E90-BEDB-A1D4EF9C9913}"/>
+                <a16:creationId xmlns:a16="http://schemas.microsoft.com/office/drawing/2014/main" id="{F06F2B80-52FA-49AC-8D56-F15B6FACC716}"/>
               </a:ext>
             </a:extLst>
           </p:cNvPr>
@@ -7128,7 +7128,7 @@
           <p:cNvPr id="7" name="">
             <a:extLst xmlns:a="http://schemas.openxmlformats.org/drawingml/2006/main">
               <a:ext uri="{FF2B5EF4-FFF2-40B4-BE49-F238E27FC236}">
-                <a16:creationId xmlns:a16="http://schemas.microsoft.com/office/drawing/2014/main" id="{B2BA9462-DEE0-42DB-AA3E-D7EBBF001A90}"/>
+                <a16:creationId xmlns:a16="http://schemas.microsoft.com/office/drawing/2014/main" id="{EC307F92-5ADA-4C6B-8A36-8DEF0904BF47}"/>
               </a:ext>
             </a:extLst>
           </p:cNvPr>
@@ -7167,7 +7167,7 @@
           <p:nvPr/>
         </p:nvPicPr>
         <p:blipFill>
-          <a:blip xmlns:r="http://schemas.openxmlformats.org/officeDocument/2006/relationships" xmlns:a="http://schemas.openxmlformats.org/drawingml/2006/main" r:embed="R091bae9ff87f4d14"/>
+          <a:blip xmlns:r="http://schemas.openxmlformats.org/officeDocument/2006/relationships" xmlns:a="http://schemas.openxmlformats.org/drawingml/2006/main" r:embed="R8767e68bdad84311"/>
           <a:srcRect xmlns:a="http://schemas.openxmlformats.org/drawingml/2006/main" l="0" t="75" r="0" b="75"/>
           <a:stretch xmlns:a="http://schemas.openxmlformats.org/drawingml/2006/main">
             <a:fillRect l="0" t="0" r="0" b="0"/>
@@ -7190,7 +7190,7 @@
           <p:cNvPr id="9" name="footer-5">
             <a:extLst xmlns:a="http://schemas.openxmlformats.org/drawingml/2006/main">
               <a:ext uri="{FF2B5EF4-FFF2-40B4-BE49-F238E27FC236}">
-                <a16:creationId xmlns:a16="http://schemas.microsoft.com/office/drawing/2014/main" id="{66C46EE8-A9F0-4212-B12A-4D061978775D}"/>
+                <a16:creationId xmlns:a16="http://schemas.microsoft.com/office/drawing/2014/main" id="{37C4EAFB-280D-46E5-98D5-D9346DA9D2D2}"/>
               </a:ext>
             </a:extLst>
           </p:cNvPr>
@@ -7246,7 +7246,7 @@
     </p:spTree>
     <p:extLst>
       <p:ext uri="{BB962C8B-B14F-4D97-AF65-F5344CB8AC3E}">
-        <p14:creationId xmlns:p14="http://schemas.microsoft.com/office/powerpoint/2010/main" val="1076890229"/>
+        <p14:creationId xmlns:p14="http://schemas.microsoft.com/office/powerpoint/2010/main" val="337363312"/>
       </p:ext>
     </p:extLst>
   </p:cSld>
@@ -7277,7 +7277,7 @@
           <p:cNvPr id="13" name="eyebrow-6">
             <a:extLst xmlns:a="http://schemas.openxmlformats.org/drawingml/2006/main">
               <a:ext uri="{FF2B5EF4-FFF2-40B4-BE49-F238E27FC236}">
-                <a16:creationId xmlns:a16="http://schemas.microsoft.com/office/drawing/2014/main" id="{544E0E92-9395-41A8-BC74-83D02BFC097D}"/>
+                <a16:creationId xmlns:a16="http://schemas.microsoft.com/office/drawing/2014/main" id="{07626C83-3ED3-4943-9D07-71C79B3C39A3}"/>
               </a:ext>
             </a:extLst>
           </p:cNvPr>
@@ -7335,7 +7335,7 @@
           <p:cNvPr id="2" name="title-6">
             <a:extLst xmlns:a="http://schemas.openxmlformats.org/drawingml/2006/main">
               <a:ext uri="{FF2B5EF4-FFF2-40B4-BE49-F238E27FC236}">
-                <a16:creationId xmlns:a16="http://schemas.microsoft.com/office/drawing/2014/main" id="{BA62F8F4-4B95-42D4-B898-07F4F51DE508}"/>
+                <a16:creationId xmlns:a16="http://schemas.microsoft.com/office/drawing/2014/main" id="{8DE4F6E2-8B04-4D72-A86F-9A1B93AFD738}"/>
               </a:ext>
             </a:extLst>
           </p:cNvPr>
@@ -7393,7 +7393,7 @@
           <p:cNvPr id="3" name="">
             <a:extLst xmlns:a="http://schemas.openxmlformats.org/drawingml/2006/main">
               <a:ext uri="{FF2B5EF4-FFF2-40B4-BE49-F238E27FC236}">
-                <a16:creationId xmlns:a16="http://schemas.microsoft.com/office/drawing/2014/main" id="{8685B257-06BB-4E77-BA77-010D75EA9F4A}"/>
+                <a16:creationId xmlns:a16="http://schemas.microsoft.com/office/drawing/2014/main" id="{46E636C9-9913-450F-B480-CDD35B9EAED2}"/>
               </a:ext>
             </a:extLst>
           </p:cNvPr>
@@ -7424,7 +7424,7 @@
           <p:cNvPr id="4" name="">
             <a:extLst xmlns:a="http://schemas.openxmlformats.org/drawingml/2006/main">
               <a:ext uri="{FF2B5EF4-FFF2-40B4-BE49-F238E27FC236}">
-                <a16:creationId xmlns:a16="http://schemas.microsoft.com/office/drawing/2014/main" id="{3948CF35-2A91-4229-9F93-4CC8D2EC3032}"/>
+                <a16:creationId xmlns:a16="http://schemas.microsoft.com/office/drawing/2014/main" id="{EEA5CDFF-8EF6-4559-B79D-0AC7C46014D9}"/>
               </a:ext>
             </a:extLst>
           </p:cNvPr>
@@ -7463,7 +7463,7 @@
           <p:nvPr/>
         </p:nvPicPr>
         <p:blipFill>
-          <a:blip xmlns:r="http://schemas.openxmlformats.org/officeDocument/2006/relationships" xmlns:a="http://schemas.openxmlformats.org/drawingml/2006/main" r:embed="Rbfaaaa46ee3e436b"/>
+          <a:blip xmlns:r="http://schemas.openxmlformats.org/officeDocument/2006/relationships" xmlns:a="http://schemas.openxmlformats.org/drawingml/2006/main" r:embed="R225a872effb34a38"/>
           <a:srcRect xmlns:a="http://schemas.openxmlformats.org/drawingml/2006/main" l="0" t="50" r="0" b="50"/>
           <a:stretch xmlns:a="http://schemas.openxmlformats.org/drawingml/2006/main">
             <a:fillRect l="0" t="0" r="0" b="0"/>
@@ -7486,7 +7486,7 @@
           <p:cNvPr id="6" name="">
             <a:extLst xmlns:a="http://schemas.openxmlformats.org/drawingml/2006/main">
               <a:ext uri="{FF2B5EF4-FFF2-40B4-BE49-F238E27FC236}">
-                <a16:creationId xmlns:a16="http://schemas.microsoft.com/office/drawing/2014/main" id="{BD4550E1-6E28-4465-80CA-CB55975715EB}"/>
+                <a16:creationId xmlns:a16="http://schemas.microsoft.com/office/drawing/2014/main" id="{97E97D51-C34E-4249-897E-F99D292B355A}"/>
               </a:ext>
             </a:extLst>
           </p:cNvPr>
@@ -7525,7 +7525,7 @@
           <p:nvPr/>
         </p:nvPicPr>
         <p:blipFill>
-          <a:blip xmlns:r="http://schemas.openxmlformats.org/officeDocument/2006/relationships" xmlns:a="http://schemas.openxmlformats.org/drawingml/2006/main" r:embed="Raad77798df144b15"/>
+          <a:blip xmlns:r="http://schemas.openxmlformats.org/officeDocument/2006/relationships" xmlns:a="http://schemas.openxmlformats.org/drawingml/2006/main" r:embed="R1a5c0cad0702451f"/>
           <a:srcRect xmlns:a="http://schemas.openxmlformats.org/drawingml/2006/main" l="0" t="50" r="0" b="50"/>
           <a:stretch xmlns:a="http://schemas.openxmlformats.org/drawingml/2006/main">
             <a:fillRect l="0" t="0" r="0" b="0"/>
@@ -7548,7 +7548,7 @@
           <p:cNvPr id="8" name="">
             <a:extLst xmlns:a="http://schemas.openxmlformats.org/drawingml/2006/main">
               <a:ext uri="{FF2B5EF4-FFF2-40B4-BE49-F238E27FC236}">
-                <a16:creationId xmlns:a16="http://schemas.microsoft.com/office/drawing/2014/main" id="{484DF4E4-8085-4961-8592-C99C1C3881E1}"/>
+                <a16:creationId xmlns:a16="http://schemas.microsoft.com/office/drawing/2014/main" id="{B8B86432-DF99-4562-8ACA-3C11BD7B5DB9}"/>
               </a:ext>
             </a:extLst>
           </p:cNvPr>
@@ -7606,7 +7606,7 @@
           <p:cNvPr id="9" name="">
             <a:extLst xmlns:a="http://schemas.openxmlformats.org/drawingml/2006/main">
               <a:ext uri="{FF2B5EF4-FFF2-40B4-BE49-F238E27FC236}">
-                <a16:creationId xmlns:a16="http://schemas.microsoft.com/office/drawing/2014/main" id="{14B1305E-9323-4BCD-932C-6642C4EABE05}"/>
+                <a16:creationId xmlns:a16="http://schemas.microsoft.com/office/drawing/2014/main" id="{8ACD1F6A-585B-4068-9FDE-CE31BBE3821B}"/>
               </a:ext>
             </a:extLst>
           </p:cNvPr>
@@ -7664,7 +7664,7 @@
           <p:cNvPr id="10" name="">
             <a:extLst xmlns:a="http://schemas.openxmlformats.org/drawingml/2006/main">
               <a:ext uri="{FF2B5EF4-FFF2-40B4-BE49-F238E27FC236}">
-                <a16:creationId xmlns:a16="http://schemas.microsoft.com/office/drawing/2014/main" id="{8ECC2B6A-530B-4201-92BA-BA3BCD6AA857}"/>
+                <a16:creationId xmlns:a16="http://schemas.microsoft.com/office/drawing/2014/main" id="{A64072C1-2C81-43E5-A8C3-5DCE6DAEA22A}"/>
               </a:ext>
             </a:extLst>
           </p:cNvPr>
@@ -7722,7 +7722,7 @@
           <p:cNvPr id="11" name="">
             <a:extLst xmlns:a="http://schemas.openxmlformats.org/drawingml/2006/main">
               <a:ext uri="{FF2B5EF4-FFF2-40B4-BE49-F238E27FC236}">
-                <a16:creationId xmlns:a16="http://schemas.microsoft.com/office/drawing/2014/main" id="{CACC0550-3804-4624-A22D-E2450275AF7B}"/>
+                <a16:creationId xmlns:a16="http://schemas.microsoft.com/office/drawing/2014/main" id="{28EABACA-99AD-4126-BCDA-EB62238C6AE8}"/>
               </a:ext>
             </a:extLst>
           </p:cNvPr>
@@ -7780,7 +7780,7 @@
           <p:cNvPr id="12" name="footer-6">
             <a:extLst xmlns:a="http://schemas.openxmlformats.org/drawingml/2006/main">
               <a:ext uri="{FF2B5EF4-FFF2-40B4-BE49-F238E27FC236}">
-                <a16:creationId xmlns:a16="http://schemas.microsoft.com/office/drawing/2014/main" id="{5F472C08-C6A8-4723-A6E7-8B5771EBD2A8}"/>
+                <a16:creationId xmlns:a16="http://schemas.microsoft.com/office/drawing/2014/main" id="{3A3B4AC9-6213-41D7-8E73-D0913ACA6DEB}"/>
               </a:ext>
             </a:extLst>
           </p:cNvPr>
@@ -7836,7 +7836,7 @@
     </p:spTree>
     <p:extLst>
       <p:ext uri="{BB962C8B-B14F-4D97-AF65-F5344CB8AC3E}">
-        <p14:creationId xmlns:p14="http://schemas.microsoft.com/office/powerpoint/2010/main" val="781501187"/>
+        <p14:creationId xmlns:p14="http://schemas.microsoft.com/office/powerpoint/2010/main" val="1902638979"/>
       </p:ext>
     </p:extLst>
   </p:cSld>
@@ -7867,7 +7867,7 @@
           <p:cNvPr id="22" name="eyebrow-7">
             <a:extLst xmlns:a="http://schemas.openxmlformats.org/drawingml/2006/main">
               <a:ext uri="{FF2B5EF4-FFF2-40B4-BE49-F238E27FC236}">
-                <a16:creationId xmlns:a16="http://schemas.microsoft.com/office/drawing/2014/main" id="{3AAEFCB9-B5B0-4518-A30E-73AA20AEBA23}"/>
+                <a16:creationId xmlns:a16="http://schemas.microsoft.com/office/drawing/2014/main" id="{7227F1DC-F462-4F30-A080-0E926B556483}"/>
               </a:ext>
             </a:extLst>
           </p:cNvPr>
@@ -7925,7 +7925,7 @@
           <p:cNvPr id="2" name="title-7">
             <a:extLst xmlns:a="http://schemas.openxmlformats.org/drawingml/2006/main">
               <a:ext uri="{FF2B5EF4-FFF2-40B4-BE49-F238E27FC236}">
-                <a16:creationId xmlns:a16="http://schemas.microsoft.com/office/drawing/2014/main" id="{E318E46F-3167-4852-AF8B-4C585450D905}"/>
+                <a16:creationId xmlns:a16="http://schemas.microsoft.com/office/drawing/2014/main" id="{6590DFC9-6B84-4ADD-BE6B-8480D934D7DD}"/>
               </a:ext>
             </a:extLst>
           </p:cNvPr>
@@ -7983,7 +7983,7 @@
           <p:cNvPr id="3" name="">
             <a:extLst xmlns:a="http://schemas.openxmlformats.org/drawingml/2006/main">
               <a:ext uri="{FF2B5EF4-FFF2-40B4-BE49-F238E27FC236}">
-                <a16:creationId xmlns:a16="http://schemas.microsoft.com/office/drawing/2014/main" id="{C22130D8-9257-4022-9C5E-AC45FC9EF9EC}"/>
+                <a16:creationId xmlns:a16="http://schemas.microsoft.com/office/drawing/2014/main" id="{0546422A-A8D5-4640-8FE3-AD6094FDF0C1}"/>
               </a:ext>
             </a:extLst>
           </p:cNvPr>
@@ -8036,7 +8036,7 @@
           <p:cNvPr id="5" name="">
             <a:extLst xmlns:a="http://schemas.openxmlformats.org/drawingml/2006/main">
               <a:ext uri="{FF2B5EF4-FFF2-40B4-BE49-F238E27FC236}">
-                <a16:creationId xmlns:a16="http://schemas.microsoft.com/office/drawing/2014/main" id="{BD2A2EC1-A65C-4144-B2A7-E139D1823C10}"/>
+                <a16:creationId xmlns:a16="http://schemas.microsoft.com/office/drawing/2014/main" id="{FD4EC655-EEE5-4C3A-B494-CB00B83D5C92}"/>
               </a:ext>
             </a:extLst>
           </p:cNvPr>
@@ -8069,7 +8069,7 @@
           <p:cNvPr id="6" name="">
             <a:extLst xmlns:a="http://schemas.openxmlformats.org/drawingml/2006/main">
               <a:ext uri="{FF2B5EF4-FFF2-40B4-BE49-F238E27FC236}">
-                <a16:creationId xmlns:a16="http://schemas.microsoft.com/office/drawing/2014/main" id="{4A8BD7E3-5E28-4D5A-9EBC-734D814223D5}"/>
+                <a16:creationId xmlns:a16="http://schemas.microsoft.com/office/drawing/2014/main" id="{7F78EB25-9234-40C8-9DD0-7C1B365F203E}"/>
               </a:ext>
             </a:extLst>
           </p:cNvPr>
@@ -8127,7 +8127,7 @@
           <p:cNvPr id="7" name="">
             <a:extLst xmlns:a="http://schemas.openxmlformats.org/drawingml/2006/main">
               <a:ext uri="{FF2B5EF4-FFF2-40B4-BE49-F238E27FC236}">
-                <a16:creationId xmlns:a16="http://schemas.microsoft.com/office/drawing/2014/main" id="{F65E8FBA-5373-4010-A80F-B71AD5CFFD5F}"/>
+                <a16:creationId xmlns:a16="http://schemas.microsoft.com/office/drawing/2014/main" id="{FEC517F3-45DD-4931-BF96-C6947847FA5A}"/>
               </a:ext>
             </a:extLst>
           </p:cNvPr>
@@ -8259,7 +8259,7 @@
           <p:cNvPr id="8" name="">
             <a:extLst xmlns:a="http://schemas.openxmlformats.org/drawingml/2006/main">
               <a:ext uri="{FF2B5EF4-FFF2-40B4-BE49-F238E27FC236}">
-                <a16:creationId xmlns:a16="http://schemas.microsoft.com/office/drawing/2014/main" id="{68422674-08CE-4E54-B1D1-CB33C1485A50}"/>
+                <a16:creationId xmlns:a16="http://schemas.microsoft.com/office/drawing/2014/main" id="{B36B449F-5BF3-481D-A6FC-5003741B3073}"/>
               </a:ext>
             </a:extLst>
           </p:cNvPr>
@@ -8290,7 +8290,7 @@
           <p:cNvPr id="9" name="">
             <a:extLst xmlns:a="http://schemas.openxmlformats.org/drawingml/2006/main">
               <a:ext uri="{FF2B5EF4-FFF2-40B4-BE49-F238E27FC236}">
-                <a16:creationId xmlns:a16="http://schemas.microsoft.com/office/drawing/2014/main" id="{90E398F8-296F-4565-A14E-9EACC78E2948}"/>
+                <a16:creationId xmlns:a16="http://schemas.microsoft.com/office/drawing/2014/main" id="{079E29FD-86AB-4F6F-A72D-D789E4559CE0}"/>
               </a:ext>
             </a:extLst>
           </p:cNvPr>
@@ -8348,7 +8348,7 @@
           <p:cNvPr id="10" name="">
             <a:extLst xmlns:a="http://schemas.openxmlformats.org/drawingml/2006/main">
               <a:ext uri="{FF2B5EF4-FFF2-40B4-BE49-F238E27FC236}">
-                <a16:creationId xmlns:a16="http://schemas.microsoft.com/office/drawing/2014/main" id="{7EED8116-7B50-462D-947B-B2BF6781E233}"/>
+                <a16:creationId xmlns:a16="http://schemas.microsoft.com/office/drawing/2014/main" id="{C7927D50-BD66-4CC6-BF0C-DC5825B58A77}"/>
               </a:ext>
             </a:extLst>
           </p:cNvPr>
@@ -8381,7 +8381,7 @@
           <p:cNvPr id="11" name="">
             <a:extLst xmlns:a="http://schemas.openxmlformats.org/drawingml/2006/main">
               <a:ext uri="{FF2B5EF4-FFF2-40B4-BE49-F238E27FC236}">
-                <a16:creationId xmlns:a16="http://schemas.microsoft.com/office/drawing/2014/main" id="{CB899E96-74D8-4CD7-B822-7D4FCCC141A3}"/>
+                <a16:creationId xmlns:a16="http://schemas.microsoft.com/office/drawing/2014/main" id="{A0A29D19-1DF7-4614-83AE-40B95B499D0C}"/>
               </a:ext>
             </a:extLst>
           </p:cNvPr>
@@ -8439,7 +8439,7 @@
           <p:cNvPr id="12" name="">
             <a:extLst xmlns:a="http://schemas.openxmlformats.org/drawingml/2006/main">
               <a:ext uri="{FF2B5EF4-FFF2-40B4-BE49-F238E27FC236}">
-                <a16:creationId xmlns:a16="http://schemas.microsoft.com/office/drawing/2014/main" id="{491D1F36-3141-418A-9D9B-23CD7AF81268}"/>
+                <a16:creationId xmlns:a16="http://schemas.microsoft.com/office/drawing/2014/main" id="{7B812560-A5CB-485B-8A3E-C6CD674132DC}"/>
               </a:ext>
             </a:extLst>
           </p:cNvPr>
@@ -8571,7 +8571,7 @@
           <p:cNvPr id="13" name="">
             <a:extLst xmlns:a="http://schemas.openxmlformats.org/drawingml/2006/main">
               <a:ext uri="{FF2B5EF4-FFF2-40B4-BE49-F238E27FC236}">
-                <a16:creationId xmlns:a16="http://schemas.microsoft.com/office/drawing/2014/main" id="{DD0BF401-B4F6-48FF-9C83-C543EC1599FB}"/>
+                <a16:creationId xmlns:a16="http://schemas.microsoft.com/office/drawing/2014/main" id="{7E2524A1-FB95-4C88-B151-7D04ED2D9714}"/>
               </a:ext>
             </a:extLst>
           </p:cNvPr>
@@ -8602,7 +8602,7 @@
           <p:cNvPr id="14" name="">
             <a:extLst xmlns:a="http://schemas.openxmlformats.org/drawingml/2006/main">
               <a:ext uri="{FF2B5EF4-FFF2-40B4-BE49-F238E27FC236}">
-                <a16:creationId xmlns:a16="http://schemas.microsoft.com/office/drawing/2014/main" id="{8CD8394D-71DA-4BCA-A1FA-09BAFBAFA928}"/>
+                <a16:creationId xmlns:a16="http://schemas.microsoft.com/office/drawing/2014/main" id="{D28D65D1-D8BB-4292-B987-2DE062298B60}"/>
               </a:ext>
             </a:extLst>
           </p:cNvPr>
@@ -8660,7 +8660,7 @@
           <p:cNvPr id="15" name="">
             <a:extLst xmlns:a="http://schemas.openxmlformats.org/drawingml/2006/main">
               <a:ext uri="{FF2B5EF4-FFF2-40B4-BE49-F238E27FC236}">
-                <a16:creationId xmlns:a16="http://schemas.microsoft.com/office/drawing/2014/main" id="{2D47549D-BD52-40C0-B751-5661E56054CC}"/>
+                <a16:creationId xmlns:a16="http://schemas.microsoft.com/office/drawing/2014/main" id="{F1536707-1422-4C69-A19C-1AD2BCEEE8D8}"/>
               </a:ext>
             </a:extLst>
           </p:cNvPr>
@@ -8693,7 +8693,7 @@
           <p:cNvPr id="16" name="">
             <a:extLst xmlns:a="http://schemas.openxmlformats.org/drawingml/2006/main">
               <a:ext uri="{FF2B5EF4-FFF2-40B4-BE49-F238E27FC236}">
-                <a16:creationId xmlns:a16="http://schemas.microsoft.com/office/drawing/2014/main" id="{59ABE510-CE5C-4784-AD7B-E28C785D3B52}"/>
+                <a16:creationId xmlns:a16="http://schemas.microsoft.com/office/drawing/2014/main" id="{0085BD1A-8741-42ED-BAA2-01C5BC67FB2A}"/>
               </a:ext>
             </a:extLst>
           </p:cNvPr>
@@ -8751,7 +8751,7 @@
           <p:cNvPr id="17" name="">
             <a:extLst xmlns:a="http://schemas.openxmlformats.org/drawingml/2006/main">
               <a:ext uri="{FF2B5EF4-FFF2-40B4-BE49-F238E27FC236}">
-                <a16:creationId xmlns:a16="http://schemas.microsoft.com/office/drawing/2014/main" id="{35E666C4-B007-4BC8-8DD3-A435E33D837E}"/>
+                <a16:creationId xmlns:a16="http://schemas.microsoft.com/office/drawing/2014/main" id="{3519F0D4-6C77-48C5-8073-F15E6999F8FA}"/>
               </a:ext>
             </a:extLst>
           </p:cNvPr>
@@ -8883,7 +8883,7 @@
           <p:cNvPr id="18" name="">
             <a:extLst xmlns:a="http://schemas.openxmlformats.org/drawingml/2006/main">
               <a:ext uri="{FF2B5EF4-FFF2-40B4-BE49-F238E27FC236}">
-                <a16:creationId xmlns:a16="http://schemas.microsoft.com/office/drawing/2014/main" id="{2C9A2BD2-CEB1-440A-9583-1004E5B5024B}"/>
+                <a16:creationId xmlns:a16="http://schemas.microsoft.com/office/drawing/2014/main" id="{0441361E-2700-4054-B442-FFCCB5A46AD4}"/>
               </a:ext>
             </a:extLst>
           </p:cNvPr>
@@ -8914,7 +8914,7 @@
           <p:cNvPr id="19" name="">
             <a:extLst xmlns:a="http://schemas.openxmlformats.org/drawingml/2006/main">
               <a:ext uri="{FF2B5EF4-FFF2-40B4-BE49-F238E27FC236}">
-                <a16:creationId xmlns:a16="http://schemas.microsoft.com/office/drawing/2014/main" id="{3AF59BC4-E347-40CB-A855-4AF1648DAF2B}"/>
+                <a16:creationId xmlns:a16="http://schemas.microsoft.com/office/drawing/2014/main" id="{6BF645E7-0669-4B2E-9E5C-6AF84ECDA98F}"/>
               </a:ext>
             </a:extLst>
           </p:cNvPr>
@@ -8972,7 +8972,7 @@
           <p:cNvPr id="20" name="">
             <a:extLst xmlns:a="http://schemas.openxmlformats.org/drawingml/2006/main">
               <a:ext uri="{FF2B5EF4-FFF2-40B4-BE49-F238E27FC236}">
-                <a16:creationId xmlns:a16="http://schemas.microsoft.com/office/drawing/2014/main" id="{38B9C56E-A3C6-43B0-9D5E-CB9932D00572}"/>
+                <a16:creationId xmlns:a16="http://schemas.microsoft.com/office/drawing/2014/main" id="{EBC297D8-1724-4727-8DE9-5997BD84A37D}"/>
               </a:ext>
             </a:extLst>
           </p:cNvPr>
@@ -9030,7 +9030,7 @@
           <p:cNvPr id="21" name="footer-7">
             <a:extLst xmlns:a="http://schemas.openxmlformats.org/drawingml/2006/main">
               <a:ext uri="{FF2B5EF4-FFF2-40B4-BE49-F238E27FC236}">
-                <a16:creationId xmlns:a16="http://schemas.microsoft.com/office/drawing/2014/main" id="{F6AFB70E-32DE-4758-A131-7C8ABC48CEEA}"/>
+                <a16:creationId xmlns:a16="http://schemas.microsoft.com/office/drawing/2014/main" id="{7F66F11D-1B61-45D1-A40D-4D8712BE9C79}"/>
               </a:ext>
             </a:extLst>
           </p:cNvPr>
@@ -9086,7 +9086,7 @@
     </p:spTree>
     <p:extLst>
       <p:ext uri="{BB962C8B-B14F-4D97-AF65-F5344CB8AC3E}">
-        <p14:creationId xmlns:p14="http://schemas.microsoft.com/office/powerpoint/2010/main" val="42723800"/>
+        <p14:creationId xmlns:p14="http://schemas.microsoft.com/office/powerpoint/2010/main" val="1990599206"/>
       </p:ext>
     </p:extLst>
   </p:cSld>
@@ -9117,7 +9117,7 @@
           <p:cNvPr id="17" name="">
             <a:extLst xmlns:a="http://schemas.openxmlformats.org/drawingml/2006/main">
               <a:ext uri="{FF2B5EF4-FFF2-40B4-BE49-F238E27FC236}">
-                <a16:creationId xmlns:a16="http://schemas.microsoft.com/office/drawing/2014/main" id="{2547B29C-6557-424B-BE5D-7D10DECCB3D5}"/>
+                <a16:creationId xmlns:a16="http://schemas.microsoft.com/office/drawing/2014/main" id="{0C483E3A-1CFC-4BD1-B496-2EBFDE75265D}"/>
               </a:ext>
             </a:extLst>
           </p:cNvPr>
@@ -9175,7 +9175,7 @@
           <p:cNvPr id="2" name="">
             <a:extLst xmlns:a="http://schemas.openxmlformats.org/drawingml/2006/main">
               <a:ext uri="{FF2B5EF4-FFF2-40B4-BE49-F238E27FC236}">
-                <a16:creationId xmlns:a16="http://schemas.microsoft.com/office/drawing/2014/main" id="{184E13D0-02C6-4996-8E68-A8EE512EF7E4}"/>
+                <a16:creationId xmlns:a16="http://schemas.microsoft.com/office/drawing/2014/main" id="{3A548538-1AD7-4246-829B-EA6E082B9FEE}"/>
               </a:ext>
             </a:extLst>
           </p:cNvPr>
@@ -9233,7 +9233,7 @@
           <p:cNvPr id="3" name="">
             <a:extLst xmlns:a="http://schemas.openxmlformats.org/drawingml/2006/main">
               <a:ext uri="{FF2B5EF4-FFF2-40B4-BE49-F238E27FC236}">
-                <a16:creationId xmlns:a16="http://schemas.microsoft.com/office/drawing/2014/main" id="{04BA0BAE-914D-47B1-B014-059CCCEDC937}"/>
+                <a16:creationId xmlns:a16="http://schemas.microsoft.com/office/drawing/2014/main" id="{DABEB50C-EFF1-45A4-8708-E97C1DCC0C1F}"/>
               </a:ext>
             </a:extLst>
           </p:cNvPr>
@@ -9264,7 +9264,7 @@
           <p:cNvPr id="4" name="">
             <a:extLst xmlns:a="http://schemas.openxmlformats.org/drawingml/2006/main">
               <a:ext uri="{FF2B5EF4-FFF2-40B4-BE49-F238E27FC236}">
-                <a16:creationId xmlns:a16="http://schemas.microsoft.com/office/drawing/2014/main" id="{15E4F3EB-5050-4E3D-920B-C21CEBE2BEA3}"/>
+                <a16:creationId xmlns:a16="http://schemas.microsoft.com/office/drawing/2014/main" id="{82EBEFE7-2C95-4BD5-AAAE-05F9716DA105}"/>
               </a:ext>
             </a:extLst>
           </p:cNvPr>
@@ -9322,7 +9322,7 @@
           <p:cNvPr id="5" name="">
             <a:extLst xmlns:a="http://schemas.openxmlformats.org/drawingml/2006/main">
               <a:ext uri="{FF2B5EF4-FFF2-40B4-BE49-F238E27FC236}">
-                <a16:creationId xmlns:a16="http://schemas.microsoft.com/office/drawing/2014/main" id="{C1872C87-03D1-4378-A0DF-5E87A41B63C6}"/>
+                <a16:creationId xmlns:a16="http://schemas.microsoft.com/office/drawing/2014/main" id="{BD5F0807-A144-45F6-B162-035ED204CA9B}"/>
               </a:ext>
             </a:extLst>
           </p:cNvPr>
@@ -9495,7 +9495,7 @@
           <p:cNvPr id="6" name="">
             <a:extLst xmlns:a="http://schemas.openxmlformats.org/drawingml/2006/main">
               <a:ext uri="{FF2B5EF4-FFF2-40B4-BE49-F238E27FC236}">
-                <a16:creationId xmlns:a16="http://schemas.microsoft.com/office/drawing/2014/main" id="{B13E454F-6B3A-4157-A5DD-3E687D0AC904}"/>
+                <a16:creationId xmlns:a16="http://schemas.microsoft.com/office/drawing/2014/main" id="{F1BF5160-F74E-4797-9F46-3A067F05BA80}"/>
               </a:ext>
             </a:extLst>
           </p:cNvPr>
@@ -9528,7 +9528,7 @@
           <p:cNvPr id="7" name="">
             <a:extLst xmlns:a="http://schemas.openxmlformats.org/drawingml/2006/main">
               <a:ext uri="{FF2B5EF4-FFF2-40B4-BE49-F238E27FC236}">
-                <a16:creationId xmlns:a16="http://schemas.microsoft.com/office/drawing/2014/main" id="{1CECD5C4-8600-4949-93DD-D365605D1004}"/>
+                <a16:creationId xmlns:a16="http://schemas.microsoft.com/office/drawing/2014/main" id="{C4320C08-011C-48E3-8F0F-5BC1F32232CD}"/>
               </a:ext>
             </a:extLst>
           </p:cNvPr>
@@ -9586,7 +9586,7 @@
           <p:cNvPr id="8" name="">
             <a:extLst xmlns:a="http://schemas.openxmlformats.org/drawingml/2006/main">
               <a:ext uri="{FF2B5EF4-FFF2-40B4-BE49-F238E27FC236}">
-                <a16:creationId xmlns:a16="http://schemas.microsoft.com/office/drawing/2014/main" id="{22FE35AD-A821-421D-9957-D2E0CC27E0C4}"/>
+                <a16:creationId xmlns:a16="http://schemas.microsoft.com/office/drawing/2014/main" id="{8CA60592-088B-45D7-AD7B-D6A06712B458}"/>
               </a:ext>
             </a:extLst>
           </p:cNvPr>
@@ -9644,7 +9644,7 @@
           <p:cNvPr id="9" name="">
             <a:extLst xmlns:a="http://schemas.openxmlformats.org/drawingml/2006/main">
               <a:ext uri="{FF2B5EF4-FFF2-40B4-BE49-F238E27FC236}">
-                <a16:creationId xmlns:a16="http://schemas.microsoft.com/office/drawing/2014/main" id="{9948110B-372D-4A99-901A-CEC727FBB33C}"/>
+                <a16:creationId xmlns:a16="http://schemas.microsoft.com/office/drawing/2014/main" id="{97816634-E223-4789-80F6-3D9E46BACA2E}"/>
               </a:ext>
             </a:extLst>
           </p:cNvPr>
@@ -9675,7 +9675,7 @@
           <p:cNvPr id="10" name="">
             <a:extLst xmlns:a="http://schemas.openxmlformats.org/drawingml/2006/main">
               <a:ext uri="{FF2B5EF4-FFF2-40B4-BE49-F238E27FC236}">
-                <a16:creationId xmlns:a16="http://schemas.microsoft.com/office/drawing/2014/main" id="{8B39ABA7-A21D-4C63-A3CE-EE94A91E36F1}"/>
+                <a16:creationId xmlns:a16="http://schemas.microsoft.com/office/drawing/2014/main" id="{674099F7-078E-40A9-8C64-79CB4278B88C}"/>
               </a:ext>
             </a:extLst>
           </p:cNvPr>
@@ -9733,7 +9733,7 @@
           <p:cNvPr id="11" name="">
             <a:extLst xmlns:a="http://schemas.openxmlformats.org/drawingml/2006/main">
               <a:ext uri="{FF2B5EF4-FFF2-40B4-BE49-F238E27FC236}">
-                <a16:creationId xmlns:a16="http://schemas.microsoft.com/office/drawing/2014/main" id="{30CB247C-4F89-468E-A11B-C2774C0B0EEF}"/>
+                <a16:creationId xmlns:a16="http://schemas.microsoft.com/office/drawing/2014/main" id="{298AD491-D76C-4E9F-AFC4-E9B527EC9BAF}"/>
               </a:ext>
             </a:extLst>
           </p:cNvPr>
@@ -9764,7 +9764,7 @@
           <p:cNvPr id="12" name="">
             <a:extLst xmlns:a="http://schemas.openxmlformats.org/drawingml/2006/main">
               <a:ext uri="{FF2B5EF4-FFF2-40B4-BE49-F238E27FC236}">
-                <a16:creationId xmlns:a16="http://schemas.microsoft.com/office/drawing/2014/main" id="{45C0AC4F-9769-4B6E-94AD-8B3777BD8A70}"/>
+                <a16:creationId xmlns:a16="http://schemas.microsoft.com/office/drawing/2014/main" id="{E03BAE22-5635-4927-953D-34A20864803B}"/>
               </a:ext>
             </a:extLst>
           </p:cNvPr>
@@ -9797,7 +9797,7 @@
           <p:cNvPr id="13" name="">
             <a:extLst xmlns:a="http://schemas.openxmlformats.org/drawingml/2006/main">
               <a:ext uri="{FF2B5EF4-FFF2-40B4-BE49-F238E27FC236}">
-                <a16:creationId xmlns:a16="http://schemas.microsoft.com/office/drawing/2014/main" id="{55342091-F7DB-484E-977A-13B1910933FA}"/>
+                <a16:creationId xmlns:a16="http://schemas.microsoft.com/office/drawing/2014/main" id="{D6225E0C-A134-4250-8091-12C297CB2B34}"/>
               </a:ext>
             </a:extLst>
           </p:cNvPr>
@@ -9855,7 +9855,7 @@
           <p:cNvPr id="14" name="">
             <a:extLst xmlns:a="http://schemas.openxmlformats.org/drawingml/2006/main">
               <a:ext uri="{FF2B5EF4-FFF2-40B4-BE49-F238E27FC236}">
-                <a16:creationId xmlns:a16="http://schemas.microsoft.com/office/drawing/2014/main" id="{4ED2A76B-9CEC-41D5-9058-2F4ABA4E7CFA}"/>
+                <a16:creationId xmlns:a16="http://schemas.microsoft.com/office/drawing/2014/main" id="{47253D02-7EA8-48F1-9C57-D500E4FCA29B}"/>
               </a:ext>
             </a:extLst>
           </p:cNvPr>
@@ -9913,7 +9913,7 @@
           <p:cNvPr id="15" name="">
             <a:extLst xmlns:a="http://schemas.openxmlformats.org/drawingml/2006/main">
               <a:ext uri="{FF2B5EF4-FFF2-40B4-BE49-F238E27FC236}">
-                <a16:creationId xmlns:a16="http://schemas.microsoft.com/office/drawing/2014/main" id="{BF291D45-E722-4E14-9E85-144425B44338}"/>
+                <a16:creationId xmlns:a16="http://schemas.microsoft.com/office/drawing/2014/main" id="{B225FEE2-6F8B-419D-A59C-1456C5610B32}"/>
               </a:ext>
             </a:extLst>
           </p:cNvPr>
@@ -9971,7 +9971,7 @@
           <p:cNvPr id="16" name="">
             <a:extLst xmlns:a="http://schemas.openxmlformats.org/drawingml/2006/main">
               <a:ext uri="{FF2B5EF4-FFF2-40B4-BE49-F238E27FC236}">
-                <a16:creationId xmlns:a16="http://schemas.microsoft.com/office/drawing/2014/main" id="{A3D9878A-90EA-471B-9C90-F8EF84AABCBD}"/>
+                <a16:creationId xmlns:a16="http://schemas.microsoft.com/office/drawing/2014/main" id="{A61BC667-A3CF-41D6-8C48-AC0749B697C9}"/>
               </a:ext>
             </a:extLst>
           </p:cNvPr>
@@ -10027,7 +10027,7 @@
     </p:spTree>
     <p:extLst>
       <p:ext uri="{BB962C8B-B14F-4D97-AF65-F5344CB8AC3E}">
-        <p14:creationId xmlns:p14="http://schemas.microsoft.com/office/powerpoint/2010/main" val="951547944"/>
+        <p14:creationId xmlns:p14="http://schemas.microsoft.com/office/powerpoint/2010/main" val="533634095"/>
       </p:ext>
     </p:extLst>
   </p:cSld>
@@ -10058,7 +10058,7 @@
           <p:cNvPr id="21" name="eyebrow-9">
             <a:extLst xmlns:a="http://schemas.openxmlformats.org/drawingml/2006/main">
               <a:ext uri="{FF2B5EF4-FFF2-40B4-BE49-F238E27FC236}">
-                <a16:creationId xmlns:a16="http://schemas.microsoft.com/office/drawing/2014/main" id="{498A7FB7-820C-450F-A8D2-44F40B867202}"/>
+                <a16:creationId xmlns:a16="http://schemas.microsoft.com/office/drawing/2014/main" id="{D1E70C76-236A-47AD-9B22-EFC7BDA4DF9E}"/>
               </a:ext>
             </a:extLst>
           </p:cNvPr>
@@ -10116,7 +10116,7 @@
           <p:cNvPr id="2" name="title-9">
             <a:extLst xmlns:a="http://schemas.openxmlformats.org/drawingml/2006/main">
               <a:ext uri="{FF2B5EF4-FFF2-40B4-BE49-F238E27FC236}">
-                <a16:creationId xmlns:a16="http://schemas.microsoft.com/office/drawing/2014/main" id="{E7075225-AFD0-46BD-8A23-38612D8D025A}"/>
+                <a16:creationId xmlns:a16="http://schemas.microsoft.com/office/drawing/2014/main" id="{2D251A08-0CBE-4E0A-BFFB-3118977E6E32}"/>
               </a:ext>
             </a:extLst>
           </p:cNvPr>
@@ -10174,7 +10174,7 @@
           <p:cNvPr id="3" name="">
             <a:extLst xmlns:a="http://schemas.openxmlformats.org/drawingml/2006/main">
               <a:ext uri="{FF2B5EF4-FFF2-40B4-BE49-F238E27FC236}">
-                <a16:creationId xmlns:a16="http://schemas.microsoft.com/office/drawing/2014/main" id="{9F1F3219-409C-414B-BE9B-C1037F05A90D}"/>
+                <a16:creationId xmlns:a16="http://schemas.microsoft.com/office/drawing/2014/main" id="{82F04B4F-1557-4308-807B-3109C2FAD289}"/>
               </a:ext>
             </a:extLst>
           </p:cNvPr>
@@ -10205,7 +10205,7 @@
           <p:cNvPr id="4" name="">
             <a:extLst xmlns:a="http://schemas.openxmlformats.org/drawingml/2006/main">
               <a:ext uri="{FF2B5EF4-FFF2-40B4-BE49-F238E27FC236}">
-                <a16:creationId xmlns:a16="http://schemas.microsoft.com/office/drawing/2014/main" id="{4D8766CE-2A93-402D-A5AC-62EACF5D6A5E}"/>
+                <a16:creationId xmlns:a16="http://schemas.microsoft.com/office/drawing/2014/main" id="{6DC981F9-F8B0-4C7D-BAE9-B25CF952E6DD}"/>
               </a:ext>
             </a:extLst>
           </p:cNvPr>
@@ -10263,7 +10263,7 @@
           <p:cNvPr id="5" name="">
             <a:extLst xmlns:a="http://schemas.openxmlformats.org/drawingml/2006/main">
               <a:ext uri="{FF2B5EF4-FFF2-40B4-BE49-F238E27FC236}">
-                <a16:creationId xmlns:a16="http://schemas.microsoft.com/office/drawing/2014/main" id="{C215A34A-9C15-45B6-B65F-E08CA14A93D0}"/>
+                <a16:creationId xmlns:a16="http://schemas.microsoft.com/office/drawing/2014/main" id="{7F8E8247-3DC1-4F65-82D6-CE78C1233DE8}"/>
               </a:ext>
             </a:extLst>
           </p:cNvPr>
@@ -10296,7 +10296,7 @@
           <p:cNvPr id="6" name="">
             <a:extLst xmlns:a="http://schemas.openxmlformats.org/drawingml/2006/main">
               <a:ext uri="{FF2B5EF4-FFF2-40B4-BE49-F238E27FC236}">
-                <a16:creationId xmlns:a16="http://schemas.microsoft.com/office/drawing/2014/main" id="{0BC1FC09-E580-4484-97CC-67F03CEBDD61}"/>
+                <a16:creationId xmlns:a16="http://schemas.microsoft.com/office/drawing/2014/main" id="{62938DEE-0E3E-40DE-AD29-30094C4DE524}"/>
               </a:ext>
             </a:extLst>
           </p:cNvPr>
@@ -10354,7 +10354,7 @@
           <p:cNvPr id="7" name="">
             <a:extLst xmlns:a="http://schemas.openxmlformats.org/drawingml/2006/main">
               <a:ext uri="{FF2B5EF4-FFF2-40B4-BE49-F238E27FC236}">
-                <a16:creationId xmlns:a16="http://schemas.microsoft.com/office/drawing/2014/main" id="{8FB65C8A-0B3D-4969-8B98-DBBF65C5309B}"/>
+                <a16:creationId xmlns:a16="http://schemas.microsoft.com/office/drawing/2014/main" id="{1F84497E-9458-46B8-8527-A4F26936432C}"/>
               </a:ext>
             </a:extLst>
           </p:cNvPr>
@@ -10412,7 +10412,7 @@
           <p:cNvPr id="8" name="">
             <a:extLst xmlns:a="http://schemas.openxmlformats.org/drawingml/2006/main">
               <a:ext uri="{FF2B5EF4-FFF2-40B4-BE49-F238E27FC236}">
-                <a16:creationId xmlns:a16="http://schemas.microsoft.com/office/drawing/2014/main" id="{C1BEAD2E-5895-4D68-BB5D-EB559C76C014}"/>
+                <a16:creationId xmlns:a16="http://schemas.microsoft.com/office/drawing/2014/main" id="{D34F12E6-1086-429F-8F3D-229907615286}"/>
               </a:ext>
             </a:extLst>
           </p:cNvPr>
@@ -10445,7 +10445,7 @@
           <p:cNvPr id="9" name="">
             <a:extLst xmlns:a="http://schemas.openxmlformats.org/drawingml/2006/main">
               <a:ext uri="{FF2B5EF4-FFF2-40B4-BE49-F238E27FC236}">
-                <a16:creationId xmlns:a16="http://schemas.microsoft.com/office/drawing/2014/main" id="{998EE01E-ACF6-41CF-8ABB-8B57C588FA87}"/>
+                <a16:creationId xmlns:a16="http://schemas.microsoft.com/office/drawing/2014/main" id="{830E34F4-C8E2-48C0-8F3F-CEDF04584039}"/>
               </a:ext>
             </a:extLst>
           </p:cNvPr>
@@ -10503,7 +10503,7 @@
           <p:cNvPr id="10" name="">
             <a:extLst xmlns:a="http://schemas.openxmlformats.org/drawingml/2006/main">
               <a:ext uri="{FF2B5EF4-FFF2-40B4-BE49-F238E27FC236}">
-                <a16:creationId xmlns:a16="http://schemas.microsoft.com/office/drawing/2014/main" id="{08CFA2DD-D46F-485F-AFD1-D0CAB4611607}"/>
+                <a16:creationId xmlns:a16="http://schemas.microsoft.com/office/drawing/2014/main" id="{54A7BF59-565F-4D6D-BB0B-46A2567B5CDE}"/>
               </a:ext>
             </a:extLst>
           </p:cNvPr>
@@ -10561,7 +10561,7 @@
           <p:cNvPr id="11" name="">
             <a:extLst xmlns:a="http://schemas.openxmlformats.org/drawingml/2006/main">
               <a:ext uri="{FF2B5EF4-FFF2-40B4-BE49-F238E27FC236}">
-                <a16:creationId xmlns:a16="http://schemas.microsoft.com/office/drawing/2014/main" id="{2213D610-377D-4F83-B5DB-3BBF496519CB}"/>
+                <a16:creationId xmlns:a16="http://schemas.microsoft.com/office/drawing/2014/main" id="{03EF14E1-42A5-4265-A137-2D5A2F005B61}"/>
               </a:ext>
             </a:extLst>
           </p:cNvPr>
@@ -10594,7 +10594,7 @@
           <p:cNvPr id="12" name="">
             <a:extLst xmlns:a="http://schemas.openxmlformats.org/drawingml/2006/main">
               <a:ext uri="{FF2B5EF4-FFF2-40B4-BE49-F238E27FC236}">
-                <a16:creationId xmlns:a16="http://schemas.microsoft.com/office/drawing/2014/main" id="{9631E04A-CE98-4901-B5CA-FB1A88F913F5}"/>
+                <a16:creationId xmlns:a16="http://schemas.microsoft.com/office/drawing/2014/main" id="{D9666064-4BE7-4363-9936-6B561EF3945A}"/>
               </a:ext>
             </a:extLst>
           </p:cNvPr>
@@ -10652,7 +10652,7 @@
           <p:cNvPr id="13" name="">
             <a:extLst xmlns:a="http://schemas.openxmlformats.org/drawingml/2006/main">
               <a:ext uri="{FF2B5EF4-FFF2-40B4-BE49-F238E27FC236}">
-                <a16:creationId xmlns:a16="http://schemas.microsoft.com/office/drawing/2014/main" id="{A8E0FD1D-4925-4CFB-8716-1094C06F6639}"/>
+                <a16:creationId xmlns:a16="http://schemas.microsoft.com/office/drawing/2014/main" id="{D7FFAF34-DDF9-4336-ACE7-FF0DC3B2FF53}"/>
               </a:ext>
             </a:extLst>
           </p:cNvPr>
@@ -10710,7 +10710,7 @@
           <p:cNvPr id="14" name="">
             <a:extLst xmlns:a="http://schemas.openxmlformats.org/drawingml/2006/main">
               <a:ext uri="{FF2B5EF4-FFF2-40B4-BE49-F238E27FC236}">
-                <a16:creationId xmlns:a16="http://schemas.microsoft.com/office/drawing/2014/main" id="{6DE9D8B9-CD59-45F7-BBD1-B389F9E1EA10}"/>
+                <a16:creationId xmlns:a16="http://schemas.microsoft.com/office/drawing/2014/main" id="{7497EDF5-71BF-47DE-A5BB-A6338180AF7E}"/>
               </a:ext>
             </a:extLst>
           </p:cNvPr>
@@ -10768,7 +10768,7 @@
           <p:cNvPr id="15" name="">
             <a:extLst xmlns:a="http://schemas.openxmlformats.org/drawingml/2006/main">
               <a:ext uri="{FF2B5EF4-FFF2-40B4-BE49-F238E27FC236}">
-                <a16:creationId xmlns:a16="http://schemas.microsoft.com/office/drawing/2014/main" id="{736008D5-811A-4A9C-950B-3B7A5BF2EBA0}"/>
+                <a16:creationId xmlns:a16="http://schemas.microsoft.com/office/drawing/2014/main" id="{4DC0155C-517E-4301-9ECF-C9D84AB069C4}"/>
               </a:ext>
             </a:extLst>
           </p:cNvPr>
@@ -10826,7 +10826,7 @@
           <p:cNvPr id="16" name="">
             <a:extLst xmlns:a="http://schemas.openxmlformats.org/drawingml/2006/main">
               <a:ext uri="{FF2B5EF4-FFF2-40B4-BE49-F238E27FC236}">
-                <a16:creationId xmlns:a16="http://schemas.microsoft.com/office/drawing/2014/main" id="{791C371F-835F-4EB6-A9DC-64E168F1A859}"/>
+                <a16:creationId xmlns:a16="http://schemas.microsoft.com/office/drawing/2014/main" id="{DA3B8C83-F13F-47B2-88B8-CA931EB59DE6}"/>
               </a:ext>
             </a:extLst>
           </p:cNvPr>
@@ -10884,7 +10884,7 @@
           <p:cNvPr id="17" name="">
             <a:extLst xmlns:a="http://schemas.openxmlformats.org/drawingml/2006/main">
               <a:ext uri="{FF2B5EF4-FFF2-40B4-BE49-F238E27FC236}">
-                <a16:creationId xmlns:a16="http://schemas.microsoft.com/office/drawing/2014/main" id="{BDBF1C50-CD36-4E76-9AB8-359FA258616D}"/>
+                <a16:creationId xmlns:a16="http://schemas.microsoft.com/office/drawing/2014/main" id="{CBEF868A-15B1-49BB-B7DE-3F5ACA1D5389}"/>
               </a:ext>
             </a:extLst>
           </p:cNvPr>
@@ -10915,7 +10915,7 @@
           <p:cNvPr id="18" name="">
             <a:extLst xmlns:a="http://schemas.openxmlformats.org/drawingml/2006/main">
               <a:ext uri="{FF2B5EF4-FFF2-40B4-BE49-F238E27FC236}">
-                <a16:creationId xmlns:a16="http://schemas.microsoft.com/office/drawing/2014/main" id="{9577A98F-1E95-472A-9660-9EB2A52E22AF}"/>
+                <a16:creationId xmlns:a16="http://schemas.microsoft.com/office/drawing/2014/main" id="{429B9B13-F967-4406-AB5E-BC50C3113AEC}"/>
               </a:ext>
             </a:extLst>
           </p:cNvPr>
@@ -10973,7 +10973,7 @@
           <p:cNvPr id="19" name="">
             <a:extLst xmlns:a="http://schemas.openxmlformats.org/drawingml/2006/main">
               <a:ext uri="{FF2B5EF4-FFF2-40B4-BE49-F238E27FC236}">
-                <a16:creationId xmlns:a16="http://schemas.microsoft.com/office/drawing/2014/main" id="{E770F1BE-53B6-4EF6-8F8C-97F769C20639}"/>
+                <a16:creationId xmlns:a16="http://schemas.microsoft.com/office/drawing/2014/main" id="{266ACCD2-9624-4248-A7CC-3D8BE494206D}"/>
               </a:ext>
             </a:extLst>
           </p:cNvPr>
@@ -11031,7 +11031,7 @@
           <p:cNvPr id="20" name="footer-9">
             <a:extLst xmlns:a="http://schemas.openxmlformats.org/drawingml/2006/main">
               <a:ext uri="{FF2B5EF4-FFF2-40B4-BE49-F238E27FC236}">
-                <a16:creationId xmlns:a16="http://schemas.microsoft.com/office/drawing/2014/main" id="{A1F3AD16-CAC2-45F1-B8AD-CEBD503C698B}"/>
+                <a16:creationId xmlns:a16="http://schemas.microsoft.com/office/drawing/2014/main" id="{ED2D5424-4682-4888-B811-422496260CF8}"/>
               </a:ext>
             </a:extLst>
           </p:cNvPr>
@@ -11087,7 +11087,7 @@
     </p:spTree>
     <p:extLst>
       <p:ext uri="{BB962C8B-B14F-4D97-AF65-F5344CB8AC3E}">
-        <p14:creationId xmlns:p14="http://schemas.microsoft.com/office/powerpoint/2010/main" val="1637517494"/>
+        <p14:creationId xmlns:p14="http://schemas.microsoft.com/office/powerpoint/2010/main" val="1950465081"/>
       </p:ext>
     </p:extLst>
   </p:cSld>
